--- a/reports/ytd-road-to-9m.pptx
+++ b/reports/ytd-road-to-9m.pptx
@@ -2949,7 +2949,7 @@
           <a:p>
             <a:r>
               <a:rPr lang="en-US" dirty="0"/>
-              <a:t>Now the part worth staying for. &lt;break time="0.8s"/&gt; Nine million is the goal. &lt;break time="0.5s"/&gt; Everything above it is shared. &lt;break time="0.8s"/&gt; For every two hundred thousand pounds over nine million, &lt;break time="0.5s"/&gt; five thousand pounds each. &lt;break time="0.9s"/&gt; Nine point two million is five thousand. &lt;break time="0.5s"/&gt; Nine point six is fifteen. &lt;break time="0.6s"/&gt; And ten million &lt;break time="0.4s"/&gt; is twenty five thousand pounds each. &lt;break time="1s"/&gt;</a:t>
+              <a:t>Now the part worth staying for. &lt;break time="0.8s"/&gt; Nine million is the goal. &lt;break time="0.5s"/&gt; Everything above it is shared between the four of you. &lt;break time="0.6s"/&gt; Emily, &lt;break time="0.25s"/&gt; Stuart, &lt;break time="0.25s"/&gt; Cassie &lt;break time="0.25s"/&gt; and Megan. &lt;break time="0.9s"/&gt; For every two hundred thousand over nine million, &lt;break time="0.5s"/&gt; five thousand pounds each. &lt;break time="0.8s"/&gt; Nine point six million is fifteen thousand. &lt;break time="0.6s"/&gt; And ten million &lt;break time="0.4s"/&gt; is twenty five thousand pounds each. &lt;break time="1s"/&gt;</a:t>
             </a:r>
             <a:endParaRPr lang="en-US" dirty="0"/>
           </a:p>
@@ -7244,7 +7244,7 @@
                 <a:ea typeface="Calibri" pitchFamily="34" charset="-122"/>
                 <a:cs typeface="Calibri" pitchFamily="34" charset="-120"/>
               </a:rPr>
-              <a:t>The nine million is the goal. Everything above it is shared — and it steps up every two hundred thousand.</a:t>
+              <a:t>For Emily, Stuart, Cassie and Megan. Nine million is the goal — everything above it is shared, and it steps up every two hundred thousand.</a:t>
             </a:r>
             <a:endParaRPr lang="en-US" sz="1500" dirty="0"/>
           </a:p>
@@ -7258,8 +7258,8 @@
         </p:nvSpPr>
         <p:spPr>
           <a:xfrm>
-            <a:off x="548640" y="2286000"/>
-            <a:ext cx="2103120" cy="2286000"/>
+            <a:off x="548640" y="2331720"/>
+            <a:ext cx="2103120" cy="2240280"/>
           </a:xfrm>
           <a:prstGeom prst="rect">
             <a:avLst/>
@@ -7283,8 +7283,8 @@
         </p:nvSpPr>
         <p:spPr>
           <a:xfrm>
-            <a:off x="731520" y="2487168"/>
-            <a:ext cx="1737360" cy="365760"/>
+            <a:off x="685800" y="2505456"/>
+            <a:ext cx="1828800" cy="310896"/>
           </a:xfrm>
           <a:prstGeom prst="rect">
             <a:avLst/>
@@ -7322,8 +7322,8 @@
         </p:nvSpPr>
         <p:spPr>
           <a:xfrm>
-            <a:off x="685800" y="3017520"/>
-            <a:ext cx="1828800" cy="685800"/>
+            <a:off x="658368" y="2907792"/>
+            <a:ext cx="1883664" cy="658368"/>
           </a:xfrm>
           <a:prstGeom prst="rect">
             <a:avLst/>
@@ -7339,7 +7339,7 @@
               <a:buNone/>
             </a:pPr>
             <a:r>
-              <a:rPr lang="en-US" sz="2800" b="1" dirty="0">
+              <a:rPr lang="en-US" sz="2700" b="1" dirty="0">
                 <a:solidFill>
                   <a:srgbClr val="E7EEEC"/>
                 </a:solidFill>
@@ -7349,7 +7349,7 @@
               </a:rPr>
               <a:t>£5,000</a:t>
             </a:r>
-            <a:endParaRPr lang="en-US" sz="2800" dirty="0"/>
+            <a:endParaRPr lang="en-US" sz="2700" dirty="0"/>
           </a:p>
         </p:txBody>
       </p:sp>
@@ -7361,8 +7361,8 @@
         </p:nvSpPr>
         <p:spPr>
           <a:xfrm>
-            <a:off x="731520" y="3794760"/>
-            <a:ext cx="1737360" cy="274320"/>
+            <a:off x="685800" y="3584448"/>
+            <a:ext cx="1828800" cy="256032"/>
           </a:xfrm>
           <a:prstGeom prst="rect">
             <a:avLst/>
@@ -7394,14 +7394,53 @@
       </p:sp>
       <p:sp>
         <p:nvSpPr>
-          <p:cNvPr id="9" name="Shape 7"/>
+          <p:cNvPr id="9" name="Text 7"/>
+          <p:cNvSpPr txBox="1"/>
+          <p:nvPr/>
+        </p:nvSpPr>
+        <p:spPr>
+          <a:xfrm>
+            <a:off x="658368" y="3968496"/>
+            <a:ext cx="1883664" cy="274320"/>
+          </a:xfrm>
+          <a:prstGeom prst="rect">
+            <a:avLst/>
+          </a:prstGeom>
+          <a:noFill/>
+          <a:ln/>
+        </p:spPr>
+        <p:txBody>
+          <a:bodyPr wrap="square" lIns="0" tIns="0" rIns="0" bIns="0" rtlCol="0" anchor="ctr"/>
+          <a:lstStyle/>
+          <a:p>
+            <a:pPr algn="ctr" indent="0" marL="0">
+              <a:buNone/>
+            </a:pPr>
+            <a:r>
+              <a:rPr lang="en-US" sz="1100" b="1" dirty="0">
+                <a:solidFill>
+                  <a:srgbClr val="0E8A94"/>
+                </a:solidFill>
+                <a:latin typeface="Courier New" pitchFamily="34" charset="0"/>
+                <a:ea typeface="Courier New" pitchFamily="34" charset="-122"/>
+                <a:cs typeface="Courier New" pitchFamily="34" charset="-120"/>
+              </a:rPr>
+              <a:t>£20,000 in total</a:t>
+            </a:r>
+            <a:endParaRPr lang="en-US" sz="1100" dirty="0"/>
+          </a:p>
+        </p:txBody>
+      </p:sp>
+      <p:sp>
+        <p:nvSpPr>
+          <p:cNvPr id="10" name="Shape 8"/>
           <p:cNvSpPr/>
           <p:nvPr/>
         </p:nvSpPr>
         <p:spPr>
           <a:xfrm>
-            <a:off x="2807208" y="2286000"/>
-            <a:ext cx="2103120" cy="2286000"/>
+            <a:off x="2807208" y="2331720"/>
+            <a:ext cx="2103120" cy="2240280"/>
           </a:xfrm>
           <a:prstGeom prst="rect">
             <a:avLst/>
@@ -7419,14 +7458,14 @@
       </p:sp>
       <p:sp>
         <p:nvSpPr>
-          <p:cNvPr id="10" name="Text 8"/>
-          <p:cNvSpPr txBox="1"/>
-          <p:nvPr/>
-        </p:nvSpPr>
-        <p:spPr>
-          <a:xfrm>
-            <a:off x="2990088" y="2487168"/>
-            <a:ext cx="1737360" cy="365760"/>
+          <p:cNvPr id="11" name="Text 9"/>
+          <p:cNvSpPr txBox="1"/>
+          <p:nvPr/>
+        </p:nvSpPr>
+        <p:spPr>
+          <a:xfrm>
+            <a:off x="2944368" y="2505456"/>
+            <a:ext cx="1828800" cy="310896"/>
           </a:xfrm>
           <a:prstGeom prst="rect">
             <a:avLst/>
@@ -7458,14 +7497,14 @@
       </p:sp>
       <p:sp>
         <p:nvSpPr>
-          <p:cNvPr id="11" name="Text 9"/>
-          <p:cNvSpPr txBox="1"/>
-          <p:nvPr/>
-        </p:nvSpPr>
-        <p:spPr>
-          <a:xfrm>
-            <a:off x="2944368" y="3017520"/>
-            <a:ext cx="1828800" cy="685800"/>
+          <p:cNvPr id="12" name="Text 10"/>
+          <p:cNvSpPr txBox="1"/>
+          <p:nvPr/>
+        </p:nvSpPr>
+        <p:spPr>
+          <a:xfrm>
+            <a:off x="2916936" y="2907792"/>
+            <a:ext cx="1883664" cy="658368"/>
           </a:xfrm>
           <a:prstGeom prst="rect">
             <a:avLst/>
@@ -7481,7 +7520,7 @@
               <a:buNone/>
             </a:pPr>
             <a:r>
-              <a:rPr lang="en-US" sz="2800" b="1" dirty="0">
+              <a:rPr lang="en-US" sz="2700" b="1" dirty="0">
                 <a:solidFill>
                   <a:srgbClr val="E7EEEC"/>
                 </a:solidFill>
@@ -7491,20 +7530,20 @@
               </a:rPr>
               <a:t>£10,000</a:t>
             </a:r>
-            <a:endParaRPr lang="en-US" sz="2800" dirty="0"/>
-          </a:p>
-        </p:txBody>
-      </p:sp>
-      <p:sp>
-        <p:nvSpPr>
-          <p:cNvPr id="12" name="Text 10"/>
-          <p:cNvSpPr txBox="1"/>
-          <p:nvPr/>
-        </p:nvSpPr>
-        <p:spPr>
-          <a:xfrm>
-            <a:off x="2990088" y="3794760"/>
-            <a:ext cx="1737360" cy="274320"/>
+            <a:endParaRPr lang="en-US" sz="2700" dirty="0"/>
+          </a:p>
+        </p:txBody>
+      </p:sp>
+      <p:sp>
+        <p:nvSpPr>
+          <p:cNvPr id="13" name="Text 11"/>
+          <p:cNvSpPr txBox="1"/>
+          <p:nvPr/>
+        </p:nvSpPr>
+        <p:spPr>
+          <a:xfrm>
+            <a:off x="2944368" y="3584448"/>
+            <a:ext cx="1828800" cy="256032"/>
           </a:xfrm>
           <a:prstGeom prst="rect">
             <a:avLst/>
@@ -7536,14 +7575,53 @@
       </p:sp>
       <p:sp>
         <p:nvSpPr>
-          <p:cNvPr id="13" name="Shape 11"/>
+          <p:cNvPr id="14" name="Text 12"/>
+          <p:cNvSpPr txBox="1"/>
+          <p:nvPr/>
+        </p:nvSpPr>
+        <p:spPr>
+          <a:xfrm>
+            <a:off x="2916936" y="3968496"/>
+            <a:ext cx="1883664" cy="274320"/>
+          </a:xfrm>
+          <a:prstGeom prst="rect">
+            <a:avLst/>
+          </a:prstGeom>
+          <a:noFill/>
+          <a:ln/>
+        </p:spPr>
+        <p:txBody>
+          <a:bodyPr wrap="square" lIns="0" tIns="0" rIns="0" bIns="0" rtlCol="0" anchor="ctr"/>
+          <a:lstStyle/>
+          <a:p>
+            <a:pPr algn="ctr" indent="0" marL="0">
+              <a:buNone/>
+            </a:pPr>
+            <a:r>
+              <a:rPr lang="en-US" sz="1100" b="1" dirty="0">
+                <a:solidFill>
+                  <a:srgbClr val="0E8A94"/>
+                </a:solidFill>
+                <a:latin typeface="Courier New" pitchFamily="34" charset="0"/>
+                <a:ea typeface="Courier New" pitchFamily="34" charset="-122"/>
+                <a:cs typeface="Courier New" pitchFamily="34" charset="-120"/>
+              </a:rPr>
+              <a:t>£40,000 in total</a:t>
+            </a:r>
+            <a:endParaRPr lang="en-US" sz="1100" dirty="0"/>
+          </a:p>
+        </p:txBody>
+      </p:sp>
+      <p:sp>
+        <p:nvSpPr>
+          <p:cNvPr id="15" name="Shape 13"/>
           <p:cNvSpPr/>
           <p:nvPr/>
         </p:nvSpPr>
         <p:spPr>
           <a:xfrm>
-            <a:off x="5065776" y="2286000"/>
-            <a:ext cx="2103120" cy="2286000"/>
+            <a:off x="5065776" y="2331720"/>
+            <a:ext cx="2103120" cy="2240280"/>
           </a:xfrm>
           <a:prstGeom prst="rect">
             <a:avLst/>
@@ -7561,14 +7639,14 @@
       </p:sp>
       <p:sp>
         <p:nvSpPr>
-          <p:cNvPr id="14" name="Text 12"/>
-          <p:cNvSpPr txBox="1"/>
-          <p:nvPr/>
-        </p:nvSpPr>
-        <p:spPr>
-          <a:xfrm>
-            <a:off x="5248656" y="2487168"/>
-            <a:ext cx="1737360" cy="365760"/>
+          <p:cNvPr id="16" name="Text 14"/>
+          <p:cNvSpPr txBox="1"/>
+          <p:nvPr/>
+        </p:nvSpPr>
+        <p:spPr>
+          <a:xfrm>
+            <a:off x="5202936" y="2505456"/>
+            <a:ext cx="1828800" cy="310896"/>
           </a:xfrm>
           <a:prstGeom prst="rect">
             <a:avLst/>
@@ -7600,14 +7678,14 @@
       </p:sp>
       <p:sp>
         <p:nvSpPr>
-          <p:cNvPr id="15" name="Text 13"/>
-          <p:cNvSpPr txBox="1"/>
-          <p:nvPr/>
-        </p:nvSpPr>
-        <p:spPr>
-          <a:xfrm>
-            <a:off x="5202936" y="3017520"/>
-            <a:ext cx="1828800" cy="685800"/>
+          <p:cNvPr id="17" name="Text 15"/>
+          <p:cNvSpPr txBox="1"/>
+          <p:nvPr/>
+        </p:nvSpPr>
+        <p:spPr>
+          <a:xfrm>
+            <a:off x="5175504" y="2907792"/>
+            <a:ext cx="1883664" cy="658368"/>
           </a:xfrm>
           <a:prstGeom prst="rect">
             <a:avLst/>
@@ -7623,7 +7701,7 @@
               <a:buNone/>
             </a:pPr>
             <a:r>
-              <a:rPr lang="en-US" sz="2800" b="1" dirty="0">
+              <a:rPr lang="en-US" sz="2700" b="1" dirty="0">
                 <a:solidFill>
                   <a:srgbClr val="E7EEEC"/>
                 </a:solidFill>
@@ -7633,20 +7711,20 @@
               </a:rPr>
               <a:t>£15,000</a:t>
             </a:r>
-            <a:endParaRPr lang="en-US" sz="2800" dirty="0"/>
-          </a:p>
-        </p:txBody>
-      </p:sp>
-      <p:sp>
-        <p:nvSpPr>
-          <p:cNvPr id="16" name="Text 14"/>
-          <p:cNvSpPr txBox="1"/>
-          <p:nvPr/>
-        </p:nvSpPr>
-        <p:spPr>
-          <a:xfrm>
-            <a:off x="5248656" y="3794760"/>
-            <a:ext cx="1737360" cy="274320"/>
+            <a:endParaRPr lang="en-US" sz="2700" dirty="0"/>
+          </a:p>
+        </p:txBody>
+      </p:sp>
+      <p:sp>
+        <p:nvSpPr>
+          <p:cNvPr id="18" name="Text 16"/>
+          <p:cNvSpPr txBox="1"/>
+          <p:nvPr/>
+        </p:nvSpPr>
+        <p:spPr>
+          <a:xfrm>
+            <a:off x="5202936" y="3584448"/>
+            <a:ext cx="1828800" cy="256032"/>
           </a:xfrm>
           <a:prstGeom prst="rect">
             <a:avLst/>
@@ -7678,14 +7756,53 @@
       </p:sp>
       <p:sp>
         <p:nvSpPr>
-          <p:cNvPr id="17" name="Shape 15"/>
+          <p:cNvPr id="19" name="Text 17"/>
+          <p:cNvSpPr txBox="1"/>
+          <p:nvPr/>
+        </p:nvSpPr>
+        <p:spPr>
+          <a:xfrm>
+            <a:off x="5175504" y="3968496"/>
+            <a:ext cx="1883664" cy="274320"/>
+          </a:xfrm>
+          <a:prstGeom prst="rect">
+            <a:avLst/>
+          </a:prstGeom>
+          <a:noFill/>
+          <a:ln/>
+        </p:spPr>
+        <p:txBody>
+          <a:bodyPr wrap="square" lIns="0" tIns="0" rIns="0" bIns="0" rtlCol="0" anchor="ctr"/>
+          <a:lstStyle/>
+          <a:p>
+            <a:pPr algn="ctr" indent="0" marL="0">
+              <a:buNone/>
+            </a:pPr>
+            <a:r>
+              <a:rPr lang="en-US" sz="1100" b="1" dirty="0">
+                <a:solidFill>
+                  <a:srgbClr val="0E8A94"/>
+                </a:solidFill>
+                <a:latin typeface="Courier New" pitchFamily="34" charset="0"/>
+                <a:ea typeface="Courier New" pitchFamily="34" charset="-122"/>
+                <a:cs typeface="Courier New" pitchFamily="34" charset="-120"/>
+              </a:rPr>
+              <a:t>£60,000 in total</a:t>
+            </a:r>
+            <a:endParaRPr lang="en-US" sz="1100" dirty="0"/>
+          </a:p>
+        </p:txBody>
+      </p:sp>
+      <p:sp>
+        <p:nvSpPr>
+          <p:cNvPr id="20" name="Shape 18"/>
           <p:cNvSpPr/>
           <p:nvPr/>
         </p:nvSpPr>
         <p:spPr>
           <a:xfrm>
-            <a:off x="7324344" y="2286000"/>
-            <a:ext cx="2103120" cy="2286000"/>
+            <a:off x="7324344" y="2331720"/>
+            <a:ext cx="2103120" cy="2240280"/>
           </a:xfrm>
           <a:prstGeom prst="rect">
             <a:avLst/>
@@ -7703,14 +7820,14 @@
       </p:sp>
       <p:sp>
         <p:nvSpPr>
-          <p:cNvPr id="18" name="Text 16"/>
-          <p:cNvSpPr txBox="1"/>
-          <p:nvPr/>
-        </p:nvSpPr>
-        <p:spPr>
-          <a:xfrm>
-            <a:off x="7507224" y="2487168"/>
-            <a:ext cx="1737360" cy="365760"/>
+          <p:cNvPr id="21" name="Text 19"/>
+          <p:cNvSpPr txBox="1"/>
+          <p:nvPr/>
+        </p:nvSpPr>
+        <p:spPr>
+          <a:xfrm>
+            <a:off x="7461504" y="2505456"/>
+            <a:ext cx="1828800" cy="310896"/>
           </a:xfrm>
           <a:prstGeom prst="rect">
             <a:avLst/>
@@ -7742,14 +7859,14 @@
       </p:sp>
       <p:sp>
         <p:nvSpPr>
-          <p:cNvPr id="19" name="Text 17"/>
-          <p:cNvSpPr txBox="1"/>
-          <p:nvPr/>
-        </p:nvSpPr>
-        <p:spPr>
-          <a:xfrm>
-            <a:off x="7461504" y="3017520"/>
-            <a:ext cx="1828800" cy="685800"/>
+          <p:cNvPr id="22" name="Text 20"/>
+          <p:cNvSpPr txBox="1"/>
+          <p:nvPr/>
+        </p:nvSpPr>
+        <p:spPr>
+          <a:xfrm>
+            <a:off x="7434072" y="2907792"/>
+            <a:ext cx="1883664" cy="658368"/>
           </a:xfrm>
           <a:prstGeom prst="rect">
             <a:avLst/>
@@ -7765,7 +7882,7 @@
               <a:buNone/>
             </a:pPr>
             <a:r>
-              <a:rPr lang="en-US" sz="2800" b="1" dirty="0">
+              <a:rPr lang="en-US" sz="2700" b="1" dirty="0">
                 <a:solidFill>
                   <a:srgbClr val="E7EEEC"/>
                 </a:solidFill>
@@ -7775,20 +7892,20 @@
               </a:rPr>
               <a:t>£20,000</a:t>
             </a:r>
-            <a:endParaRPr lang="en-US" sz="2800" dirty="0"/>
-          </a:p>
-        </p:txBody>
-      </p:sp>
-      <p:sp>
-        <p:nvSpPr>
-          <p:cNvPr id="20" name="Text 18"/>
-          <p:cNvSpPr txBox="1"/>
-          <p:nvPr/>
-        </p:nvSpPr>
-        <p:spPr>
-          <a:xfrm>
-            <a:off x="7507224" y="3794760"/>
-            <a:ext cx="1737360" cy="274320"/>
+            <a:endParaRPr lang="en-US" sz="2700" dirty="0"/>
+          </a:p>
+        </p:txBody>
+      </p:sp>
+      <p:sp>
+        <p:nvSpPr>
+          <p:cNvPr id="23" name="Text 21"/>
+          <p:cNvSpPr txBox="1"/>
+          <p:nvPr/>
+        </p:nvSpPr>
+        <p:spPr>
+          <a:xfrm>
+            <a:off x="7461504" y="3584448"/>
+            <a:ext cx="1828800" cy="256032"/>
           </a:xfrm>
           <a:prstGeom prst="rect">
             <a:avLst/>
@@ -7820,14 +7937,53 @@
       </p:sp>
       <p:sp>
         <p:nvSpPr>
-          <p:cNvPr id="21" name="Shape 19"/>
+          <p:cNvPr id="24" name="Text 22"/>
+          <p:cNvSpPr txBox="1"/>
+          <p:nvPr/>
+        </p:nvSpPr>
+        <p:spPr>
+          <a:xfrm>
+            <a:off x="7434072" y="3968496"/>
+            <a:ext cx="1883664" cy="274320"/>
+          </a:xfrm>
+          <a:prstGeom prst="rect">
+            <a:avLst/>
+          </a:prstGeom>
+          <a:noFill/>
+          <a:ln/>
+        </p:spPr>
+        <p:txBody>
+          <a:bodyPr wrap="square" lIns="0" tIns="0" rIns="0" bIns="0" rtlCol="0" anchor="ctr"/>
+          <a:lstStyle/>
+          <a:p>
+            <a:pPr algn="ctr" indent="0" marL="0">
+              <a:buNone/>
+            </a:pPr>
+            <a:r>
+              <a:rPr lang="en-US" sz="1100" b="1" dirty="0">
+                <a:solidFill>
+                  <a:srgbClr val="0E8A94"/>
+                </a:solidFill>
+                <a:latin typeface="Courier New" pitchFamily="34" charset="0"/>
+                <a:ea typeface="Courier New" pitchFamily="34" charset="-122"/>
+                <a:cs typeface="Courier New" pitchFamily="34" charset="-120"/>
+              </a:rPr>
+              <a:t>£80,000 in total</a:t>
+            </a:r>
+            <a:endParaRPr lang="en-US" sz="1100" dirty="0"/>
+          </a:p>
+        </p:txBody>
+      </p:sp>
+      <p:sp>
+        <p:nvSpPr>
+          <p:cNvPr id="25" name="Shape 23"/>
           <p:cNvSpPr/>
           <p:nvPr/>
         </p:nvSpPr>
         <p:spPr>
           <a:xfrm>
-            <a:off x="9582912" y="2286000"/>
-            <a:ext cx="2103120" cy="2286000"/>
+            <a:off x="9582912" y="2331720"/>
+            <a:ext cx="2103120" cy="2240280"/>
           </a:xfrm>
           <a:prstGeom prst="rect">
             <a:avLst/>
@@ -7845,14 +8001,14 @@
       </p:sp>
       <p:sp>
         <p:nvSpPr>
-          <p:cNvPr id="22" name="Text 20"/>
-          <p:cNvSpPr txBox="1"/>
-          <p:nvPr/>
-        </p:nvSpPr>
-        <p:spPr>
-          <a:xfrm>
-            <a:off x="9765792" y="2487168"/>
-            <a:ext cx="1737360" cy="365760"/>
+          <p:cNvPr id="26" name="Text 24"/>
+          <p:cNvSpPr txBox="1"/>
+          <p:nvPr/>
+        </p:nvSpPr>
+        <p:spPr>
+          <a:xfrm>
+            <a:off x="9720072" y="2505456"/>
+            <a:ext cx="1828800" cy="310896"/>
           </a:xfrm>
           <a:prstGeom prst="rect">
             <a:avLst/>
@@ -7884,14 +8040,14 @@
       </p:sp>
       <p:sp>
         <p:nvSpPr>
-          <p:cNvPr id="23" name="Text 21"/>
-          <p:cNvSpPr txBox="1"/>
-          <p:nvPr/>
-        </p:nvSpPr>
-        <p:spPr>
-          <a:xfrm>
-            <a:off x="9720072" y="3017520"/>
-            <a:ext cx="1828800" cy="685800"/>
+          <p:cNvPr id="27" name="Text 25"/>
+          <p:cNvSpPr txBox="1"/>
+          <p:nvPr/>
+        </p:nvSpPr>
+        <p:spPr>
+          <a:xfrm>
+            <a:off x="9692640" y="2907792"/>
+            <a:ext cx="1883664" cy="658368"/>
           </a:xfrm>
           <a:prstGeom prst="rect">
             <a:avLst/>
@@ -7907,7 +8063,7 @@
               <a:buNone/>
             </a:pPr>
             <a:r>
-              <a:rPr lang="en-US" sz="3200" b="1" dirty="0">
+              <a:rPr lang="en-US" sz="3100" b="1" dirty="0">
                 <a:solidFill>
                   <a:srgbClr val="14201E"/>
                 </a:solidFill>
@@ -7917,20 +8073,20 @@
               </a:rPr>
               <a:t>£25,000</a:t>
             </a:r>
-            <a:endParaRPr lang="en-US" sz="3200" dirty="0"/>
-          </a:p>
-        </p:txBody>
-      </p:sp>
-      <p:sp>
-        <p:nvSpPr>
-          <p:cNvPr id="24" name="Text 22"/>
-          <p:cNvSpPr txBox="1"/>
-          <p:nvPr/>
-        </p:nvSpPr>
-        <p:spPr>
-          <a:xfrm>
-            <a:off x="9765792" y="3794760"/>
-            <a:ext cx="1737360" cy="274320"/>
+            <a:endParaRPr lang="en-US" sz="3100" dirty="0"/>
+          </a:p>
+        </p:txBody>
+      </p:sp>
+      <p:sp>
+        <p:nvSpPr>
+          <p:cNvPr id="28" name="Text 26"/>
+          <p:cNvSpPr txBox="1"/>
+          <p:nvPr/>
+        </p:nvSpPr>
+        <p:spPr>
+          <a:xfrm>
+            <a:off x="9720072" y="3584448"/>
+            <a:ext cx="1828800" cy="256032"/>
           </a:xfrm>
           <a:prstGeom prst="rect">
             <a:avLst/>
@@ -7962,14 +8118,14 @@
       </p:sp>
       <p:sp>
         <p:nvSpPr>
-          <p:cNvPr id="25" name="Text 23"/>
-          <p:cNvSpPr txBox="1"/>
-          <p:nvPr/>
-        </p:nvSpPr>
-        <p:spPr>
-          <a:xfrm>
-            <a:off x="9720072" y="4114800"/>
-            <a:ext cx="1828800" cy="274320"/>
+          <p:cNvPr id="29" name="Text 27"/>
+          <p:cNvSpPr txBox="1"/>
+          <p:nvPr/>
+        </p:nvSpPr>
+        <p:spPr>
+          <a:xfrm>
+            <a:off x="9692640" y="3968496"/>
+            <a:ext cx="1883664" cy="274320"/>
           </a:xfrm>
           <a:prstGeom prst="rect">
             <a:avLst/>
@@ -7985,30 +8141,69 @@
               <a:buNone/>
             </a:pPr>
             <a:r>
-              <a:rPr lang="en-US" sz="1100" b="1" i="1" dirty="0">
+              <a:rPr lang="en-US" sz="1100" b="1" dirty="0">
                 <a:solidFill>
                   <a:srgbClr val="14201E"/>
+                </a:solidFill>
+                <a:latin typeface="Courier New" pitchFamily="34" charset="0"/>
+                <a:ea typeface="Courier New" pitchFamily="34" charset="-122"/>
+                <a:cs typeface="Courier New" pitchFamily="34" charset="-120"/>
+              </a:rPr>
+              <a:t>£100,000 in total</a:t>
+            </a:r>
+            <a:endParaRPr lang="en-US" sz="1100" dirty="0"/>
+          </a:p>
+        </p:txBody>
+      </p:sp>
+      <p:sp>
+        <p:nvSpPr>
+          <p:cNvPr id="30" name="Text 28"/>
+          <p:cNvSpPr txBox="1"/>
+          <p:nvPr/>
+        </p:nvSpPr>
+        <p:spPr>
+          <a:xfrm>
+            <a:off x="548640" y="4846320"/>
+            <a:ext cx="11091672" cy="457200"/>
+          </a:xfrm>
+          <a:prstGeom prst="rect">
+            <a:avLst/>
+          </a:prstGeom>
+          <a:noFill/>
+          <a:ln/>
+        </p:spPr>
+        <p:txBody>
+          <a:bodyPr wrap="square" lIns="0" tIns="0" rIns="0" bIns="0" rtlCol="0" anchor="ctr"/>
+          <a:lstStyle/>
+          <a:p>
+            <a:pPr indent="0" marL="0">
+              <a:buNone/>
+            </a:pPr>
+            <a:r>
+              <a:rPr lang="en-US" sz="1500" dirty="0">
+                <a:solidFill>
+                  <a:srgbClr val="E7EEEC"/>
                 </a:solidFill>
                 <a:latin typeface="Calibri" pitchFamily="34" charset="0"/>
                 <a:ea typeface="Calibri" pitchFamily="34" charset="-122"/>
                 <a:cs typeface="Calibri" pitchFamily="34" charset="-120"/>
               </a:rPr>
-              <a:t>the one to aim at</a:t>
-            </a:r>
-            <a:endParaRPr lang="en-US" sz="1100" dirty="0"/>
-          </a:p>
-        </p:txBody>
-      </p:sp>
-      <p:sp>
-        <p:nvSpPr>
-          <p:cNvPr id="26" name="Text 24"/>
-          <p:cNvSpPr txBox="1"/>
-          <p:nvPr/>
-        </p:nvSpPr>
-        <p:spPr>
-          <a:xfrm>
-            <a:off x="548640" y="4892040"/>
-            <a:ext cx="11091672" cy="457200"/>
+              <a:t>Ten million means £25,000 each — £100,000 shared between the four of you, out of £1,000,000 of fee income above the goal.</a:t>
+            </a:r>
+            <a:endParaRPr lang="en-US" sz="1500" dirty="0"/>
+          </a:p>
+        </p:txBody>
+      </p:sp>
+      <p:sp>
+        <p:nvSpPr>
+          <p:cNvPr id="31" name="Text 29"/>
+          <p:cNvSpPr txBox="1"/>
+          <p:nvPr/>
+        </p:nvSpPr>
+        <p:spPr>
+          <a:xfrm>
+            <a:off x="548640" y="5897880"/>
+            <a:ext cx="11091672" cy="411480"/>
           </a:xfrm>
           <a:prstGeom prst="rect">
             <a:avLst/>
@@ -8024,54 +8219,15 @@
               <a:buNone/>
             </a:pPr>
             <a:r>
-              <a:rPr lang="en-US" sz="1500" dirty="0">
-                <a:solidFill>
-                  <a:srgbClr val="E7EEEC"/>
+              <a:rPr lang="en-US" sz="1100" i="1" dirty="0">
+                <a:solidFill>
+                  <a:srgbClr val="8FA3A0"/>
                 </a:solidFill>
                 <a:latin typeface="Calibri" pitchFamily="34" charset="0"/>
                 <a:ea typeface="Calibri" pitchFamily="34" charset="-122"/>
                 <a:cs typeface="Calibri" pitchFamily="34" charset="-120"/>
               </a:rPr>
-              <a:t>Ten million means twenty five thousand pounds each. That is one million pounds of fee income above the goal — and roughly a June, four times over, plus a little more.</a:t>
-            </a:r>
-            <a:endParaRPr lang="en-US" sz="1500" dirty="0"/>
-          </a:p>
-        </p:txBody>
-      </p:sp>
-      <p:sp>
-        <p:nvSpPr>
-          <p:cNvPr id="27" name="Text 25"/>
-          <p:cNvSpPr txBox="1"/>
-          <p:nvPr/>
-        </p:nvSpPr>
-        <p:spPr>
-          <a:xfrm>
-            <a:off x="548640" y="5943600"/>
-            <a:ext cx="11091672" cy="365760"/>
-          </a:xfrm>
-          <a:prstGeom prst="rect">
-            <a:avLst/>
-          </a:prstGeom>
-          <a:noFill/>
-          <a:ln/>
-        </p:spPr>
-        <p:txBody>
-          <a:bodyPr wrap="square" lIns="0" tIns="0" rIns="0" bIns="0" rtlCol="0" anchor="ctr"/>
-          <a:lstStyle/>
-          <a:p>
-            <a:pPr indent="0" marL="0">
-              <a:buNone/>
-            </a:pPr>
-            <a:r>
-              <a:rPr lang="en-US" sz="1100" i="1" dirty="0">
-                <a:solidFill>
-                  <a:srgbClr val="8FA3A0"/>
-                </a:solidFill>
-                <a:latin typeface="Calibri" pitchFamily="34" charset="0"/>
-                <a:ea typeface="Calibri" pitchFamily="34" charset="-122"/>
-                <a:cs typeface="Calibri" pitchFamily="34" charset="-120"/>
-              </a:rPr>
-              <a:t>Scheme applies per team manager. Confirm eligibility, the payment date, and whether the trigger is invoiced fees or cash collected, before this is announced beyond this room.</a:t>
+              <a:t>The scheme pays 10% of everything above £9m, at every rung. Confirm the payment date and whether the trigger is invoiced fees or cash collected before this is announced.</a:t>
             </a:r>
             <a:endParaRPr lang="en-US" sz="1100" dirty="0"/>
           </a:p>
@@ -8646,7 +8802,7 @@
                 <a:ea typeface="Calibri" pitchFamily="34" charset="-122"/>
                 <a:cs typeface="Calibri" pitchFamily="34" charset="-120"/>
               </a:rPr>
-              <a:t>each, if we get there</a:t>
+              <a:t>each for Emily, Stuart, Cassie and Megan</a:t>
             </a:r>
             <a:endParaRPr lang="en-US" sz="1200" dirty="0"/>
           </a:p>

--- a/reports/ytd-road-to-9m.pptx
+++ b/reports/ytd-road-to-9m.pptx
@@ -2597,7 +2597,7 @@
           <a:p>
             <a:r>
               <a:rPr lang="en-US" dirty="0"/>
-              <a:t>Put the three quarters side by side. &lt;break time="0.7s"/&gt; Seventy four per cent, &lt;break time="0.4s"/&gt; then ninety two, &lt;break time="0.4s"/&gt; then sixty four. &lt;break time="0.8s"/&gt; We recovered in quarter two and then gave it back in July and August. &lt;break time="0.7s"/&gt; Those two months together came in at just over half of target. &lt;break time="0.9s"/&gt;</a:t>
+              <a:t>Put the three quarters side by side. &lt;break time="0.7s"/&gt; Seventy four per cent, &lt;break time="0.4s"/&gt; then ninety two, &lt;break time="0.4s"/&gt; then sixty four. &lt;break time="0.8s"/&gt; We recovered in quarter two and then gave it back in July and August. &lt;break time="0.7s"/&gt; Just over half of target between them. &lt;break time="0.9s"/&gt;</a:t>
             </a:r>
             <a:endParaRPr lang="en-US" dirty="0"/>
           </a:p>
@@ -2949,7 +2949,7 @@
           <a:p>
             <a:r>
               <a:rPr lang="en-US" dirty="0"/>
-              <a:t>Now the part worth staying for. &lt;break time="0.8s"/&gt; Nine million is the goal. &lt;break time="0.5s"/&gt; Everything above it is shared between the four of you. &lt;break time="0.6s"/&gt; Emily, &lt;break time="0.25s"/&gt; Stuart, &lt;break time="0.25s"/&gt; Cassie &lt;break time="0.25s"/&gt; and Megan. &lt;break time="0.9s"/&gt; For every two hundred thousand over nine million, &lt;break time="0.5s"/&gt; five thousand pounds each. &lt;break time="0.8s"/&gt; Nine point six million is fifteen thousand. &lt;break time="0.6s"/&gt; And ten million &lt;break time="0.4s"/&gt; is twenty five thousand pounds each. &lt;break time="1s"/&gt;</a:t>
+              <a:t>Now the part worth staying for. &lt;break time="0.8s"/&gt; Nine million is the goal. &lt;break time="0.5s"/&gt; Everything above it is shared between the four of you. &lt;break time="0.6s"/&gt; Emily, &lt;break time="0.25s"/&gt; Stuart, &lt;break time="0.25s"/&gt; Cassie &lt;break time="0.25s"/&gt; and Megan. &lt;break time="0.9s"/&gt; For every two hundred thousand over nine million, &lt;break time="0.5s"/&gt; five thousand pounds each. &lt;break time="0.8s"/&gt; Nine point six million is fifteen thousand. &lt;break time="0.6s"/&gt; And ten million &lt;break time="0.4s"/&gt; is twenty five thousand pounds each. &lt;break time="0.8s"/&gt; Measured on invoiced fees. &lt;break time="0.9s"/&gt;</a:t>
             </a:r>
             <a:endParaRPr lang="en-US" dirty="0"/>
           </a:p>
@@ -8227,7 +8227,7 @@
                 <a:ea typeface="Calibri" pitchFamily="34" charset="-122"/>
                 <a:cs typeface="Calibri" pitchFamily="34" charset="-120"/>
               </a:rPr>
-              <a:t>The scheme pays 10% of everything above £9m, at every rung. Confirm the payment date and whether the trigger is invoiced fees or cash collected before this is announced.</a:t>
+              <a:t>Measured on fees invoiced, not cash collected. The scheme pays 10% of everything above £9m at every rung. Payment date to be confirmed.</a:t>
             </a:r>
             <a:endParaRPr lang="en-US" sz="1100" dirty="0"/>
           </a:p>

--- a/reports/ytd-road-to-9m.pptx
+++ b/reports/ytd-road-to-9m.pptx
@@ -14,9 +14,10 @@
     <p:sldId id="262" r:id="rId8"/>
     <p:sldId id="263" r:id="rId9"/>
     <p:sldId id="264" r:id="rId10"/>
+    <p:sldId id="265" r:id="rId11"/>
   </p:sldIdLst>
   <p:notesMasterIdLst>
-    <p:notesMasterId r:id="rId11"/>
+    <p:notesMasterId r:id="rId12"/>
   </p:notesMasterIdLst>
   <p:sldSz cx="12192000" cy="6858000"/>
   <p:notesSz cx="6858000" cy="12192000"/>
@@ -2333,7 +2334,7 @@
           <a:p>
             <a:r>
               <a:rPr lang="en-US" dirty="0"/>
-              <a:t>Good morning. &lt;break time="0.7s"/&gt; This is where we stand for the year, &lt;break time="0.4s"/&gt; and what it takes to finish at nine million. &lt;break time="0.9s"/&gt; Five point eight eight million invoiced to the sixth of September. &lt;break time="0.6s"/&gt; Sixty five per cent of the way. &lt;break time="0.7s"/&gt; Three point one two million still to go. &lt;break time="0.9s"/&gt;</a:t>
+              <a:t>Good morning. &lt;break time="0.7s"/&gt; This is where we stand, &lt;break time="0.4s"/&gt; and what it takes to finish at nine million. &lt;break time="0.9s"/&gt; Five point eight eight million invoiced to the sixth of September. &lt;break time="0.6s"/&gt; Sixty five per cent of the way. &lt;break time="0.7s"/&gt; Three point one two million still to go. &lt;break time="0.9s"/&gt;</a:t>
             </a:r>
             <a:endParaRPr lang="en-US" dirty="0"/>
           </a:p>
@@ -2357,6 +2358,94 @@
             <a:fld id="{F7021451-1387-4CA6-816F-3879F97B5CBC}" type="slidenum">
               <a:rPr lang="en-US"/>
               <a:t>1</a:t>
+            </a:fld>
+            <a:endParaRPr lang="en-US"/>
+          </a:p>
+        </p:txBody>
+      </p:sp>
+    </p:spTree>
+    <p:extLst>
+      <p:ext uri="{BB962C8B-B14F-4D97-AF65-F5344CB8AC3E}">
+        <p14:creationId xmlns:p14="http://schemas.microsoft.com/office/powerpoint/2010/main" val="1024086991"/>
+      </p:ext>
+    </p:extLst>
+  </p:cSld>
+  <p:clrMapOvr>
+    <a:masterClrMapping/>
+  </p:clrMapOvr>
+</p:notes>
+</file>
+
+<file path=ppt/notesSlides/notesSlide10.xml><?xml version="1.0" encoding="utf-8"?>
+<p:notes xmlns:a="http://schemas.openxmlformats.org/drawingml/2006/main" xmlns:r="http://schemas.openxmlformats.org/officeDocument/2006/relationships" xmlns:p="http://schemas.openxmlformats.org/presentationml/2006/main">
+  <p:cSld>
+    <p:spTree>
+      <p:nvGrpSpPr>
+        <p:cNvPr id="1" name=""/>
+        <p:cNvGrpSpPr/>
+        <p:nvPr/>
+      </p:nvGrpSpPr>
+      <p:grpSpPr>
+        <a:xfrm>
+          <a:off x="0" y="0"/>
+          <a:ext cx="0" cy="0"/>
+          <a:chOff x="0" y="0"/>
+          <a:chExt cx="0" cy="0"/>
+        </a:xfrm>
+      </p:grpSpPr>
+      <p:sp>
+        <p:nvSpPr>
+          <p:cNvPr id="2" name="Slide Image Placeholder 1"/>
+          <p:cNvSpPr>
+            <a:spLocks noGrp="1" noRot="1" noChangeAspect="1"/>
+          </p:cNvSpPr>
+          <p:nvPr>
+            <p:ph type="sldImg"/>
+          </p:nvPr>
+        </p:nvSpPr>
+        <p:spPr/>
+      </p:sp>
+      <p:sp>
+        <p:nvSpPr>
+          <p:cNvPr id="3" name="Notes Placeholder 2"/>
+          <p:cNvSpPr>
+            <a:spLocks noGrp="1"/>
+          </p:cNvSpPr>
+          <p:nvPr>
+            <p:ph type="body" idx="1"/>
+          </p:nvPr>
+        </p:nvSpPr>
+        <p:spPr/>
+        <p:txBody>
+          <a:bodyPr/>
+          <a:lstStyle/>
+          <a:p>
+            <a:r>
+              <a:rPr lang="en-US" dirty="0"/>
+              <a:t>Let us be straight about ten million. &lt;break time="0.7s"/&gt; Nine million needs a sixteen per cent uplift. &lt;break time="0.6s"/&gt; Ten million needs fifty four per cent. &lt;break time="0.8s"/&gt; It is a stretch. &lt;break time="0.4s"/&gt; It is not impossible. &lt;break time="0.7s"/&gt; But only if quarter four looks nothing like July and August. &lt;break time="0.8s"/&gt; Nine million is the commitment. &lt;break time="0.5s"/&gt; Ten million is the prize. &lt;break time="0.5s"/&gt; Thank you.</a:t>
+            </a:r>
+            <a:endParaRPr lang="en-US" dirty="0"/>
+          </a:p>
+        </p:txBody>
+      </p:sp>
+      <p:sp>
+        <p:nvSpPr>
+          <p:cNvPr id="4" name="Slide Number Placeholder 3"/>
+          <p:cNvSpPr>
+            <a:spLocks noGrp="1"/>
+          </p:cNvSpPr>
+          <p:nvPr>
+            <p:ph type="sldNum" sz="quarter" idx="10"/>
+          </p:nvPr>
+        </p:nvSpPr>
+        <p:spPr/>
+        <p:txBody>
+          <a:bodyPr/>
+          <a:lstStyle/>
+          <a:p>
+            <a:fld id="{F7021451-1387-4CA6-816F-3879F97B5CBC}" type="slidenum">
+              <a:rPr lang="en-US"/>
+              <a:t>10</a:t>
             </a:fld>
             <a:endParaRPr lang="en-US"/>
           </a:p>
@@ -2509,7 +2598,7 @@
           <a:p>
             <a:r>
               <a:rPr lang="en-US" dirty="0"/>
-              <a:t>Quarter two was much better. &lt;break time="0.6s"/&gt; Two point three four million against two point five five. &lt;break time="0.6s"/&gt; Ninety two per cent. &lt;break time="0.7s"/&gt; April was within two thousand pounds of target, &lt;break time="0.4s"/&gt; and June was our best month of the year at eight hundred and forty eight thousand. &lt;break time="0.9s"/&gt;</a:t>
+              <a:t>Quarter two was much better. &lt;break time="0.6s"/&gt; Ninety two per cent of target. &lt;break time="0.7s"/&gt; April was on target, &lt;break time="0.4s"/&gt; and June was our best month of the year at eight hundred and forty eight thousand. &lt;break time="0.9s"/&gt;</a:t>
             </a:r>
             <a:endParaRPr lang="en-US" dirty="0"/>
           </a:p>
@@ -2597,7 +2686,7 @@
           <a:p>
             <a:r>
               <a:rPr lang="en-US" dirty="0"/>
-              <a:t>Put the three quarters side by side. &lt;break time="0.7s"/&gt; Seventy four per cent, &lt;break time="0.4s"/&gt; then ninety two, &lt;break time="0.4s"/&gt; then sixty four. &lt;break time="0.8s"/&gt; We recovered in quarter two and then gave it back in July and August. &lt;break time="0.7s"/&gt; Just over half of target between them. &lt;break time="0.9s"/&gt;</a:t>
+              <a:t>Seventy four per cent, &lt;break time="0.4s"/&gt; then ninety two, &lt;break time="0.4s"/&gt; then sixty four. &lt;break time="0.8s"/&gt; We recovered in quarter two and then gave it back in July and August. &lt;break time="0.7s"/&gt; Just over half of target between them. &lt;break time="0.9s"/&gt;</a:t>
             </a:r>
             <a:endParaRPr lang="en-US" dirty="0"/>
           </a:p>
@@ -2861,7 +2950,7 @@
           <a:p>
             <a:r>
               <a:rPr lang="en-US" dirty="0"/>
-              <a:t>The whole year in one picture. &lt;break time="0.7s"/&gt; Teal is what we have invoiced. &lt;break time="0.5s"/&gt; Gold is what is still required. &lt;break time="0.8s"/&gt; Eight hundred and twenty one thousand a month, &lt;break time="0.4s"/&gt; for four months. &lt;break time="0.8s"/&gt; Our best month this year was June, &lt;break time="0.4s"/&gt; at eight hundred and forty eight thousand. &lt;break time="0.7s"/&gt; So we need a June. &lt;break time="0.5s"/&gt; Four times over. &lt;break time="0.9s"/&gt;</a:t>
+              <a:t>The whole year in one picture. &lt;break time="0.7s"/&gt; Teal is invoiced, gold is what is still required. &lt;break time="0.8s"/&gt; Eight hundred and twenty one thousand a month, &lt;break time="0.4s"/&gt; for four months. &lt;break time="0.8s"/&gt; Our best month this year was June, &lt;break time="0.4s"/&gt; at eight hundred and forty eight thousand. &lt;break time="0.7s"/&gt; So we need a June. &lt;break time="0.5s"/&gt; Four times over. &lt;break time="0.9s"/&gt;</a:t>
             </a:r>
             <a:endParaRPr lang="en-US" dirty="0"/>
           </a:p>
@@ -2949,7 +3038,7 @@
           <a:p>
             <a:r>
               <a:rPr lang="en-US" dirty="0"/>
-              <a:t>Now the part worth staying for. &lt;break time="0.8s"/&gt; Nine million is the goal. &lt;break time="0.5s"/&gt; Everything above it is shared between the four of you. &lt;break time="0.6s"/&gt; Emily, &lt;break time="0.25s"/&gt; Stuart, &lt;break time="0.25s"/&gt; Cassie &lt;break time="0.25s"/&gt; and Megan. &lt;break time="0.9s"/&gt; For every two hundred thousand over nine million, &lt;break time="0.5s"/&gt; five thousand pounds each. &lt;break time="0.8s"/&gt; Nine point six million is fifteen thousand. &lt;break time="0.6s"/&gt; And ten million &lt;break time="0.4s"/&gt; is twenty five thousand pounds each. &lt;break time="0.8s"/&gt; Measured on invoiced fees. &lt;break time="0.9s"/&gt;</a:t>
+              <a:t>Now, specifically. &lt;break time="0.7s"/&gt; Your number for October, November and December is here. &lt;break time="0.8s"/&gt; The same lift for everyone. &lt;break time="0.5s"/&gt; Sixteen point six per cent. &lt;break time="0.8s"/&gt; Find your line. &lt;break time="0.6s"/&gt; That is your number. &lt;break time="0.9s"/&gt;</a:t>
             </a:r>
             <a:endParaRPr lang="en-US" dirty="0"/>
           </a:p>
@@ -3037,7 +3126,7 @@
           <a:p>
             <a:r>
               <a:rPr lang="en-US" dirty="0"/>
-              <a:t>Let us be straight about ten million. &lt;break time="0.7s"/&gt; Nine million needs a sixteen per cent uplift. &lt;break time="0.6s"/&gt; Ten million needs fifty four per cent, &lt;break time="0.5s"/&gt; above the best month we have had. &lt;break time="0.8s"/&gt; It is a stretch. &lt;break time="0.4s"/&gt; It is not impossible. &lt;break time="0.7s"/&gt; But only if quarter four looks nothing like July and August. &lt;break time="0.8s"/&gt; Nine million is the commitment. &lt;break time="0.5s"/&gt; Ten million is the prize. &lt;break time="0.5s"/&gt; Thank you.</a:t>
+              <a:t>Now the part worth staying for. &lt;break time="0.8s"/&gt; Nine million is the goal. &lt;break time="0.5s"/&gt; Everything above it is shared between the four of you. &lt;break time="0.6s"/&gt; Emily, &lt;break time="0.25s"/&gt; Stuart, &lt;break time="0.25s"/&gt; Cassie &lt;break time="0.25s"/&gt; and Megan. &lt;break time="0.9s"/&gt; For every two hundred thousand over nine million, &lt;break time="0.5s"/&gt; five thousand pounds each. &lt;break time="0.8s"/&gt; Nine point six million is fifteen thousand. &lt;break time="0.6s"/&gt; And ten million &lt;break time="0.4s"/&gt; is twenty five thousand pounds each. &lt;break time="0.8s"/&gt; Measured on invoiced fees. &lt;break time="0.9s"/&gt;</a:t>
             </a:r>
             <a:endParaRPr lang="en-US" dirty="0"/>
           </a:p>
@@ -4000,6 +4089,773 @@
 </p:sld>
 </file>
 
+<file path=ppt/slides/slide10.xml><?xml version="1.0" encoding="utf-8"?>
+<p:sld xmlns:a="http://schemas.openxmlformats.org/drawingml/2006/main" xmlns:r="http://schemas.openxmlformats.org/officeDocument/2006/relationships" xmlns:p="http://schemas.openxmlformats.org/presentationml/2006/main">
+  <p:cSld name="Slide 10">
+    <p:bg>
+      <p:bgPr>
+        <a:solidFill>
+          <a:srgbClr val="10201E"/>
+        </a:solidFill>
+      </p:bgPr>
+    </p:bg>
+    <p:spTree>
+      <p:nvGrpSpPr>
+        <p:cNvPr id="1" name=""/>
+        <p:cNvGrpSpPr/>
+        <p:nvPr/>
+      </p:nvGrpSpPr>
+      <p:grpSpPr>
+        <a:xfrm>
+          <a:off x="0" y="0"/>
+          <a:ext cx="0" cy="0"/>
+          <a:chOff x="0" y="0"/>
+          <a:chExt cx="0" cy="0"/>
+        </a:xfrm>
+      </p:grpSpPr>
+      <p:sp>
+        <p:nvSpPr>
+          <p:cNvPr id="2" name="Text 0"/>
+          <p:cNvSpPr txBox="1"/>
+          <p:nvPr/>
+        </p:nvSpPr>
+        <p:spPr>
+          <a:xfrm>
+            <a:off x="548640" y="365760"/>
+            <a:ext cx="10058400" cy="228600"/>
+          </a:xfrm>
+          <a:prstGeom prst="rect">
+            <a:avLst/>
+          </a:prstGeom>
+          <a:noFill/>
+          <a:ln/>
+        </p:spPr>
+        <p:txBody>
+          <a:bodyPr wrap="square" lIns="0" tIns="0" rIns="0" bIns="0" rtlCol="0" anchor="ctr"/>
+          <a:lstStyle/>
+          <a:p>
+            <a:pPr indent="0" marL="0">
+              <a:buNone/>
+            </a:pPr>
+            <a:r>
+              <a:rPr lang="en-US" sz="1100" b="1" spc="200" kern="0" dirty="0">
+                <a:solidFill>
+                  <a:srgbClr val="8FA3A0"/>
+                </a:solidFill>
+                <a:latin typeface="Courier New" pitchFamily="34" charset="0"/>
+                <a:ea typeface="Courier New" pitchFamily="34" charset="-122"/>
+                <a:cs typeface="Courier New" pitchFamily="34" charset="-120"/>
+              </a:rPr>
+              <a:t>THE STRETCH</a:t>
+            </a:r>
+            <a:endParaRPr lang="en-US" sz="1100" dirty="0"/>
+          </a:p>
+        </p:txBody>
+      </p:sp>
+      <p:sp>
+        <p:nvSpPr>
+          <p:cNvPr id="3" name="Text 1"/>
+          <p:cNvSpPr txBox="1"/>
+          <p:nvPr/>
+        </p:nvSpPr>
+        <p:spPr>
+          <a:xfrm>
+            <a:off x="548640" y="640080"/>
+            <a:ext cx="10424160" cy="658368"/>
+          </a:xfrm>
+          <a:prstGeom prst="rect">
+            <a:avLst/>
+          </a:prstGeom>
+          <a:noFill/>
+          <a:ln/>
+        </p:spPr>
+        <p:txBody>
+          <a:bodyPr wrap="square" lIns="0" tIns="0" rIns="0" bIns="0" rtlCol="0" anchor="ctr"/>
+          <a:lstStyle/>
+          <a:p>
+            <a:pPr indent="0" marL="0">
+              <a:buNone/>
+            </a:pPr>
+            <a:r>
+              <a:rPr lang="en-US" sz="3200" b="1" dirty="0">
+                <a:solidFill>
+                  <a:srgbClr val="E7EEEC"/>
+                </a:solidFill>
+                <a:latin typeface="Cambria" pitchFamily="34" charset="0"/>
+                <a:ea typeface="Cambria" pitchFamily="34" charset="-122"/>
+                <a:cs typeface="Cambria" pitchFamily="34" charset="-120"/>
+              </a:rPr>
+              <a:t>What ten million actually takes</a:t>
+            </a:r>
+            <a:endParaRPr lang="en-US" sz="3200" dirty="0"/>
+          </a:p>
+        </p:txBody>
+      </p:sp>
+      <p:sp>
+        <p:nvSpPr>
+          <p:cNvPr id="4" name="Text 2"/>
+          <p:cNvSpPr txBox="1"/>
+          <p:nvPr/>
+        </p:nvSpPr>
+        <p:spPr>
+          <a:xfrm>
+            <a:off x="548640" y="1335024"/>
+            <a:ext cx="10607040" cy="585216"/>
+          </a:xfrm>
+          <a:prstGeom prst="rect">
+            <a:avLst/>
+          </a:prstGeom>
+          <a:noFill/>
+          <a:ln/>
+        </p:spPr>
+        <p:txBody>
+          <a:bodyPr wrap="square" lIns="0" tIns="0" rIns="0" bIns="0" rtlCol="0" anchor="ctr"/>
+          <a:lstStyle/>
+          <a:p>
+            <a:pPr indent="0" marL="0">
+              <a:buNone/>
+            </a:pPr>
+            <a:r>
+              <a:rPr lang="en-US" sz="1500" dirty="0">
+                <a:solidFill>
+                  <a:srgbClr val="8FA3A0"/>
+                </a:solidFill>
+                <a:latin typeface="Calibri" pitchFamily="34" charset="0"/>
+                <a:ea typeface="Calibri" pitchFamily="34" charset="-122"/>
+                <a:cs typeface="Calibri" pitchFamily="34" charset="-120"/>
+              </a:rPr>
+              <a:t>It is one million pounds above the goal. Here is the size of it, honestly, so we go after it with our eyes open.</a:t>
+            </a:r>
+            <a:endParaRPr lang="en-US" sz="1500" dirty="0"/>
+          </a:p>
+        </p:txBody>
+      </p:sp>
+      <p:sp>
+        <p:nvSpPr>
+          <p:cNvPr id="5" name="Shape 3"/>
+          <p:cNvSpPr/>
+          <p:nvPr/>
+        </p:nvSpPr>
+        <p:spPr>
+          <a:xfrm>
+            <a:off x="548640" y="2331720"/>
+            <a:ext cx="3566160" cy="1920240"/>
+          </a:xfrm>
+          <a:prstGeom prst="rect">
+            <a:avLst/>
+          </a:prstGeom>
+          <a:solidFill>
+            <a:srgbClr val="1B2E2C"/>
+          </a:solidFill>
+          <a:ln w="12700">
+            <a:solidFill>
+              <a:srgbClr val="24403D"/>
+            </a:solidFill>
+            <a:prstDash val="solid"/>
+          </a:ln>
+        </p:spPr>
+      </p:sp>
+      <p:sp>
+        <p:nvSpPr>
+          <p:cNvPr id="6" name="Text 4"/>
+          <p:cNvSpPr txBox="1"/>
+          <p:nvPr/>
+        </p:nvSpPr>
+        <p:spPr>
+          <a:xfrm>
+            <a:off x="804672" y="2532888"/>
+            <a:ext cx="3108960" cy="228600"/>
+          </a:xfrm>
+          <a:prstGeom prst="rect">
+            <a:avLst/>
+          </a:prstGeom>
+          <a:noFill/>
+          <a:ln/>
+        </p:spPr>
+        <p:txBody>
+          <a:bodyPr wrap="square" lIns="0" tIns="0" rIns="0" bIns="0" rtlCol="0" anchor="ctr"/>
+          <a:lstStyle/>
+          <a:p>
+            <a:pPr indent="0" marL="0">
+              <a:buNone/>
+            </a:pPr>
+            <a:r>
+              <a:rPr lang="en-US" sz="1050" b="1" spc="150" kern="0" dirty="0">
+                <a:solidFill>
+                  <a:srgbClr val="8FA3A0"/>
+                </a:solidFill>
+                <a:latin typeface="Courier New" pitchFamily="34" charset="0"/>
+                <a:ea typeface="Courier New" pitchFamily="34" charset="-122"/>
+                <a:cs typeface="Courier New" pitchFamily="34" charset="-120"/>
+              </a:rPr>
+              <a:t>PER MONTH FOR £9M</a:t>
+            </a:r>
+            <a:endParaRPr lang="en-US" sz="1050" dirty="0"/>
+          </a:p>
+        </p:txBody>
+      </p:sp>
+      <p:sp>
+        <p:nvSpPr>
+          <p:cNvPr id="7" name="Text 5"/>
+          <p:cNvSpPr txBox="1"/>
+          <p:nvPr/>
+        </p:nvSpPr>
+        <p:spPr>
+          <a:xfrm>
+            <a:off x="804672" y="2807208"/>
+            <a:ext cx="3154680" cy="603504"/>
+          </a:xfrm>
+          <a:prstGeom prst="rect">
+            <a:avLst/>
+          </a:prstGeom>
+          <a:noFill/>
+          <a:ln/>
+        </p:spPr>
+        <p:txBody>
+          <a:bodyPr wrap="square" lIns="0" tIns="0" rIns="0" bIns="0" rtlCol="0" anchor="ctr"/>
+          <a:lstStyle/>
+          <a:p>
+            <a:pPr indent="0" marL="0">
+              <a:buNone/>
+            </a:pPr>
+            <a:r>
+              <a:rPr lang="en-US" sz="3000" b="1" dirty="0">
+                <a:solidFill>
+                  <a:srgbClr val="E7EEEC"/>
+                </a:solidFill>
+                <a:latin typeface="Cambria" pitchFamily="34" charset="0"/>
+                <a:ea typeface="Cambria" pitchFamily="34" charset="-122"/>
+                <a:cs typeface="Cambria" pitchFamily="34" charset="-120"/>
+              </a:rPr>
+              <a:t>£820,902</a:t>
+            </a:r>
+            <a:endParaRPr lang="en-US" sz="3000" dirty="0"/>
+          </a:p>
+        </p:txBody>
+      </p:sp>
+      <p:sp>
+        <p:nvSpPr>
+          <p:cNvPr id="8" name="Text 6"/>
+          <p:cNvSpPr txBox="1"/>
+          <p:nvPr/>
+        </p:nvSpPr>
+        <p:spPr>
+          <a:xfrm>
+            <a:off x="804672" y="3429000"/>
+            <a:ext cx="3108960" cy="658368"/>
+          </a:xfrm>
+          <a:prstGeom prst="rect">
+            <a:avLst/>
+          </a:prstGeom>
+          <a:noFill/>
+          <a:ln/>
+        </p:spPr>
+        <p:txBody>
+          <a:bodyPr wrap="square" lIns="0" tIns="0" rIns="0" bIns="0" rtlCol="0" anchor="ctr"/>
+          <a:lstStyle/>
+          <a:p>
+            <a:pPr indent="0" marL="0">
+              <a:buNone/>
+            </a:pPr>
+            <a:r>
+              <a:rPr lang="en-US" sz="1200" dirty="0">
+                <a:solidFill>
+                  <a:srgbClr val="8FA3A0"/>
+                </a:solidFill>
+                <a:latin typeface="Calibri" pitchFamily="34" charset="0"/>
+                <a:ea typeface="Calibri" pitchFamily="34" charset="-122"/>
+                <a:cs typeface="Calibri" pitchFamily="34" charset="-120"/>
+              </a:rPr>
+              <a:t>a 16% uplift on our year average</a:t>
+            </a:r>
+            <a:endParaRPr lang="en-US" sz="1200" dirty="0"/>
+          </a:p>
+        </p:txBody>
+      </p:sp>
+      <p:sp>
+        <p:nvSpPr>
+          <p:cNvPr id="9" name="Shape 7"/>
+          <p:cNvSpPr/>
+          <p:nvPr/>
+        </p:nvSpPr>
+        <p:spPr>
+          <a:xfrm>
+            <a:off x="4315968" y="2331720"/>
+            <a:ext cx="3566160" cy="1920240"/>
+          </a:xfrm>
+          <a:prstGeom prst="rect">
+            <a:avLst/>
+          </a:prstGeom>
+          <a:solidFill>
+            <a:srgbClr val="1B2E2C"/>
+          </a:solidFill>
+          <a:ln w="12700">
+            <a:solidFill>
+              <a:srgbClr val="24403D"/>
+            </a:solidFill>
+            <a:prstDash val="solid"/>
+          </a:ln>
+        </p:spPr>
+      </p:sp>
+      <p:sp>
+        <p:nvSpPr>
+          <p:cNvPr id="10" name="Text 8"/>
+          <p:cNvSpPr txBox="1"/>
+          <p:nvPr/>
+        </p:nvSpPr>
+        <p:spPr>
+          <a:xfrm>
+            <a:off x="4572000" y="2532888"/>
+            <a:ext cx="3108960" cy="228600"/>
+          </a:xfrm>
+          <a:prstGeom prst="rect">
+            <a:avLst/>
+          </a:prstGeom>
+          <a:noFill/>
+          <a:ln/>
+        </p:spPr>
+        <p:txBody>
+          <a:bodyPr wrap="square" lIns="0" tIns="0" rIns="0" bIns="0" rtlCol="0" anchor="ctr"/>
+          <a:lstStyle/>
+          <a:p>
+            <a:pPr indent="0" marL="0">
+              <a:buNone/>
+            </a:pPr>
+            <a:r>
+              <a:rPr lang="en-US" sz="1050" b="1" spc="150" kern="0" dirty="0">
+                <a:solidFill>
+                  <a:srgbClr val="8FA3A0"/>
+                </a:solidFill>
+                <a:latin typeface="Courier New" pitchFamily="34" charset="0"/>
+                <a:ea typeface="Courier New" pitchFamily="34" charset="-122"/>
+                <a:cs typeface="Courier New" pitchFamily="34" charset="-120"/>
+              </a:rPr>
+              <a:t>PER MONTH FOR £10M</a:t>
+            </a:r>
+            <a:endParaRPr lang="en-US" sz="1050" dirty="0"/>
+          </a:p>
+        </p:txBody>
+      </p:sp>
+      <p:sp>
+        <p:nvSpPr>
+          <p:cNvPr id="11" name="Text 9"/>
+          <p:cNvSpPr txBox="1"/>
+          <p:nvPr/>
+        </p:nvSpPr>
+        <p:spPr>
+          <a:xfrm>
+            <a:off x="4572000" y="2807208"/>
+            <a:ext cx="3154680" cy="603504"/>
+          </a:xfrm>
+          <a:prstGeom prst="rect">
+            <a:avLst/>
+          </a:prstGeom>
+          <a:noFill/>
+          <a:ln/>
+        </p:spPr>
+        <p:txBody>
+          <a:bodyPr wrap="square" lIns="0" tIns="0" rIns="0" bIns="0" rtlCol="0" anchor="ctr"/>
+          <a:lstStyle/>
+          <a:p>
+            <a:pPr indent="0" marL="0">
+              <a:buNone/>
+            </a:pPr>
+            <a:r>
+              <a:rPr lang="en-US" sz="3000" b="1" dirty="0">
+                <a:solidFill>
+                  <a:srgbClr val="D2A017"/>
+                </a:solidFill>
+                <a:latin typeface="Cambria" pitchFamily="34" charset="0"/>
+                <a:ea typeface="Cambria" pitchFamily="34" charset="-122"/>
+                <a:cs typeface="Cambria" pitchFamily="34" charset="-120"/>
+              </a:rPr>
+              <a:t>£1,084,060</a:t>
+            </a:r>
+            <a:endParaRPr lang="en-US" sz="3000" dirty="0"/>
+          </a:p>
+        </p:txBody>
+      </p:sp>
+      <p:sp>
+        <p:nvSpPr>
+          <p:cNvPr id="12" name="Text 10"/>
+          <p:cNvSpPr txBox="1"/>
+          <p:nvPr/>
+        </p:nvSpPr>
+        <p:spPr>
+          <a:xfrm>
+            <a:off x="4572000" y="3429000"/>
+            <a:ext cx="3108960" cy="658368"/>
+          </a:xfrm>
+          <a:prstGeom prst="rect">
+            <a:avLst/>
+          </a:prstGeom>
+          <a:noFill/>
+          <a:ln/>
+        </p:spPr>
+        <p:txBody>
+          <a:bodyPr wrap="square" lIns="0" tIns="0" rIns="0" bIns="0" rtlCol="0" anchor="ctr"/>
+          <a:lstStyle/>
+          <a:p>
+            <a:pPr indent="0" marL="0">
+              <a:buNone/>
+            </a:pPr>
+            <a:r>
+              <a:rPr lang="en-US" sz="1200" dirty="0">
+                <a:solidFill>
+                  <a:srgbClr val="8FA3A0"/>
+                </a:solidFill>
+                <a:latin typeface="Calibri" pitchFamily="34" charset="0"/>
+                <a:ea typeface="Calibri" pitchFamily="34" charset="-122"/>
+                <a:cs typeface="Calibri" pitchFamily="34" charset="-120"/>
+              </a:rPr>
+              <a:t>a 54% uplift — and 28% above our best month</a:t>
+            </a:r>
+            <a:endParaRPr lang="en-US" sz="1200" dirty="0"/>
+          </a:p>
+        </p:txBody>
+      </p:sp>
+      <p:sp>
+        <p:nvSpPr>
+          <p:cNvPr id="13" name="Shape 11"/>
+          <p:cNvSpPr/>
+          <p:nvPr/>
+        </p:nvSpPr>
+        <p:spPr>
+          <a:xfrm>
+            <a:off x="8083296" y="2331720"/>
+            <a:ext cx="3566160" cy="1920240"/>
+          </a:xfrm>
+          <a:prstGeom prst="rect">
+            <a:avLst/>
+          </a:prstGeom>
+          <a:solidFill>
+            <a:srgbClr val="1B2E2C"/>
+          </a:solidFill>
+          <a:ln w="12700">
+            <a:solidFill>
+              <a:srgbClr val="24403D"/>
+            </a:solidFill>
+            <a:prstDash val="solid"/>
+          </a:ln>
+        </p:spPr>
+      </p:sp>
+      <p:sp>
+        <p:nvSpPr>
+          <p:cNvPr id="14" name="Text 12"/>
+          <p:cNvSpPr txBox="1"/>
+          <p:nvPr/>
+        </p:nvSpPr>
+        <p:spPr>
+          <a:xfrm>
+            <a:off x="8339328" y="2532888"/>
+            <a:ext cx="3108960" cy="228600"/>
+          </a:xfrm>
+          <a:prstGeom prst="rect">
+            <a:avLst/>
+          </a:prstGeom>
+          <a:noFill/>
+          <a:ln/>
+        </p:spPr>
+        <p:txBody>
+          <a:bodyPr wrap="square" lIns="0" tIns="0" rIns="0" bIns="0" rtlCol="0" anchor="ctr"/>
+          <a:lstStyle/>
+          <a:p>
+            <a:pPr indent="0" marL="0">
+              <a:buNone/>
+            </a:pPr>
+            <a:r>
+              <a:rPr lang="en-US" sz="1050" b="1" spc="150" kern="0" dirty="0">
+                <a:solidFill>
+                  <a:srgbClr val="8FA3A0"/>
+                </a:solidFill>
+                <a:latin typeface="Courier New" pitchFamily="34" charset="0"/>
+                <a:ea typeface="Courier New" pitchFamily="34" charset="-122"/>
+                <a:cs typeface="Courier New" pitchFamily="34" charset="-120"/>
+              </a:rPr>
+              <a:t>THE PRIZE</a:t>
+            </a:r>
+            <a:endParaRPr lang="en-US" sz="1050" dirty="0"/>
+          </a:p>
+        </p:txBody>
+      </p:sp>
+      <p:sp>
+        <p:nvSpPr>
+          <p:cNvPr id="15" name="Text 13"/>
+          <p:cNvSpPr txBox="1"/>
+          <p:nvPr/>
+        </p:nvSpPr>
+        <p:spPr>
+          <a:xfrm>
+            <a:off x="8339328" y="2807208"/>
+            <a:ext cx="3154680" cy="603504"/>
+          </a:xfrm>
+          <a:prstGeom prst="rect">
+            <a:avLst/>
+          </a:prstGeom>
+          <a:noFill/>
+          <a:ln/>
+        </p:spPr>
+        <p:txBody>
+          <a:bodyPr wrap="square" lIns="0" tIns="0" rIns="0" bIns="0" rtlCol="0" anchor="ctr"/>
+          <a:lstStyle/>
+          <a:p>
+            <a:pPr indent="0" marL="0">
+              <a:buNone/>
+            </a:pPr>
+            <a:r>
+              <a:rPr lang="en-US" sz="3000" b="1" dirty="0">
+                <a:solidFill>
+                  <a:srgbClr val="D2A017"/>
+                </a:solidFill>
+                <a:latin typeface="Cambria" pitchFamily="34" charset="0"/>
+                <a:ea typeface="Cambria" pitchFamily="34" charset="-122"/>
+                <a:cs typeface="Cambria" pitchFamily="34" charset="-120"/>
+              </a:rPr>
+              <a:t>£25,000</a:t>
+            </a:r>
+            <a:endParaRPr lang="en-US" sz="3000" dirty="0"/>
+          </a:p>
+        </p:txBody>
+      </p:sp>
+      <p:sp>
+        <p:nvSpPr>
+          <p:cNvPr id="16" name="Text 14"/>
+          <p:cNvSpPr txBox="1"/>
+          <p:nvPr/>
+        </p:nvSpPr>
+        <p:spPr>
+          <a:xfrm>
+            <a:off x="8339328" y="3429000"/>
+            <a:ext cx="3108960" cy="658368"/>
+          </a:xfrm>
+          <a:prstGeom prst="rect">
+            <a:avLst/>
+          </a:prstGeom>
+          <a:noFill/>
+          <a:ln/>
+        </p:spPr>
+        <p:txBody>
+          <a:bodyPr wrap="square" lIns="0" tIns="0" rIns="0" bIns="0" rtlCol="0" anchor="ctr"/>
+          <a:lstStyle/>
+          <a:p>
+            <a:pPr indent="0" marL="0">
+              <a:buNone/>
+            </a:pPr>
+            <a:r>
+              <a:rPr lang="en-US" sz="1200" dirty="0">
+                <a:solidFill>
+                  <a:srgbClr val="8FA3A0"/>
+                </a:solidFill>
+                <a:latin typeface="Calibri" pitchFamily="34" charset="0"/>
+                <a:ea typeface="Calibri" pitchFamily="34" charset="-122"/>
+                <a:cs typeface="Calibri" pitchFamily="34" charset="-120"/>
+              </a:rPr>
+              <a:t>each for Emily, Stuart, Cassie and Megan</a:t>
+            </a:r>
+            <a:endParaRPr lang="en-US" sz="1200" dirty="0"/>
+          </a:p>
+        </p:txBody>
+      </p:sp>
+      <p:sp>
+        <p:nvSpPr>
+          <p:cNvPr id="17" name="Shape 15"/>
+          <p:cNvSpPr/>
+          <p:nvPr/>
+        </p:nvSpPr>
+        <p:spPr>
+          <a:xfrm>
+            <a:off x="548640" y="4617720"/>
+            <a:ext cx="11091672" cy="493776"/>
+          </a:xfrm>
+          <a:prstGeom prst="rect">
+            <a:avLst/>
+          </a:prstGeom>
+          <a:solidFill>
+            <a:srgbClr val="1B2E2C"/>
+          </a:solidFill>
+          <a:ln w="12700">
+            <a:solidFill>
+              <a:srgbClr val="24403D"/>
+            </a:solidFill>
+            <a:prstDash val="solid"/>
+          </a:ln>
+        </p:spPr>
+      </p:sp>
+      <p:sp>
+        <p:nvSpPr>
+          <p:cNvPr id="18" name="Text 16"/>
+          <p:cNvSpPr txBox="1"/>
+          <p:nvPr/>
+        </p:nvSpPr>
+        <p:spPr>
+          <a:xfrm>
+            <a:off x="822960" y="4617720"/>
+            <a:ext cx="10515600" cy="493776"/>
+          </a:xfrm>
+          <a:prstGeom prst="rect">
+            <a:avLst/>
+          </a:prstGeom>
+          <a:noFill/>
+          <a:ln/>
+        </p:spPr>
+        <p:txBody>
+          <a:bodyPr wrap="square" lIns="0" tIns="0" rIns="0" bIns="0" rtlCol="0" anchor="ctr"/>
+          <a:lstStyle/>
+          <a:p>
+            <a:pPr indent="0" marL="0">
+              <a:buNone/>
+            </a:pPr>
+            <a:r>
+              <a:rPr lang="en-US" sz="1350" dirty="0">
+                <a:solidFill>
+                  <a:srgbClr val="E7EEEC"/>
+                </a:solidFill>
+                <a:latin typeface="Calibri" pitchFamily="34" charset="0"/>
+                <a:ea typeface="Calibri" pitchFamily="34" charset="-122"/>
+                <a:cs typeface="Calibri" pitchFamily="34" charset="-120"/>
+              </a:rPr>
+              <a:t>Close the Q1 habits — that quarter cost us £738,273 and we never got it back</a:t>
+            </a:r>
+            <a:endParaRPr lang="en-US" sz="1350" dirty="0"/>
+          </a:p>
+        </p:txBody>
+      </p:sp>
+      <p:sp>
+        <p:nvSpPr>
+          <p:cNvPr id="19" name="Shape 17"/>
+          <p:cNvSpPr/>
+          <p:nvPr/>
+        </p:nvSpPr>
+        <p:spPr>
+          <a:xfrm>
+            <a:off x="548640" y="5184648"/>
+            <a:ext cx="11091672" cy="493776"/>
+          </a:xfrm>
+          <a:prstGeom prst="rect">
+            <a:avLst/>
+          </a:prstGeom>
+          <a:solidFill>
+            <a:srgbClr val="1B2E2C"/>
+          </a:solidFill>
+          <a:ln w="12700">
+            <a:solidFill>
+              <a:srgbClr val="24403D"/>
+            </a:solidFill>
+            <a:prstDash val="solid"/>
+          </a:ln>
+        </p:spPr>
+      </p:sp>
+      <p:sp>
+        <p:nvSpPr>
+          <p:cNvPr id="20" name="Text 18"/>
+          <p:cNvSpPr txBox="1"/>
+          <p:nvPr/>
+        </p:nvSpPr>
+        <p:spPr>
+          <a:xfrm>
+            <a:off x="822960" y="5184648"/>
+            <a:ext cx="10515600" cy="493776"/>
+          </a:xfrm>
+          <a:prstGeom prst="rect">
+            <a:avLst/>
+          </a:prstGeom>
+          <a:noFill/>
+          <a:ln/>
+        </p:spPr>
+        <p:txBody>
+          <a:bodyPr wrap="square" lIns="0" tIns="0" rIns="0" bIns="0" rtlCol="0" anchor="ctr"/>
+          <a:lstStyle/>
+          <a:p>
+            <a:pPr indent="0" marL="0">
+              <a:buNone/>
+            </a:pPr>
+            <a:r>
+              <a:rPr lang="en-US" sz="1350" dirty="0">
+                <a:solidFill>
+                  <a:srgbClr val="E7EEEC"/>
+                </a:solidFill>
+                <a:latin typeface="Calibri" pitchFamily="34" charset="0"/>
+                <a:ea typeface="Calibri" pitchFamily="34" charset="-122"/>
+                <a:cs typeface="Calibri" pitchFamily="34" charset="-120"/>
+              </a:rPr>
+              <a:t>July and August ran at 53% of target. Q4 cannot look like that</a:t>
+            </a:r>
+            <a:endParaRPr lang="en-US" sz="1350" dirty="0"/>
+          </a:p>
+        </p:txBody>
+      </p:sp>
+      <p:sp>
+        <p:nvSpPr>
+          <p:cNvPr id="21" name="Shape 19"/>
+          <p:cNvSpPr/>
+          <p:nvPr/>
+        </p:nvSpPr>
+        <p:spPr>
+          <a:xfrm>
+            <a:off x="548640" y="5751576"/>
+            <a:ext cx="11091672" cy="493776"/>
+          </a:xfrm>
+          <a:prstGeom prst="rect">
+            <a:avLst/>
+          </a:prstGeom>
+          <a:solidFill>
+            <a:srgbClr val="1B2E2C"/>
+          </a:solidFill>
+          <a:ln w="12700">
+            <a:solidFill>
+              <a:srgbClr val="24403D"/>
+            </a:solidFill>
+            <a:prstDash val="solid"/>
+          </a:ln>
+        </p:spPr>
+      </p:sp>
+      <p:sp>
+        <p:nvSpPr>
+          <p:cNvPr id="22" name="Text 20"/>
+          <p:cNvSpPr txBox="1"/>
+          <p:nvPr/>
+        </p:nvSpPr>
+        <p:spPr>
+          <a:xfrm>
+            <a:off x="822960" y="5751576"/>
+            <a:ext cx="10515600" cy="493776"/>
+          </a:xfrm>
+          <a:prstGeom prst="rect">
+            <a:avLst/>
+          </a:prstGeom>
+          <a:noFill/>
+          <a:ln/>
+        </p:spPr>
+        <p:txBody>
+          <a:bodyPr wrap="square" lIns="0" tIns="0" rIns="0" bIns="0" rtlCol="0" anchor="ctr"/>
+          <a:lstStyle/>
+          <a:p>
+            <a:pPr indent="0" marL="0">
+              <a:buNone/>
+            </a:pPr>
+            <a:r>
+              <a:rPr lang="en-US" sz="1350" dirty="0">
+                <a:solidFill>
+                  <a:srgbClr val="E7EEEC"/>
+                </a:solidFill>
+                <a:latin typeface="Calibri" pitchFamily="34" charset="0"/>
+                <a:ea typeface="Calibri" pitchFamily="34" charset="-122"/>
+                <a:cs typeface="Calibri" pitchFamily="34" charset="-120"/>
+              </a:rPr>
+              <a:t>T6 and T3 carry the practice. Their capacity is the ceiling on all of this</a:t>
+            </a:r>
+            <a:endParaRPr lang="en-US" sz="1350" dirty="0"/>
+          </a:p>
+        </p:txBody>
+      </p:sp>
+    </p:spTree>
+  </p:cSld>
+  <p:clrMapOvr>
+    <a:masterClrMapping/>
+  </p:clrMapOvr>
+</p:sld>
+</file>
+
 <file path=ppt/slides/slide2.xml><?xml version="1.0" encoding="utf-8"?>
 <p:sld xmlns:a="http://schemas.openxmlformats.org/drawingml/2006/main" xmlns:r="http://schemas.openxmlformats.org/officeDocument/2006/relationships" xmlns:p="http://schemas.openxmlformats.org/presentationml/2006/main">
   <p:cSld name="Slide 2">
@@ -7112,13 +7968,6 @@
 <file path=ppt/slides/slide8.xml><?xml version="1.0" encoding="utf-8"?>
 <p:sld xmlns:a="http://schemas.openxmlformats.org/drawingml/2006/main" xmlns:r="http://schemas.openxmlformats.org/officeDocument/2006/relationships" xmlns:p="http://schemas.openxmlformats.org/presentationml/2006/main">
   <p:cSld name="Slide 8">
-    <p:bg>
-      <p:bgPr>
-        <a:solidFill>
-          <a:srgbClr val="10201E"/>
-        </a:solidFill>
-      </p:bgPr>
-    </p:bg>
     <p:spTree>
       <p:nvGrpSpPr>
         <p:cNvPr id="1" name=""/>
@@ -7160,13 +8009,13 @@
             <a:r>
               <a:rPr lang="en-US" sz="1100" b="1" spc="200" kern="0" dirty="0">
                 <a:solidFill>
-                  <a:srgbClr val="8FA3A0"/>
+                  <a:srgbClr val="6B7A77"/>
                 </a:solidFill>
                 <a:latin typeface="Courier New" pitchFamily="34" charset="0"/>
                 <a:ea typeface="Courier New" pitchFamily="34" charset="-122"/>
                 <a:cs typeface="Courier New" pitchFamily="34" charset="-120"/>
               </a:rPr>
-              <a:t>IF WE BEAT IT</a:t>
+              <a:t>FOR EACH TEAM LEAD</a:t>
             </a:r>
             <a:endParaRPr lang="en-US" sz="1100" dirty="0"/>
           </a:p>
@@ -7199,13 +8048,13 @@
             <a:r>
               <a:rPr lang="en-US" sz="3200" b="1" dirty="0">
                 <a:solidFill>
-                  <a:srgbClr val="E7EEEC"/>
+                  <a:srgbClr val="14201E"/>
                 </a:solidFill>
                 <a:latin typeface="Cambria" pitchFamily="34" charset="0"/>
                 <a:ea typeface="Cambria" pitchFamily="34" charset="-122"/>
                 <a:cs typeface="Cambria" pitchFamily="34" charset="-120"/>
               </a:rPr>
-              <a:t>£5,000 each for every £200,000 over £9m</a:t>
+              <a:t>Your number for October, November and December</a:t>
             </a:r>
             <a:endParaRPr lang="en-US" sz="3200" dirty="0"/>
           </a:p>
@@ -7238,13 +8087,13 @@
             <a:r>
               <a:rPr lang="en-US" sz="1500" dirty="0">
                 <a:solidFill>
-                  <a:srgbClr val="8FA3A0"/>
+                  <a:srgbClr val="43524F"/>
                 </a:solidFill>
                 <a:latin typeface="Calibri" pitchFamily="34" charset="0"/>
                 <a:ea typeface="Calibri" pitchFamily="34" charset="-122"/>
                 <a:cs typeface="Calibri" pitchFamily="34" charset="-120"/>
               </a:rPr>
-              <a:t>For Emily, Stuart, Cassie and Megan. Nine million is the goal — everything above it is shared, and it steps up every two hundred thousand.</a:t>
+              <a:t>The same lift for everyone — 16.6% on what your team has averaged all year. Find your line; that is your number.</a:t>
             </a:r>
             <a:endParaRPr lang="en-US" sz="1500" dirty="0"/>
           </a:p>
@@ -7252,24 +8101,219 @@
       </p:sp>
       <p:sp>
         <p:nvSpPr>
-          <p:cNvPr id="5" name="Shape 3"/>
+          <p:cNvPr id="5" name="Text 3"/>
+          <p:cNvSpPr txBox="1"/>
+          <p:nvPr/>
+        </p:nvSpPr>
+        <p:spPr>
+          <a:xfrm>
+            <a:off x="548640" y="1874520"/>
+            <a:ext cx="1005840" cy="201168"/>
+          </a:xfrm>
+          <a:prstGeom prst="rect">
+            <a:avLst/>
+          </a:prstGeom>
+          <a:noFill/>
+          <a:ln/>
+        </p:spPr>
+        <p:txBody>
+          <a:bodyPr wrap="square" lIns="0" tIns="0" rIns="0" bIns="0" rtlCol="0" anchor="ctr"/>
+          <a:lstStyle/>
+          <a:p>
+            <a:pPr indent="0" marL="0">
+              <a:buNone/>
+            </a:pPr>
+            <a:r>
+              <a:rPr lang="en-US" sz="950" b="1" spc="120" kern="0" dirty="0">
+                <a:solidFill>
+                  <a:srgbClr val="6B7A77"/>
+                </a:solidFill>
+                <a:latin typeface="Courier New" pitchFamily="34" charset="0"/>
+                <a:ea typeface="Courier New" pitchFamily="34" charset="-122"/>
+                <a:cs typeface="Courier New" pitchFamily="34" charset="-120"/>
+              </a:rPr>
+              <a:t>TEAM</a:t>
+            </a:r>
+            <a:endParaRPr lang="en-US" sz="950" dirty="0"/>
+          </a:p>
+        </p:txBody>
+      </p:sp>
+      <p:sp>
+        <p:nvSpPr>
+          <p:cNvPr id="6" name="Text 4"/>
+          <p:cNvSpPr txBox="1"/>
+          <p:nvPr/>
+        </p:nvSpPr>
+        <p:spPr>
+          <a:xfrm>
+            <a:off x="1600200" y="1874520"/>
+            <a:ext cx="1371600" cy="201168"/>
+          </a:xfrm>
+          <a:prstGeom prst="rect">
+            <a:avLst/>
+          </a:prstGeom>
+          <a:noFill/>
+          <a:ln/>
+        </p:spPr>
+        <p:txBody>
+          <a:bodyPr wrap="square" lIns="0" tIns="0" rIns="0" bIns="0" rtlCol="0" anchor="ctr"/>
+          <a:lstStyle/>
+          <a:p>
+            <a:pPr indent="0" marL="0">
+              <a:buNone/>
+            </a:pPr>
+            <a:r>
+              <a:rPr lang="en-US" sz="950" b="1" spc="120" kern="0" dirty="0">
+                <a:solidFill>
+                  <a:srgbClr val="6B7A77"/>
+                </a:solidFill>
+                <a:latin typeface="Courier New" pitchFamily="34" charset="0"/>
+                <a:ea typeface="Courier New" pitchFamily="34" charset="-122"/>
+                <a:cs typeface="Courier New" pitchFamily="34" charset="-120"/>
+              </a:rPr>
+              <a:t>LEAD</a:t>
+            </a:r>
+            <a:endParaRPr lang="en-US" sz="950" dirty="0"/>
+          </a:p>
+        </p:txBody>
+      </p:sp>
+      <p:sp>
+        <p:nvSpPr>
+          <p:cNvPr id="7" name="Text 5"/>
+          <p:cNvSpPr txBox="1"/>
+          <p:nvPr/>
+        </p:nvSpPr>
+        <p:spPr>
+          <a:xfrm>
+            <a:off x="3035808" y="1874520"/>
+            <a:ext cx="731520" cy="201168"/>
+          </a:xfrm>
+          <a:prstGeom prst="rect">
+            <a:avLst/>
+          </a:prstGeom>
+          <a:noFill/>
+          <a:ln/>
+        </p:spPr>
+        <p:txBody>
+          <a:bodyPr wrap="square" lIns="0" tIns="0" rIns="0" bIns="0" rtlCol="0" anchor="ctr"/>
+          <a:lstStyle/>
+          <a:p>
+            <a:pPr algn="r" indent="0" marL="0">
+              <a:buNone/>
+            </a:pPr>
+            <a:r>
+              <a:rPr lang="en-US" sz="950" b="1" spc="120" kern="0" dirty="0">
+                <a:solidFill>
+                  <a:srgbClr val="6B7A77"/>
+                </a:solidFill>
+                <a:latin typeface="Courier New" pitchFamily="34" charset="0"/>
+                <a:ea typeface="Courier New" pitchFamily="34" charset="-122"/>
+                <a:cs typeface="Courier New" pitchFamily="34" charset="-120"/>
+              </a:rPr>
+              <a:t>YTD</a:t>
+            </a:r>
+            <a:endParaRPr lang="en-US" sz="950" dirty="0"/>
+          </a:p>
+        </p:txBody>
+      </p:sp>
+      <p:sp>
+        <p:nvSpPr>
+          <p:cNvPr id="8" name="Text 6"/>
+          <p:cNvSpPr txBox="1"/>
+          <p:nvPr/>
+        </p:nvSpPr>
+        <p:spPr>
+          <a:xfrm>
+            <a:off x="3840480" y="1874520"/>
+            <a:ext cx="1691640" cy="201168"/>
+          </a:xfrm>
+          <a:prstGeom prst="rect">
+            <a:avLst/>
+          </a:prstGeom>
+          <a:noFill/>
+          <a:ln/>
+        </p:spPr>
+        <p:txBody>
+          <a:bodyPr wrap="square" lIns="0" tIns="0" rIns="0" bIns="0" rtlCol="0" anchor="ctr"/>
+          <a:lstStyle/>
+          <a:p>
+            <a:pPr algn="r" indent="0" marL="0">
+              <a:buNone/>
+            </a:pPr>
+            <a:r>
+              <a:rPr lang="en-US" sz="950" b="1" spc="120" kern="0" dirty="0">
+                <a:solidFill>
+                  <a:srgbClr val="6B7A77"/>
+                </a:solidFill>
+                <a:latin typeface="Courier New" pitchFamily="34" charset="0"/>
+                <a:ea typeface="Courier New" pitchFamily="34" charset="-122"/>
+                <a:cs typeface="Courier New" pitchFamily="34" charset="-120"/>
+              </a:rPr>
+              <a:t>EACH MONTH, OCT–DEC</a:t>
+            </a:r>
+            <a:endParaRPr lang="en-US" sz="950" dirty="0"/>
+          </a:p>
+        </p:txBody>
+      </p:sp>
+      <p:sp>
+        <p:nvSpPr>
+          <p:cNvPr id="9" name="Text 7"/>
+          <p:cNvSpPr txBox="1"/>
+          <p:nvPr/>
+        </p:nvSpPr>
+        <p:spPr>
+          <a:xfrm>
+            <a:off x="5779008" y="1874520"/>
+            <a:ext cx="5852160" cy="201168"/>
+          </a:xfrm>
+          <a:prstGeom prst="rect">
+            <a:avLst/>
+          </a:prstGeom>
+          <a:noFill/>
+          <a:ln/>
+        </p:spPr>
+        <p:txBody>
+          <a:bodyPr wrap="square" lIns="0" tIns="0" rIns="0" bIns="0" rtlCol="0" anchor="ctr"/>
+          <a:lstStyle/>
+          <a:p>
+            <a:pPr indent="0" marL="0">
+              <a:buNone/>
+            </a:pPr>
+            <a:r>
+              <a:rPr lang="en-US" sz="950" b="1" spc="120" kern="0" dirty="0">
+                <a:solidFill>
+                  <a:srgbClr val="6B7A77"/>
+                </a:solidFill>
+                <a:latin typeface="Courier New" pitchFamily="34" charset="0"/>
+                <a:ea typeface="Courier New" pitchFamily="34" charset="-122"/>
+                <a:cs typeface="Courier New" pitchFamily="34" charset="-120"/>
+              </a:rPr>
+              <a:t>WHAT YOU OWN</a:t>
+            </a:r>
+            <a:endParaRPr lang="en-US" sz="950" dirty="0"/>
+          </a:p>
+        </p:txBody>
+      </p:sp>
+      <p:sp>
+        <p:nvSpPr>
+          <p:cNvPr id="10" name="Shape 8"/>
           <p:cNvSpPr/>
           <p:nvPr/>
         </p:nvSpPr>
         <p:spPr>
           <a:xfrm>
-            <a:off x="548640" y="2331720"/>
-            <a:ext cx="2103120" cy="2240280"/>
+            <a:off x="548640" y="2121408"/>
+            <a:ext cx="11091672" cy="379476"/>
           </a:xfrm>
           <a:prstGeom prst="rect">
             <a:avLst/>
           </a:prstGeom>
           <a:solidFill>
-            <a:srgbClr val="1B2E2C"/>
+            <a:srgbClr val="EEF1F0"/>
           </a:solidFill>
           <a:ln w="12700">
             <a:solidFill>
-              <a:srgbClr val="24403D"/>
+              <a:srgbClr val="EEF1F0"/>
             </a:solidFill>
             <a:prstDash val="solid"/>
           </a:ln>
@@ -7277,14 +8321,41 @@
       </p:sp>
       <p:sp>
         <p:nvSpPr>
-          <p:cNvPr id="6" name="Text 4"/>
-          <p:cNvSpPr txBox="1"/>
-          <p:nvPr/>
-        </p:nvSpPr>
-        <p:spPr>
-          <a:xfrm>
-            <a:off x="685800" y="2505456"/>
-            <a:ext cx="1828800" cy="310896"/>
+          <p:cNvPr id="11" name="Shape 9"/>
+          <p:cNvSpPr/>
+          <p:nvPr/>
+        </p:nvSpPr>
+        <p:spPr>
+          <a:xfrm>
+            <a:off x="640080" y="2176272"/>
+            <a:ext cx="475488" cy="274320"/>
+          </a:xfrm>
+          <a:prstGeom prst="roundRect">
+            <a:avLst>
+              <a:gd name="adj" fmla="val 13333"/>
+            </a:avLst>
+          </a:prstGeom>
+          <a:solidFill>
+            <a:srgbClr val="07717A"/>
+          </a:solidFill>
+          <a:ln w="12700">
+            <a:solidFill>
+              <a:srgbClr val="07717A"/>
+            </a:solidFill>
+            <a:prstDash val="solid"/>
+          </a:ln>
+        </p:spPr>
+      </p:sp>
+      <p:sp>
+        <p:nvSpPr>
+          <p:cNvPr id="12" name="Text 10"/>
+          <p:cNvSpPr txBox="1"/>
+          <p:nvPr/>
+        </p:nvSpPr>
+        <p:spPr>
+          <a:xfrm>
+            <a:off x="640080" y="2176272"/>
+            <a:ext cx="475488" cy="274320"/>
           </a:xfrm>
           <a:prstGeom prst="rect">
             <a:avLst/>
@@ -7300,93 +8371,54 @@
               <a:buNone/>
             </a:pPr>
             <a:r>
-              <a:rPr lang="en-US" sz="1400" b="1" dirty="0">
-                <a:solidFill>
-                  <a:srgbClr val="8FA3A0"/>
+              <a:rPr lang="en-US" sz="1100" b="1" dirty="0">
+                <a:solidFill>
+                  <a:srgbClr val="FFFFFF"/>
                 </a:solidFill>
                 <a:latin typeface="Courier New" pitchFamily="34" charset="0"/>
                 <a:ea typeface="Courier New" pitchFamily="34" charset="-122"/>
                 <a:cs typeface="Courier New" pitchFamily="34" charset="-120"/>
               </a:rPr>
-              <a:t>£9.2m</a:t>
-            </a:r>
-            <a:endParaRPr lang="en-US" sz="1400" dirty="0"/>
-          </a:p>
-        </p:txBody>
-      </p:sp>
-      <p:sp>
-        <p:nvSpPr>
-          <p:cNvPr id="7" name="Text 5"/>
-          <p:cNvSpPr txBox="1"/>
-          <p:nvPr/>
-        </p:nvSpPr>
-        <p:spPr>
-          <a:xfrm>
-            <a:off x="658368" y="2907792"/>
-            <a:ext cx="1883664" cy="658368"/>
-          </a:xfrm>
-          <a:prstGeom prst="rect">
-            <a:avLst/>
-          </a:prstGeom>
-          <a:noFill/>
-          <a:ln/>
-        </p:spPr>
-        <p:txBody>
-          <a:bodyPr wrap="square" lIns="0" tIns="0" rIns="0" bIns="0" rtlCol="0" anchor="ctr"/>
-          <a:lstStyle/>
-          <a:p>
-            <a:pPr algn="ctr" indent="0" marL="0">
-              <a:buNone/>
-            </a:pPr>
-            <a:r>
-              <a:rPr lang="en-US" sz="2700" b="1" dirty="0">
-                <a:solidFill>
-                  <a:srgbClr val="E7EEEC"/>
-                </a:solidFill>
-                <a:latin typeface="Cambria" pitchFamily="34" charset="0"/>
-                <a:ea typeface="Cambria" pitchFamily="34" charset="-122"/>
-                <a:cs typeface="Cambria" pitchFamily="34" charset="-120"/>
-              </a:rPr>
-              <a:t>£5,000</a:t>
-            </a:r>
-            <a:endParaRPr lang="en-US" sz="2700" dirty="0"/>
-          </a:p>
-        </p:txBody>
-      </p:sp>
-      <p:sp>
-        <p:nvSpPr>
-          <p:cNvPr id="8" name="Text 6"/>
-          <p:cNvSpPr txBox="1"/>
-          <p:nvPr/>
-        </p:nvSpPr>
-        <p:spPr>
-          <a:xfrm>
-            <a:off x="685800" y="3584448"/>
-            <a:ext cx="1828800" cy="256032"/>
-          </a:xfrm>
-          <a:prstGeom prst="rect">
-            <a:avLst/>
-          </a:prstGeom>
-          <a:noFill/>
-          <a:ln/>
-        </p:spPr>
-        <p:txBody>
-          <a:bodyPr wrap="square" lIns="0" tIns="0" rIns="0" bIns="0" rtlCol="0" anchor="ctr"/>
-          <a:lstStyle/>
-          <a:p>
-            <a:pPr algn="ctr" indent="0" marL="0">
+              <a:t>T6</a:t>
+            </a:r>
+            <a:endParaRPr lang="en-US" sz="1100" dirty="0"/>
+          </a:p>
+        </p:txBody>
+      </p:sp>
+      <p:sp>
+        <p:nvSpPr>
+          <p:cNvPr id="13" name="Text 11"/>
+          <p:cNvSpPr txBox="1"/>
+          <p:nvPr/>
+        </p:nvSpPr>
+        <p:spPr>
+          <a:xfrm>
+            <a:off x="1600200" y="2121408"/>
+            <a:ext cx="1371600" cy="379476"/>
+          </a:xfrm>
+          <a:prstGeom prst="rect">
+            <a:avLst/>
+          </a:prstGeom>
+          <a:noFill/>
+          <a:ln/>
+        </p:spPr>
+        <p:txBody>
+          <a:bodyPr wrap="square" lIns="0" tIns="0" rIns="0" bIns="0" rtlCol="0" anchor="ctr"/>
+          <a:lstStyle/>
+          <a:p>
+            <a:pPr indent="0" marL="0">
               <a:buNone/>
             </a:pPr>
             <a:r>
               <a:rPr lang="en-US" sz="1200" dirty="0">
                 <a:solidFill>
-                  <a:srgbClr val="8FA3A0"/>
+                  <a:srgbClr val="43524F"/>
                 </a:solidFill>
                 <a:latin typeface="Calibri" pitchFamily="34" charset="0"/>
                 <a:ea typeface="Calibri" pitchFamily="34" charset="-122"/>
                 <a:cs typeface="Calibri" pitchFamily="34" charset="-120"/>
               </a:rPr>
-              <a:t>each</a:t>
+              <a:t>NR, EB, BF</a:t>
             </a:r>
             <a:endParaRPr lang="en-US" sz="1200" dirty="0"/>
           </a:p>
@@ -7394,63 +8426,143 @@
       </p:sp>
       <p:sp>
         <p:nvSpPr>
-          <p:cNvPr id="9" name="Text 7"/>
-          <p:cNvSpPr txBox="1"/>
-          <p:nvPr/>
-        </p:nvSpPr>
-        <p:spPr>
-          <a:xfrm>
-            <a:off x="658368" y="3968496"/>
-            <a:ext cx="1883664" cy="274320"/>
-          </a:xfrm>
-          <a:prstGeom prst="rect">
-            <a:avLst/>
-          </a:prstGeom>
-          <a:noFill/>
-          <a:ln/>
-        </p:spPr>
-        <p:txBody>
-          <a:bodyPr wrap="square" lIns="0" tIns="0" rIns="0" bIns="0" rtlCol="0" anchor="ctr"/>
-          <a:lstStyle/>
-          <a:p>
-            <a:pPr algn="ctr" indent="0" marL="0">
-              <a:buNone/>
-            </a:pPr>
-            <a:r>
-              <a:rPr lang="en-US" sz="1100" b="1" dirty="0">
-                <a:solidFill>
-                  <a:srgbClr val="0E8A94"/>
+          <p:cNvPr id="14" name="Text 12"/>
+          <p:cNvSpPr txBox="1"/>
+          <p:nvPr/>
+        </p:nvSpPr>
+        <p:spPr>
+          <a:xfrm>
+            <a:off x="3035808" y="2121408"/>
+            <a:ext cx="731520" cy="379476"/>
+          </a:xfrm>
+          <a:prstGeom prst="rect">
+            <a:avLst/>
+          </a:prstGeom>
+          <a:noFill/>
+          <a:ln/>
+        </p:spPr>
+        <p:txBody>
+          <a:bodyPr wrap="square" lIns="0" tIns="0" rIns="0" bIns="0" rtlCol="0" anchor="ctr"/>
+          <a:lstStyle/>
+          <a:p>
+            <a:pPr algn="r" indent="0" marL="0">
+              <a:buNone/>
+            </a:pPr>
+            <a:r>
+              <a:rPr lang="en-US" sz="1200" b="1" dirty="0">
+                <a:solidFill>
+                  <a:srgbClr val="14201E"/>
                 </a:solidFill>
                 <a:latin typeface="Courier New" pitchFamily="34" charset="0"/>
                 <a:ea typeface="Courier New" pitchFamily="34" charset="-122"/>
                 <a:cs typeface="Courier New" pitchFamily="34" charset="-120"/>
               </a:rPr>
-              <a:t>£20,000 in total</a:t>
-            </a:r>
-            <a:endParaRPr lang="en-US" sz="1100" dirty="0"/>
-          </a:p>
-        </p:txBody>
-      </p:sp>
-      <p:sp>
-        <p:nvSpPr>
-          <p:cNvPr id="10" name="Shape 8"/>
+              <a:t>96%</a:t>
+            </a:r>
+            <a:endParaRPr lang="en-US" sz="1200" dirty="0"/>
+          </a:p>
+        </p:txBody>
+      </p:sp>
+      <p:sp>
+        <p:nvSpPr>
+          <p:cNvPr id="15" name="Text 13"/>
+          <p:cNvSpPr txBox="1"/>
+          <p:nvPr/>
+        </p:nvSpPr>
+        <p:spPr>
+          <a:xfrm>
+            <a:off x="3840480" y="2121408"/>
+            <a:ext cx="1691640" cy="379476"/>
+          </a:xfrm>
+          <a:prstGeom prst="rect">
+            <a:avLst/>
+          </a:prstGeom>
+          <a:noFill/>
+          <a:ln/>
+        </p:spPr>
+        <p:txBody>
+          <a:bodyPr wrap="square" lIns="0" tIns="0" rIns="0" bIns="0" rtlCol="0" anchor="ctr"/>
+          <a:lstStyle/>
+          <a:p>
+            <a:pPr algn="r" indent="0" marL="0">
+              <a:buNone/>
+            </a:pPr>
+            <a:r>
+              <a:rPr lang="en-US" sz="1250" b="1" dirty="0">
+                <a:solidFill>
+                  <a:srgbClr val="B58A00"/>
+                </a:solidFill>
+                <a:latin typeface="Courier New" pitchFamily="34" charset="0"/>
+                <a:ea typeface="Courier New" pitchFamily="34" charset="-122"/>
+                <a:cs typeface="Courier New" pitchFamily="34" charset="-120"/>
+              </a:rPr>
+              <a:t>£371,130</a:t>
+            </a:r>
+            <a:endParaRPr lang="en-US" sz="1250" dirty="0"/>
+          </a:p>
+        </p:txBody>
+      </p:sp>
+      <p:sp>
+        <p:nvSpPr>
+          <p:cNvPr id="16" name="Text 14"/>
+          <p:cNvSpPr txBox="1"/>
+          <p:nvPr/>
+        </p:nvSpPr>
+        <p:spPr>
+          <a:xfrm>
+            <a:off x="5779008" y="2121408"/>
+            <a:ext cx="5852160" cy="379476"/>
+          </a:xfrm>
+          <a:prstGeom prst="rect">
+            <a:avLst/>
+          </a:prstGeom>
+          <a:noFill/>
+          <a:ln/>
+        </p:spPr>
+        <p:txBody>
+          <a:bodyPr wrap="square" lIns="0" tIns="0" rIns="0" bIns="0" rtlCol="0" anchor="ctr"/>
+          <a:lstStyle/>
+          <a:p>
+            <a:pPr indent="0" marL="0">
+              <a:buNone/>
+            </a:pPr>
+            <a:r>
+              <a:rPr lang="en-US" sz="1150" dirty="0">
+                <a:solidFill>
+                  <a:srgbClr val="43524F"/>
+                </a:solidFill>
+                <a:latin typeface="Calibri" pitchFamily="34" charset="0"/>
+                <a:ea typeface="Calibri" pitchFamily="34" charset="-122"/>
+                <a:cs typeface="Calibri" pitchFamily="34" charset="-120"/>
+              </a:rPr>
+              <a:t>45% of everything we invoice. Protect the run rate and flag capacity limits early</a:t>
+            </a:r>
+            <a:endParaRPr lang="en-US" sz="1150" dirty="0"/>
+          </a:p>
+        </p:txBody>
+      </p:sp>
+      <p:sp>
+        <p:nvSpPr>
+          <p:cNvPr id="17" name="Shape 15"/>
           <p:cNvSpPr/>
           <p:nvPr/>
         </p:nvSpPr>
         <p:spPr>
           <a:xfrm>
-            <a:off x="2807208" y="2331720"/>
-            <a:ext cx="2103120" cy="2240280"/>
-          </a:xfrm>
-          <a:prstGeom prst="rect">
-            <a:avLst/>
+            <a:off x="640080" y="2555748"/>
+            <a:ext cx="475488" cy="274320"/>
+          </a:xfrm>
+          <a:prstGeom prst="roundRect">
+            <a:avLst>
+              <a:gd name="adj" fmla="val 13333"/>
+            </a:avLst>
           </a:prstGeom>
           <a:solidFill>
-            <a:srgbClr val="1B2E2C"/>
+            <a:srgbClr val="07717A"/>
           </a:solidFill>
           <a:ln w="12700">
             <a:solidFill>
-              <a:srgbClr val="24403D"/>
+              <a:srgbClr val="07717A"/>
             </a:solidFill>
             <a:prstDash val="solid"/>
           </a:ln>
@@ -7458,14 +8570,14 @@
       </p:sp>
       <p:sp>
         <p:nvSpPr>
-          <p:cNvPr id="11" name="Text 9"/>
-          <p:cNvSpPr txBox="1"/>
-          <p:nvPr/>
-        </p:nvSpPr>
-        <p:spPr>
-          <a:xfrm>
-            <a:off x="2944368" y="2505456"/>
-            <a:ext cx="1828800" cy="310896"/>
+          <p:cNvPr id="18" name="Text 16"/>
+          <p:cNvSpPr txBox="1"/>
+          <p:nvPr/>
+        </p:nvSpPr>
+        <p:spPr>
+          <a:xfrm>
+            <a:off x="640080" y="2555748"/>
+            <a:ext cx="475488" cy="274320"/>
           </a:xfrm>
           <a:prstGeom prst="rect">
             <a:avLst/>
@@ -7481,93 +8593,54 @@
               <a:buNone/>
             </a:pPr>
             <a:r>
-              <a:rPr lang="en-US" sz="1400" b="1" dirty="0">
-                <a:solidFill>
-                  <a:srgbClr val="8FA3A0"/>
+              <a:rPr lang="en-US" sz="1100" b="1" dirty="0">
+                <a:solidFill>
+                  <a:srgbClr val="FFFFFF"/>
                 </a:solidFill>
                 <a:latin typeface="Courier New" pitchFamily="34" charset="0"/>
                 <a:ea typeface="Courier New" pitchFamily="34" charset="-122"/>
                 <a:cs typeface="Courier New" pitchFamily="34" charset="-120"/>
               </a:rPr>
-              <a:t>£9.4m</a:t>
-            </a:r>
-            <a:endParaRPr lang="en-US" sz="1400" dirty="0"/>
-          </a:p>
-        </p:txBody>
-      </p:sp>
-      <p:sp>
-        <p:nvSpPr>
-          <p:cNvPr id="12" name="Text 10"/>
-          <p:cNvSpPr txBox="1"/>
-          <p:nvPr/>
-        </p:nvSpPr>
-        <p:spPr>
-          <a:xfrm>
-            <a:off x="2916936" y="2907792"/>
-            <a:ext cx="1883664" cy="658368"/>
-          </a:xfrm>
-          <a:prstGeom prst="rect">
-            <a:avLst/>
-          </a:prstGeom>
-          <a:noFill/>
-          <a:ln/>
-        </p:spPr>
-        <p:txBody>
-          <a:bodyPr wrap="square" lIns="0" tIns="0" rIns="0" bIns="0" rtlCol="0" anchor="ctr"/>
-          <a:lstStyle/>
-          <a:p>
-            <a:pPr algn="ctr" indent="0" marL="0">
-              <a:buNone/>
-            </a:pPr>
-            <a:r>
-              <a:rPr lang="en-US" sz="2700" b="1" dirty="0">
-                <a:solidFill>
-                  <a:srgbClr val="E7EEEC"/>
-                </a:solidFill>
-                <a:latin typeface="Cambria" pitchFamily="34" charset="0"/>
-                <a:ea typeface="Cambria" pitchFamily="34" charset="-122"/>
-                <a:cs typeface="Cambria" pitchFamily="34" charset="-120"/>
-              </a:rPr>
-              <a:t>£10,000</a:t>
-            </a:r>
-            <a:endParaRPr lang="en-US" sz="2700" dirty="0"/>
-          </a:p>
-        </p:txBody>
-      </p:sp>
-      <p:sp>
-        <p:nvSpPr>
-          <p:cNvPr id="13" name="Text 11"/>
-          <p:cNvSpPr txBox="1"/>
-          <p:nvPr/>
-        </p:nvSpPr>
-        <p:spPr>
-          <a:xfrm>
-            <a:off x="2944368" y="3584448"/>
-            <a:ext cx="1828800" cy="256032"/>
-          </a:xfrm>
-          <a:prstGeom prst="rect">
-            <a:avLst/>
-          </a:prstGeom>
-          <a:noFill/>
-          <a:ln/>
-        </p:spPr>
-        <p:txBody>
-          <a:bodyPr wrap="square" lIns="0" tIns="0" rIns="0" bIns="0" rtlCol="0" anchor="ctr"/>
-          <a:lstStyle/>
-          <a:p>
-            <a:pPr algn="ctr" indent="0" marL="0">
+              <a:t>T10</a:t>
+            </a:r>
+            <a:endParaRPr lang="en-US" sz="1100" dirty="0"/>
+          </a:p>
+        </p:txBody>
+      </p:sp>
+      <p:sp>
+        <p:nvSpPr>
+          <p:cNvPr id="19" name="Text 17"/>
+          <p:cNvSpPr txBox="1"/>
+          <p:nvPr/>
+        </p:nvSpPr>
+        <p:spPr>
+          <a:xfrm>
+            <a:off x="1600200" y="2500884"/>
+            <a:ext cx="1371600" cy="379476"/>
+          </a:xfrm>
+          <a:prstGeom prst="rect">
+            <a:avLst/>
+          </a:prstGeom>
+          <a:noFill/>
+          <a:ln/>
+        </p:spPr>
+        <p:txBody>
+          <a:bodyPr wrap="square" lIns="0" tIns="0" rIns="0" bIns="0" rtlCol="0" anchor="ctr"/>
+          <a:lstStyle/>
+          <a:p>
+            <a:pPr indent="0" marL="0">
               <a:buNone/>
             </a:pPr>
             <a:r>
               <a:rPr lang="en-US" sz="1200" dirty="0">
                 <a:solidFill>
-                  <a:srgbClr val="8FA3A0"/>
+                  <a:srgbClr val="43524F"/>
                 </a:solidFill>
                 <a:latin typeface="Calibri" pitchFamily="34" charset="0"/>
                 <a:ea typeface="Calibri" pitchFamily="34" charset="-122"/>
                 <a:cs typeface="Calibri" pitchFamily="34" charset="-120"/>
               </a:rPr>
-              <a:t>each</a:t>
+              <a:t>GA</a:t>
             </a:r>
             <a:endParaRPr lang="en-US" sz="1200" dirty="0"/>
           </a:p>
@@ -7575,63 +8648,141 @@
       </p:sp>
       <p:sp>
         <p:nvSpPr>
-          <p:cNvPr id="14" name="Text 12"/>
-          <p:cNvSpPr txBox="1"/>
-          <p:nvPr/>
-        </p:nvSpPr>
-        <p:spPr>
-          <a:xfrm>
-            <a:off x="2916936" y="3968496"/>
-            <a:ext cx="1883664" cy="274320"/>
-          </a:xfrm>
-          <a:prstGeom prst="rect">
-            <a:avLst/>
-          </a:prstGeom>
-          <a:noFill/>
-          <a:ln/>
-        </p:spPr>
-        <p:txBody>
-          <a:bodyPr wrap="square" lIns="0" tIns="0" rIns="0" bIns="0" rtlCol="0" anchor="ctr"/>
-          <a:lstStyle/>
-          <a:p>
-            <a:pPr algn="ctr" indent="0" marL="0">
-              <a:buNone/>
-            </a:pPr>
-            <a:r>
-              <a:rPr lang="en-US" sz="1100" b="1" dirty="0">
-                <a:solidFill>
-                  <a:srgbClr val="0E8A94"/>
+          <p:cNvPr id="20" name="Text 18"/>
+          <p:cNvSpPr txBox="1"/>
+          <p:nvPr/>
+        </p:nvSpPr>
+        <p:spPr>
+          <a:xfrm>
+            <a:off x="3035808" y="2500884"/>
+            <a:ext cx="731520" cy="379476"/>
+          </a:xfrm>
+          <a:prstGeom prst="rect">
+            <a:avLst/>
+          </a:prstGeom>
+          <a:noFill/>
+          <a:ln/>
+        </p:spPr>
+        <p:txBody>
+          <a:bodyPr wrap="square" lIns="0" tIns="0" rIns="0" bIns="0" rtlCol="0" anchor="ctr"/>
+          <a:lstStyle/>
+          <a:p>
+            <a:pPr algn="r" indent="0" marL="0">
+              <a:buNone/>
+            </a:pPr>
+            <a:r>
+              <a:rPr lang="en-US" sz="1200" b="1" dirty="0">
+                <a:solidFill>
+                  <a:srgbClr val="AD2340"/>
                 </a:solidFill>
                 <a:latin typeface="Courier New" pitchFamily="34" charset="0"/>
                 <a:ea typeface="Courier New" pitchFamily="34" charset="-122"/>
                 <a:cs typeface="Courier New" pitchFamily="34" charset="-120"/>
               </a:rPr>
-              <a:t>£40,000 in total</a:t>
-            </a:r>
-            <a:endParaRPr lang="en-US" sz="1100" dirty="0"/>
-          </a:p>
-        </p:txBody>
-      </p:sp>
-      <p:sp>
-        <p:nvSpPr>
-          <p:cNvPr id="15" name="Shape 13"/>
+              <a:t>66%</a:t>
+            </a:r>
+            <a:endParaRPr lang="en-US" sz="1200" dirty="0"/>
+          </a:p>
+        </p:txBody>
+      </p:sp>
+      <p:sp>
+        <p:nvSpPr>
+          <p:cNvPr id="21" name="Text 19"/>
+          <p:cNvSpPr txBox="1"/>
+          <p:nvPr/>
+        </p:nvSpPr>
+        <p:spPr>
+          <a:xfrm>
+            <a:off x="3840480" y="2500884"/>
+            <a:ext cx="1691640" cy="379476"/>
+          </a:xfrm>
+          <a:prstGeom prst="rect">
+            <a:avLst/>
+          </a:prstGeom>
+          <a:noFill/>
+          <a:ln/>
+        </p:spPr>
+        <p:txBody>
+          <a:bodyPr wrap="square" lIns="0" tIns="0" rIns="0" bIns="0" rtlCol="0" anchor="ctr"/>
+          <a:lstStyle/>
+          <a:p>
+            <a:pPr algn="r" indent="0" marL="0">
+              <a:buNone/>
+            </a:pPr>
+            <a:r>
+              <a:rPr lang="en-US" sz="1250" b="1" dirty="0">
+                <a:solidFill>
+                  <a:srgbClr val="B58A00"/>
+                </a:solidFill>
+                <a:latin typeface="Courier New" pitchFamily="34" charset="0"/>
+                <a:ea typeface="Courier New" pitchFamily="34" charset="-122"/>
+                <a:cs typeface="Courier New" pitchFamily="34" charset="-120"/>
+              </a:rPr>
+              <a:t>£141,683</a:t>
+            </a:r>
+            <a:endParaRPr lang="en-US" sz="1250" dirty="0"/>
+          </a:p>
+        </p:txBody>
+      </p:sp>
+      <p:sp>
+        <p:nvSpPr>
+          <p:cNvPr id="22" name="Text 20"/>
+          <p:cNvSpPr txBox="1"/>
+          <p:nvPr/>
+        </p:nvSpPr>
+        <p:spPr>
+          <a:xfrm>
+            <a:off x="5779008" y="2500884"/>
+            <a:ext cx="5852160" cy="379476"/>
+          </a:xfrm>
+          <a:prstGeom prst="rect">
+            <a:avLst/>
+          </a:prstGeom>
+          <a:noFill/>
+          <a:ln/>
+        </p:spPr>
+        <p:txBody>
+          <a:bodyPr wrap="square" lIns="0" tIns="0" rIns="0" bIns="0" rtlCol="0" anchor="ctr"/>
+          <a:lstStyle/>
+          <a:p>
+            <a:pPr indent="0" marL="0">
+              <a:buNone/>
+            </a:pPr>
+            <a:r>
+              <a:rPr lang="en-US" sz="1150" dirty="0">
+                <a:solidFill>
+                  <a:srgbClr val="43524F"/>
+                </a:solidFill>
+                <a:latin typeface="Calibri" pitchFamily="34" charset="0"/>
+                <a:ea typeface="Calibri" pitchFamily="34" charset="-122"/>
+                <a:cs typeface="Calibri" pitchFamily="34" charset="-120"/>
+              </a:rPr>
+              <a:t>£522,903 behind for the year — the biggest gap on the board to close</a:t>
+            </a:r>
+            <a:endParaRPr lang="en-US" sz="1150" dirty="0"/>
+          </a:p>
+        </p:txBody>
+      </p:sp>
+      <p:sp>
+        <p:nvSpPr>
+          <p:cNvPr id="23" name="Shape 21"/>
           <p:cNvSpPr/>
           <p:nvPr/>
         </p:nvSpPr>
         <p:spPr>
           <a:xfrm>
-            <a:off x="5065776" y="2331720"/>
-            <a:ext cx="2103120" cy="2240280"/>
+            <a:off x="548640" y="2880360"/>
+            <a:ext cx="11091672" cy="379476"/>
           </a:xfrm>
           <a:prstGeom prst="rect">
             <a:avLst/>
           </a:prstGeom>
           <a:solidFill>
-            <a:srgbClr val="1B2E2C"/>
+            <a:srgbClr val="EEF1F0"/>
           </a:solidFill>
           <a:ln w="12700">
             <a:solidFill>
-              <a:srgbClr val="24403D"/>
+              <a:srgbClr val="EEF1F0"/>
             </a:solidFill>
             <a:prstDash val="solid"/>
           </a:ln>
@@ -7639,14 +8790,41 @@
       </p:sp>
       <p:sp>
         <p:nvSpPr>
-          <p:cNvPr id="16" name="Text 14"/>
-          <p:cNvSpPr txBox="1"/>
-          <p:nvPr/>
-        </p:nvSpPr>
-        <p:spPr>
-          <a:xfrm>
-            <a:off x="5202936" y="2505456"/>
-            <a:ext cx="1828800" cy="310896"/>
+          <p:cNvPr id="24" name="Shape 22"/>
+          <p:cNvSpPr/>
+          <p:nvPr/>
+        </p:nvSpPr>
+        <p:spPr>
+          <a:xfrm>
+            <a:off x="640080" y="2935224"/>
+            <a:ext cx="475488" cy="274320"/>
+          </a:xfrm>
+          <a:prstGeom prst="roundRect">
+            <a:avLst>
+              <a:gd name="adj" fmla="val 13333"/>
+            </a:avLst>
+          </a:prstGeom>
+          <a:solidFill>
+            <a:srgbClr val="07717A"/>
+          </a:solidFill>
+          <a:ln w="12700">
+            <a:solidFill>
+              <a:srgbClr val="07717A"/>
+            </a:solidFill>
+            <a:prstDash val="solid"/>
+          </a:ln>
+        </p:spPr>
+      </p:sp>
+      <p:sp>
+        <p:nvSpPr>
+          <p:cNvPr id="25" name="Text 23"/>
+          <p:cNvSpPr txBox="1"/>
+          <p:nvPr/>
+        </p:nvSpPr>
+        <p:spPr>
+          <a:xfrm>
+            <a:off x="640080" y="2935224"/>
+            <a:ext cx="475488" cy="274320"/>
           </a:xfrm>
           <a:prstGeom prst="rect">
             <a:avLst/>
@@ -7662,93 +8840,54 @@
               <a:buNone/>
             </a:pPr>
             <a:r>
-              <a:rPr lang="en-US" sz="1400" b="1" dirty="0">
-                <a:solidFill>
-                  <a:srgbClr val="8FA3A0"/>
+              <a:rPr lang="en-US" sz="1100" b="1" dirty="0">
+                <a:solidFill>
+                  <a:srgbClr val="FFFFFF"/>
                 </a:solidFill>
                 <a:latin typeface="Courier New" pitchFamily="34" charset="0"/>
                 <a:ea typeface="Courier New" pitchFamily="34" charset="-122"/>
                 <a:cs typeface="Courier New" pitchFamily="34" charset="-120"/>
               </a:rPr>
-              <a:t>£9.6m</a:t>
-            </a:r>
-            <a:endParaRPr lang="en-US" sz="1400" dirty="0"/>
-          </a:p>
-        </p:txBody>
-      </p:sp>
-      <p:sp>
-        <p:nvSpPr>
-          <p:cNvPr id="17" name="Text 15"/>
-          <p:cNvSpPr txBox="1"/>
-          <p:nvPr/>
-        </p:nvSpPr>
-        <p:spPr>
-          <a:xfrm>
-            <a:off x="5175504" y="2907792"/>
-            <a:ext cx="1883664" cy="658368"/>
-          </a:xfrm>
-          <a:prstGeom prst="rect">
-            <a:avLst/>
-          </a:prstGeom>
-          <a:noFill/>
-          <a:ln/>
-        </p:spPr>
-        <p:txBody>
-          <a:bodyPr wrap="square" lIns="0" tIns="0" rIns="0" bIns="0" rtlCol="0" anchor="ctr"/>
-          <a:lstStyle/>
-          <a:p>
-            <a:pPr algn="ctr" indent="0" marL="0">
-              <a:buNone/>
-            </a:pPr>
-            <a:r>
-              <a:rPr lang="en-US" sz="2700" b="1" dirty="0">
-                <a:solidFill>
-                  <a:srgbClr val="E7EEEC"/>
-                </a:solidFill>
-                <a:latin typeface="Cambria" pitchFamily="34" charset="0"/>
-                <a:ea typeface="Cambria" pitchFamily="34" charset="-122"/>
-                <a:cs typeface="Cambria" pitchFamily="34" charset="-120"/>
-              </a:rPr>
-              <a:t>£15,000</a:t>
-            </a:r>
-            <a:endParaRPr lang="en-US" sz="2700" dirty="0"/>
-          </a:p>
-        </p:txBody>
-      </p:sp>
-      <p:sp>
-        <p:nvSpPr>
-          <p:cNvPr id="18" name="Text 16"/>
-          <p:cNvSpPr txBox="1"/>
-          <p:nvPr/>
-        </p:nvSpPr>
-        <p:spPr>
-          <a:xfrm>
-            <a:off x="5202936" y="3584448"/>
-            <a:ext cx="1828800" cy="256032"/>
-          </a:xfrm>
-          <a:prstGeom prst="rect">
-            <a:avLst/>
-          </a:prstGeom>
-          <a:noFill/>
-          <a:ln/>
-        </p:spPr>
-        <p:txBody>
-          <a:bodyPr wrap="square" lIns="0" tIns="0" rIns="0" bIns="0" rtlCol="0" anchor="ctr"/>
-          <a:lstStyle/>
-          <a:p>
-            <a:pPr algn="ctr" indent="0" marL="0">
+              <a:t>T3</a:t>
+            </a:r>
+            <a:endParaRPr lang="en-US" sz="1100" dirty="0"/>
+          </a:p>
+        </p:txBody>
+      </p:sp>
+      <p:sp>
+        <p:nvSpPr>
+          <p:cNvPr id="26" name="Text 24"/>
+          <p:cNvSpPr txBox="1"/>
+          <p:nvPr/>
+        </p:nvSpPr>
+        <p:spPr>
+          <a:xfrm>
+            <a:off x="1600200" y="2880360"/>
+            <a:ext cx="1371600" cy="379476"/>
+          </a:xfrm>
+          <a:prstGeom prst="rect">
+            <a:avLst/>
+          </a:prstGeom>
+          <a:noFill/>
+          <a:ln/>
+        </p:spPr>
+        <p:txBody>
+          <a:bodyPr wrap="square" lIns="0" tIns="0" rIns="0" bIns="0" rtlCol="0" anchor="ctr"/>
+          <a:lstStyle/>
+          <a:p>
+            <a:pPr indent="0" marL="0">
               <a:buNone/>
             </a:pPr>
             <a:r>
               <a:rPr lang="en-US" sz="1200" dirty="0">
                 <a:solidFill>
-                  <a:srgbClr val="8FA3A0"/>
+                  <a:srgbClr val="43524F"/>
                 </a:solidFill>
                 <a:latin typeface="Calibri" pitchFamily="34" charset="0"/>
                 <a:ea typeface="Calibri" pitchFamily="34" charset="-122"/>
                 <a:cs typeface="Calibri" pitchFamily="34" charset="-120"/>
               </a:rPr>
-              <a:t>each</a:t>
+              <a:t>EP, CW, AL</a:t>
             </a:r>
             <a:endParaRPr lang="en-US" sz="1200" dirty="0"/>
           </a:p>
@@ -7756,63 +8895,143 @@
       </p:sp>
       <p:sp>
         <p:nvSpPr>
-          <p:cNvPr id="19" name="Text 17"/>
-          <p:cNvSpPr txBox="1"/>
-          <p:nvPr/>
-        </p:nvSpPr>
-        <p:spPr>
-          <a:xfrm>
-            <a:off x="5175504" y="3968496"/>
-            <a:ext cx="1883664" cy="274320"/>
-          </a:xfrm>
-          <a:prstGeom prst="rect">
-            <a:avLst/>
-          </a:prstGeom>
-          <a:noFill/>
-          <a:ln/>
-        </p:spPr>
-        <p:txBody>
-          <a:bodyPr wrap="square" lIns="0" tIns="0" rIns="0" bIns="0" rtlCol="0" anchor="ctr"/>
-          <a:lstStyle/>
-          <a:p>
-            <a:pPr algn="ctr" indent="0" marL="0">
-              <a:buNone/>
-            </a:pPr>
-            <a:r>
-              <a:rPr lang="en-US" sz="1100" b="1" dirty="0">
-                <a:solidFill>
-                  <a:srgbClr val="0E8A94"/>
+          <p:cNvPr id="27" name="Text 25"/>
+          <p:cNvSpPr txBox="1"/>
+          <p:nvPr/>
+        </p:nvSpPr>
+        <p:spPr>
+          <a:xfrm>
+            <a:off x="3035808" y="2880360"/>
+            <a:ext cx="731520" cy="379476"/>
+          </a:xfrm>
+          <a:prstGeom prst="rect">
+            <a:avLst/>
+          </a:prstGeom>
+          <a:noFill/>
+          <a:ln/>
+        </p:spPr>
+        <p:txBody>
+          <a:bodyPr wrap="square" lIns="0" tIns="0" rIns="0" bIns="0" rtlCol="0" anchor="ctr"/>
+          <a:lstStyle/>
+          <a:p>
+            <a:pPr algn="r" indent="0" marL="0">
+              <a:buNone/>
+            </a:pPr>
+            <a:r>
+              <a:rPr lang="en-US" sz="1200" b="1" dirty="0">
+                <a:solidFill>
+                  <a:srgbClr val="07717A"/>
                 </a:solidFill>
                 <a:latin typeface="Courier New" pitchFamily="34" charset="0"/>
                 <a:ea typeface="Courier New" pitchFamily="34" charset="-122"/>
                 <a:cs typeface="Courier New" pitchFamily="34" charset="-120"/>
               </a:rPr>
-              <a:t>£60,000 in total</a:t>
-            </a:r>
-            <a:endParaRPr lang="en-US" sz="1100" dirty="0"/>
-          </a:p>
-        </p:txBody>
-      </p:sp>
-      <p:sp>
-        <p:nvSpPr>
-          <p:cNvPr id="20" name="Shape 18"/>
+              <a:t>112%</a:t>
+            </a:r>
+            <a:endParaRPr lang="en-US" sz="1200" dirty="0"/>
+          </a:p>
+        </p:txBody>
+      </p:sp>
+      <p:sp>
+        <p:nvSpPr>
+          <p:cNvPr id="28" name="Text 26"/>
+          <p:cNvSpPr txBox="1"/>
+          <p:nvPr/>
+        </p:nvSpPr>
+        <p:spPr>
+          <a:xfrm>
+            <a:off x="3840480" y="2880360"/>
+            <a:ext cx="1691640" cy="379476"/>
+          </a:xfrm>
+          <a:prstGeom prst="rect">
+            <a:avLst/>
+          </a:prstGeom>
+          <a:noFill/>
+          <a:ln/>
+        </p:spPr>
+        <p:txBody>
+          <a:bodyPr wrap="square" lIns="0" tIns="0" rIns="0" bIns="0" rtlCol="0" anchor="ctr"/>
+          <a:lstStyle/>
+          <a:p>
+            <a:pPr algn="r" indent="0" marL="0">
+              <a:buNone/>
+            </a:pPr>
+            <a:r>
+              <a:rPr lang="en-US" sz="1250" b="1" dirty="0">
+                <a:solidFill>
+                  <a:srgbClr val="B58A00"/>
+                </a:solidFill>
+                <a:latin typeface="Courier New" pitchFamily="34" charset="0"/>
+                <a:ea typeface="Courier New" pitchFamily="34" charset="-122"/>
+                <a:cs typeface="Courier New" pitchFamily="34" charset="-120"/>
+              </a:rPr>
+              <a:t>£114,880</a:t>
+            </a:r>
+            <a:endParaRPr lang="en-US" sz="1250" dirty="0"/>
+          </a:p>
+        </p:txBody>
+      </p:sp>
+      <p:sp>
+        <p:nvSpPr>
+          <p:cNvPr id="29" name="Text 27"/>
+          <p:cNvSpPr txBox="1"/>
+          <p:nvPr/>
+        </p:nvSpPr>
+        <p:spPr>
+          <a:xfrm>
+            <a:off x="5779008" y="2880360"/>
+            <a:ext cx="5852160" cy="379476"/>
+          </a:xfrm>
+          <a:prstGeom prst="rect">
+            <a:avLst/>
+          </a:prstGeom>
+          <a:noFill/>
+          <a:ln/>
+        </p:spPr>
+        <p:txBody>
+          <a:bodyPr wrap="square" lIns="0" tIns="0" rIns="0" bIns="0" rtlCol="0" anchor="ctr"/>
+          <a:lstStyle/>
+          <a:p>
+            <a:pPr indent="0" marL="0">
+              <a:buNone/>
+            </a:pPr>
+            <a:r>
+              <a:rPr lang="en-US" sz="1150" dirty="0">
+                <a:solidFill>
+                  <a:srgbClr val="43524F"/>
+                </a:solidFill>
+                <a:latin typeface="Calibri" pitchFamily="34" charset="0"/>
+                <a:ea typeface="Calibri" pitchFamily="34" charset="-122"/>
+                <a:cs typeface="Calibri" pitchFamily="34" charset="-120"/>
+              </a:rPr>
+              <a:t>The only team ahead for the year. Hold it, and tell the rest of us what is working</a:t>
+            </a:r>
+            <a:endParaRPr lang="en-US" sz="1150" dirty="0"/>
+          </a:p>
+        </p:txBody>
+      </p:sp>
+      <p:sp>
+        <p:nvSpPr>
+          <p:cNvPr id="30" name="Shape 28"/>
           <p:cNvSpPr/>
           <p:nvPr/>
         </p:nvSpPr>
         <p:spPr>
           <a:xfrm>
-            <a:off x="7324344" y="2331720"/>
-            <a:ext cx="2103120" cy="2240280"/>
-          </a:xfrm>
-          <a:prstGeom prst="rect">
-            <a:avLst/>
+            <a:off x="640080" y="3314700"/>
+            <a:ext cx="475488" cy="274320"/>
+          </a:xfrm>
+          <a:prstGeom prst="roundRect">
+            <a:avLst>
+              <a:gd name="adj" fmla="val 13333"/>
+            </a:avLst>
           </a:prstGeom>
           <a:solidFill>
-            <a:srgbClr val="1B2E2C"/>
+            <a:srgbClr val="07717A"/>
           </a:solidFill>
           <a:ln w="12700">
             <a:solidFill>
-              <a:srgbClr val="24403D"/>
+              <a:srgbClr val="07717A"/>
             </a:solidFill>
             <a:prstDash val="solid"/>
           </a:ln>
@@ -7820,14 +9039,14 @@
       </p:sp>
       <p:sp>
         <p:nvSpPr>
-          <p:cNvPr id="21" name="Text 19"/>
-          <p:cNvSpPr txBox="1"/>
-          <p:nvPr/>
-        </p:nvSpPr>
-        <p:spPr>
-          <a:xfrm>
-            <a:off x="7461504" y="2505456"/>
-            <a:ext cx="1828800" cy="310896"/>
+          <p:cNvPr id="31" name="Text 29"/>
+          <p:cNvSpPr txBox="1"/>
+          <p:nvPr/>
+        </p:nvSpPr>
+        <p:spPr>
+          <a:xfrm>
+            <a:off x="640080" y="3314700"/>
+            <a:ext cx="475488" cy="274320"/>
           </a:xfrm>
           <a:prstGeom prst="rect">
             <a:avLst/>
@@ -7843,93 +9062,54 @@
               <a:buNone/>
             </a:pPr>
             <a:r>
-              <a:rPr lang="en-US" sz="1400" b="1" dirty="0">
-                <a:solidFill>
-                  <a:srgbClr val="8FA3A0"/>
+              <a:rPr lang="en-US" sz="1100" b="1" dirty="0">
+                <a:solidFill>
+                  <a:srgbClr val="FFFFFF"/>
                 </a:solidFill>
                 <a:latin typeface="Courier New" pitchFamily="34" charset="0"/>
                 <a:ea typeface="Courier New" pitchFamily="34" charset="-122"/>
                 <a:cs typeface="Courier New" pitchFamily="34" charset="-120"/>
               </a:rPr>
-              <a:t>£9.8m</a:t>
-            </a:r>
-            <a:endParaRPr lang="en-US" sz="1400" dirty="0"/>
-          </a:p>
-        </p:txBody>
-      </p:sp>
-      <p:sp>
-        <p:nvSpPr>
-          <p:cNvPr id="22" name="Text 20"/>
-          <p:cNvSpPr txBox="1"/>
-          <p:nvPr/>
-        </p:nvSpPr>
-        <p:spPr>
-          <a:xfrm>
-            <a:off x="7434072" y="2907792"/>
-            <a:ext cx="1883664" cy="658368"/>
-          </a:xfrm>
-          <a:prstGeom prst="rect">
-            <a:avLst/>
-          </a:prstGeom>
-          <a:noFill/>
-          <a:ln/>
-        </p:spPr>
-        <p:txBody>
-          <a:bodyPr wrap="square" lIns="0" tIns="0" rIns="0" bIns="0" rtlCol="0" anchor="ctr"/>
-          <a:lstStyle/>
-          <a:p>
-            <a:pPr algn="ctr" indent="0" marL="0">
-              <a:buNone/>
-            </a:pPr>
-            <a:r>
-              <a:rPr lang="en-US" sz="2700" b="1" dirty="0">
-                <a:solidFill>
-                  <a:srgbClr val="E7EEEC"/>
-                </a:solidFill>
-                <a:latin typeface="Cambria" pitchFamily="34" charset="0"/>
-                <a:ea typeface="Cambria" pitchFamily="34" charset="-122"/>
-                <a:cs typeface="Cambria" pitchFamily="34" charset="-120"/>
-              </a:rPr>
-              <a:t>£20,000</a:t>
-            </a:r>
-            <a:endParaRPr lang="en-US" sz="2700" dirty="0"/>
-          </a:p>
-        </p:txBody>
-      </p:sp>
-      <p:sp>
-        <p:nvSpPr>
-          <p:cNvPr id="23" name="Text 21"/>
-          <p:cNvSpPr txBox="1"/>
-          <p:nvPr/>
-        </p:nvSpPr>
-        <p:spPr>
-          <a:xfrm>
-            <a:off x="7461504" y="3584448"/>
-            <a:ext cx="1828800" cy="256032"/>
-          </a:xfrm>
-          <a:prstGeom prst="rect">
-            <a:avLst/>
-          </a:prstGeom>
-          <a:noFill/>
-          <a:ln/>
-        </p:spPr>
-        <p:txBody>
-          <a:bodyPr wrap="square" lIns="0" tIns="0" rIns="0" bIns="0" rtlCol="0" anchor="ctr"/>
-          <a:lstStyle/>
-          <a:p>
-            <a:pPr algn="ctr" indent="0" marL="0">
+              <a:t>T5</a:t>
+            </a:r>
+            <a:endParaRPr lang="en-US" sz="1100" dirty="0"/>
+          </a:p>
+        </p:txBody>
+      </p:sp>
+      <p:sp>
+        <p:nvSpPr>
+          <p:cNvPr id="32" name="Text 30"/>
+          <p:cNvSpPr txBox="1"/>
+          <p:nvPr/>
+        </p:nvSpPr>
+        <p:spPr>
+          <a:xfrm>
+            <a:off x="1600200" y="3259836"/>
+            <a:ext cx="1371600" cy="379476"/>
+          </a:xfrm>
+          <a:prstGeom prst="rect">
+            <a:avLst/>
+          </a:prstGeom>
+          <a:noFill/>
+          <a:ln/>
+        </p:spPr>
+        <p:txBody>
+          <a:bodyPr wrap="square" lIns="0" tIns="0" rIns="0" bIns="0" rtlCol="0" anchor="ctr"/>
+          <a:lstStyle/>
+          <a:p>
+            <a:pPr indent="0" marL="0">
               <a:buNone/>
             </a:pPr>
             <a:r>
               <a:rPr lang="en-US" sz="1200" dirty="0">
                 <a:solidFill>
-                  <a:srgbClr val="8FA3A0"/>
+                  <a:srgbClr val="43524F"/>
                 </a:solidFill>
                 <a:latin typeface="Calibri" pitchFamily="34" charset="0"/>
                 <a:ea typeface="Calibri" pitchFamily="34" charset="-122"/>
                 <a:cs typeface="Calibri" pitchFamily="34" charset="-120"/>
               </a:rPr>
-              <a:t>each</a:t>
+              <a:t>HH</a:t>
             </a:r>
             <a:endParaRPr lang="en-US" sz="1200" dirty="0"/>
           </a:p>
@@ -7937,63 +9117,141 @@
       </p:sp>
       <p:sp>
         <p:nvSpPr>
-          <p:cNvPr id="24" name="Text 22"/>
-          <p:cNvSpPr txBox="1"/>
-          <p:nvPr/>
-        </p:nvSpPr>
-        <p:spPr>
-          <a:xfrm>
-            <a:off x="7434072" y="3968496"/>
-            <a:ext cx="1883664" cy="274320"/>
-          </a:xfrm>
-          <a:prstGeom prst="rect">
-            <a:avLst/>
-          </a:prstGeom>
-          <a:noFill/>
-          <a:ln/>
-        </p:spPr>
-        <p:txBody>
-          <a:bodyPr wrap="square" lIns="0" tIns="0" rIns="0" bIns="0" rtlCol="0" anchor="ctr"/>
-          <a:lstStyle/>
-          <a:p>
-            <a:pPr algn="ctr" indent="0" marL="0">
-              <a:buNone/>
-            </a:pPr>
-            <a:r>
-              <a:rPr lang="en-US" sz="1100" b="1" dirty="0">
-                <a:solidFill>
-                  <a:srgbClr val="0E8A94"/>
+          <p:cNvPr id="33" name="Text 31"/>
+          <p:cNvSpPr txBox="1"/>
+          <p:nvPr/>
+        </p:nvSpPr>
+        <p:spPr>
+          <a:xfrm>
+            <a:off x="3035808" y="3259836"/>
+            <a:ext cx="731520" cy="379476"/>
+          </a:xfrm>
+          <a:prstGeom prst="rect">
+            <a:avLst/>
+          </a:prstGeom>
+          <a:noFill/>
+          <a:ln/>
+        </p:spPr>
+        <p:txBody>
+          <a:bodyPr wrap="square" lIns="0" tIns="0" rIns="0" bIns="0" rtlCol="0" anchor="ctr"/>
+          <a:lstStyle/>
+          <a:p>
+            <a:pPr algn="r" indent="0" marL="0">
+              <a:buNone/>
+            </a:pPr>
+            <a:r>
+              <a:rPr lang="en-US" sz="1200" b="1" dirty="0">
+                <a:solidFill>
+                  <a:srgbClr val="AD2340"/>
                 </a:solidFill>
                 <a:latin typeface="Courier New" pitchFamily="34" charset="0"/>
                 <a:ea typeface="Courier New" pitchFamily="34" charset="-122"/>
                 <a:cs typeface="Courier New" pitchFamily="34" charset="-120"/>
               </a:rPr>
-              <a:t>£80,000 in total</a:t>
-            </a:r>
-            <a:endParaRPr lang="en-US" sz="1100" dirty="0"/>
-          </a:p>
-        </p:txBody>
-      </p:sp>
-      <p:sp>
-        <p:nvSpPr>
-          <p:cNvPr id="25" name="Shape 23"/>
+              <a:t>63%</a:t>
+            </a:r>
+            <a:endParaRPr lang="en-US" sz="1200" dirty="0"/>
+          </a:p>
+        </p:txBody>
+      </p:sp>
+      <p:sp>
+        <p:nvSpPr>
+          <p:cNvPr id="34" name="Text 32"/>
+          <p:cNvSpPr txBox="1"/>
+          <p:nvPr/>
+        </p:nvSpPr>
+        <p:spPr>
+          <a:xfrm>
+            <a:off x="3840480" y="3259836"/>
+            <a:ext cx="1691640" cy="379476"/>
+          </a:xfrm>
+          <a:prstGeom prst="rect">
+            <a:avLst/>
+          </a:prstGeom>
+          <a:noFill/>
+          <a:ln/>
+        </p:spPr>
+        <p:txBody>
+          <a:bodyPr wrap="square" lIns="0" tIns="0" rIns="0" bIns="0" rtlCol="0" anchor="ctr"/>
+          <a:lstStyle/>
+          <a:p>
+            <a:pPr algn="r" indent="0" marL="0">
+              <a:buNone/>
+            </a:pPr>
+            <a:r>
+              <a:rPr lang="en-US" sz="1250" b="1" dirty="0">
+                <a:solidFill>
+                  <a:srgbClr val="B58A00"/>
+                </a:solidFill>
+                <a:latin typeface="Courier New" pitchFamily="34" charset="0"/>
+                <a:ea typeface="Courier New" pitchFamily="34" charset="-122"/>
+                <a:cs typeface="Courier New" pitchFamily="34" charset="-120"/>
+              </a:rPr>
+              <a:t>£54,770</a:t>
+            </a:r>
+            <a:endParaRPr lang="en-US" sz="1250" dirty="0"/>
+          </a:p>
+        </p:txBody>
+      </p:sp>
+      <p:sp>
+        <p:nvSpPr>
+          <p:cNvPr id="35" name="Text 33"/>
+          <p:cNvSpPr txBox="1"/>
+          <p:nvPr/>
+        </p:nvSpPr>
+        <p:spPr>
+          <a:xfrm>
+            <a:off x="5779008" y="3259836"/>
+            <a:ext cx="5852160" cy="379476"/>
+          </a:xfrm>
+          <a:prstGeom prst="rect">
+            <a:avLst/>
+          </a:prstGeom>
+          <a:noFill/>
+          <a:ln/>
+        </p:spPr>
+        <p:txBody>
+          <a:bodyPr wrap="square" lIns="0" tIns="0" rIns="0" bIns="0" rtlCol="0" anchor="ctr"/>
+          <a:lstStyle/>
+          <a:p>
+            <a:pPr indent="0" marL="0">
+              <a:buNone/>
+            </a:pPr>
+            <a:r>
+              <a:rPr lang="en-US" sz="1150" dirty="0">
+                <a:solidFill>
+                  <a:srgbClr val="43524F"/>
+                </a:solidFill>
+                <a:latin typeface="Calibri" pitchFamily="34" charset="0"/>
+                <a:ea typeface="Calibri" pitchFamily="34" charset="-122"/>
+                <a:cs typeface="Calibri" pitchFamily="34" charset="-120"/>
+              </a:rPr>
+              <a:t>£222,219 behind. Convert what is already in the pipeline</a:t>
+            </a:r>
+            <a:endParaRPr lang="en-US" sz="1150" dirty="0"/>
+          </a:p>
+        </p:txBody>
+      </p:sp>
+      <p:sp>
+        <p:nvSpPr>
+          <p:cNvPr id="36" name="Shape 34"/>
           <p:cNvSpPr/>
           <p:nvPr/>
         </p:nvSpPr>
         <p:spPr>
           <a:xfrm>
-            <a:off x="9582912" y="2331720"/>
-            <a:ext cx="2103120" cy="2240280"/>
+            <a:off x="548640" y="3639312"/>
+            <a:ext cx="11091672" cy="379476"/>
           </a:xfrm>
           <a:prstGeom prst="rect">
             <a:avLst/>
           </a:prstGeom>
           <a:solidFill>
-            <a:srgbClr val="B58A00"/>
+            <a:srgbClr val="EEF1F0"/>
           </a:solidFill>
           <a:ln w="12700">
             <a:solidFill>
-              <a:srgbClr val="B58A00"/>
+              <a:srgbClr val="EEF1F0"/>
             </a:solidFill>
             <a:prstDash val="solid"/>
           </a:ln>
@@ -8001,14 +9259,41 @@
       </p:sp>
       <p:sp>
         <p:nvSpPr>
-          <p:cNvPr id="26" name="Text 24"/>
-          <p:cNvSpPr txBox="1"/>
-          <p:nvPr/>
-        </p:nvSpPr>
-        <p:spPr>
-          <a:xfrm>
-            <a:off x="9720072" y="2505456"/>
-            <a:ext cx="1828800" cy="310896"/>
+          <p:cNvPr id="37" name="Shape 35"/>
+          <p:cNvSpPr/>
+          <p:nvPr/>
+        </p:nvSpPr>
+        <p:spPr>
+          <a:xfrm>
+            <a:off x="640080" y="3694176"/>
+            <a:ext cx="475488" cy="274320"/>
+          </a:xfrm>
+          <a:prstGeom prst="roundRect">
+            <a:avLst>
+              <a:gd name="adj" fmla="val 13333"/>
+            </a:avLst>
+          </a:prstGeom>
+          <a:solidFill>
+            <a:srgbClr val="07717A"/>
+          </a:solidFill>
+          <a:ln w="12700">
+            <a:solidFill>
+              <a:srgbClr val="07717A"/>
+            </a:solidFill>
+            <a:prstDash val="solid"/>
+          </a:ln>
+        </p:spPr>
+      </p:sp>
+      <p:sp>
+        <p:nvSpPr>
+          <p:cNvPr id="38" name="Text 36"/>
+          <p:cNvSpPr txBox="1"/>
+          <p:nvPr/>
+        </p:nvSpPr>
+        <p:spPr>
+          <a:xfrm>
+            <a:off x="640080" y="3694176"/>
+            <a:ext cx="475488" cy="274320"/>
           </a:xfrm>
           <a:prstGeom prst="rect">
             <a:avLst/>
@@ -8024,93 +9309,54 @@
               <a:buNone/>
             </a:pPr>
             <a:r>
-              <a:rPr lang="en-US" sz="1400" b="1" dirty="0">
-                <a:solidFill>
-                  <a:srgbClr val="14201E"/>
+              <a:rPr lang="en-US" sz="1100" b="1" dirty="0">
+                <a:solidFill>
+                  <a:srgbClr val="FFFFFF"/>
                 </a:solidFill>
                 <a:latin typeface="Courier New" pitchFamily="34" charset="0"/>
                 <a:ea typeface="Courier New" pitchFamily="34" charset="-122"/>
                 <a:cs typeface="Courier New" pitchFamily="34" charset="-120"/>
               </a:rPr>
-              <a:t>£10.0m</a:t>
-            </a:r>
-            <a:endParaRPr lang="en-US" sz="1400" dirty="0"/>
-          </a:p>
-        </p:txBody>
-      </p:sp>
-      <p:sp>
-        <p:nvSpPr>
-          <p:cNvPr id="27" name="Text 25"/>
-          <p:cNvSpPr txBox="1"/>
-          <p:nvPr/>
-        </p:nvSpPr>
-        <p:spPr>
-          <a:xfrm>
-            <a:off x="9692640" y="2907792"/>
-            <a:ext cx="1883664" cy="658368"/>
-          </a:xfrm>
-          <a:prstGeom prst="rect">
-            <a:avLst/>
-          </a:prstGeom>
-          <a:noFill/>
-          <a:ln/>
-        </p:spPr>
-        <p:txBody>
-          <a:bodyPr wrap="square" lIns="0" tIns="0" rIns="0" bIns="0" rtlCol="0" anchor="ctr"/>
-          <a:lstStyle/>
-          <a:p>
-            <a:pPr algn="ctr" indent="0" marL="0">
-              <a:buNone/>
-            </a:pPr>
-            <a:r>
-              <a:rPr lang="en-US" sz="3100" b="1" dirty="0">
-                <a:solidFill>
-                  <a:srgbClr val="14201E"/>
-                </a:solidFill>
-                <a:latin typeface="Cambria" pitchFamily="34" charset="0"/>
-                <a:ea typeface="Cambria" pitchFamily="34" charset="-122"/>
-                <a:cs typeface="Cambria" pitchFamily="34" charset="-120"/>
-              </a:rPr>
-              <a:t>£25,000</a:t>
-            </a:r>
-            <a:endParaRPr lang="en-US" sz="3100" dirty="0"/>
-          </a:p>
-        </p:txBody>
-      </p:sp>
-      <p:sp>
-        <p:nvSpPr>
-          <p:cNvPr id="28" name="Text 26"/>
-          <p:cNvSpPr txBox="1"/>
-          <p:nvPr/>
-        </p:nvSpPr>
-        <p:spPr>
-          <a:xfrm>
-            <a:off x="9720072" y="3584448"/>
-            <a:ext cx="1828800" cy="256032"/>
-          </a:xfrm>
-          <a:prstGeom prst="rect">
-            <a:avLst/>
-          </a:prstGeom>
-          <a:noFill/>
-          <a:ln/>
-        </p:spPr>
-        <p:txBody>
-          <a:bodyPr wrap="square" lIns="0" tIns="0" rIns="0" bIns="0" rtlCol="0" anchor="ctr"/>
-          <a:lstStyle/>
-          <a:p>
-            <a:pPr algn="ctr" indent="0" marL="0">
+              <a:t>T9</a:t>
+            </a:r>
+            <a:endParaRPr lang="en-US" sz="1100" dirty="0"/>
+          </a:p>
+        </p:txBody>
+      </p:sp>
+      <p:sp>
+        <p:nvSpPr>
+          <p:cNvPr id="39" name="Text 37"/>
+          <p:cNvSpPr txBox="1"/>
+          <p:nvPr/>
+        </p:nvSpPr>
+        <p:spPr>
+          <a:xfrm>
+            <a:off x="1600200" y="3639312"/>
+            <a:ext cx="1371600" cy="379476"/>
+          </a:xfrm>
+          <a:prstGeom prst="rect">
+            <a:avLst/>
+          </a:prstGeom>
+          <a:noFill/>
+          <a:ln/>
+        </p:spPr>
+        <p:txBody>
+          <a:bodyPr wrap="square" lIns="0" tIns="0" rIns="0" bIns="0" rtlCol="0" anchor="ctr"/>
+          <a:lstStyle/>
+          <a:p>
+            <a:pPr indent="0" marL="0">
               <a:buNone/>
             </a:pPr>
             <a:r>
               <a:rPr lang="en-US" sz="1200" dirty="0">
                 <a:solidFill>
-                  <a:srgbClr val="14201E"/>
+                  <a:srgbClr val="43524F"/>
                 </a:solidFill>
                 <a:latin typeface="Calibri" pitchFamily="34" charset="0"/>
                 <a:ea typeface="Calibri" pitchFamily="34" charset="-122"/>
                 <a:cs typeface="Calibri" pitchFamily="34" charset="-120"/>
               </a:rPr>
-              <a:t>each</a:t>
+              <a:t>JW</a:t>
             </a:r>
             <a:endParaRPr lang="en-US" sz="1200" dirty="0"/>
           </a:p>
@@ -8118,30 +9364,30 @@
       </p:sp>
       <p:sp>
         <p:nvSpPr>
-          <p:cNvPr id="29" name="Text 27"/>
-          <p:cNvSpPr txBox="1"/>
-          <p:nvPr/>
-        </p:nvSpPr>
-        <p:spPr>
-          <a:xfrm>
-            <a:off x="9692640" y="3968496"/>
-            <a:ext cx="1883664" cy="274320"/>
-          </a:xfrm>
-          <a:prstGeom prst="rect">
-            <a:avLst/>
-          </a:prstGeom>
-          <a:noFill/>
-          <a:ln/>
-        </p:spPr>
-        <p:txBody>
-          <a:bodyPr wrap="square" lIns="0" tIns="0" rIns="0" bIns="0" rtlCol="0" anchor="ctr"/>
-          <a:lstStyle/>
-          <a:p>
-            <a:pPr algn="ctr" indent="0" marL="0">
-              <a:buNone/>
-            </a:pPr>
-            <a:r>
-              <a:rPr lang="en-US" sz="1100" b="1" dirty="0">
+          <p:cNvPr id="40" name="Text 38"/>
+          <p:cNvSpPr txBox="1"/>
+          <p:nvPr/>
+        </p:nvSpPr>
+        <p:spPr>
+          <a:xfrm>
+            <a:off x="3035808" y="3639312"/>
+            <a:ext cx="731520" cy="379476"/>
+          </a:xfrm>
+          <a:prstGeom prst="rect">
+            <a:avLst/>
+          </a:prstGeom>
+          <a:noFill/>
+          <a:ln/>
+        </p:spPr>
+        <p:txBody>
+          <a:bodyPr wrap="square" lIns="0" tIns="0" rIns="0" bIns="0" rtlCol="0" anchor="ctr"/>
+          <a:lstStyle/>
+          <a:p>
+            <a:pPr algn="r" indent="0" marL="0">
+              <a:buNone/>
+            </a:pPr>
+            <a:r>
+              <a:rPr lang="en-US" sz="1200" b="1" dirty="0">
                 <a:solidFill>
                   <a:srgbClr val="14201E"/>
                 </a:solidFill>
@@ -8149,22 +9395,61 @@
                 <a:ea typeface="Courier New" pitchFamily="34" charset="-122"/>
                 <a:cs typeface="Courier New" pitchFamily="34" charset="-120"/>
               </a:rPr>
-              <a:t>£100,000 in total</a:t>
-            </a:r>
-            <a:endParaRPr lang="en-US" sz="1100" dirty="0"/>
-          </a:p>
-        </p:txBody>
-      </p:sp>
-      <p:sp>
-        <p:nvSpPr>
-          <p:cNvPr id="30" name="Text 28"/>
-          <p:cNvSpPr txBox="1"/>
-          <p:nvPr/>
-        </p:nvSpPr>
-        <p:spPr>
-          <a:xfrm>
-            <a:off x="548640" y="4846320"/>
-            <a:ext cx="11091672" cy="457200"/>
+              <a:t>75%</a:t>
+            </a:r>
+            <a:endParaRPr lang="en-US" sz="1200" dirty="0"/>
+          </a:p>
+        </p:txBody>
+      </p:sp>
+      <p:sp>
+        <p:nvSpPr>
+          <p:cNvPr id="41" name="Text 39"/>
+          <p:cNvSpPr txBox="1"/>
+          <p:nvPr/>
+        </p:nvSpPr>
+        <p:spPr>
+          <a:xfrm>
+            <a:off x="3840480" y="3639312"/>
+            <a:ext cx="1691640" cy="379476"/>
+          </a:xfrm>
+          <a:prstGeom prst="rect">
+            <a:avLst/>
+          </a:prstGeom>
+          <a:noFill/>
+          <a:ln/>
+        </p:spPr>
+        <p:txBody>
+          <a:bodyPr wrap="square" lIns="0" tIns="0" rIns="0" bIns="0" rtlCol="0" anchor="ctr"/>
+          <a:lstStyle/>
+          <a:p>
+            <a:pPr algn="r" indent="0" marL="0">
+              <a:buNone/>
+            </a:pPr>
+            <a:r>
+              <a:rPr lang="en-US" sz="1250" b="1" dirty="0">
+                <a:solidFill>
+                  <a:srgbClr val="B58A00"/>
+                </a:solidFill>
+                <a:latin typeface="Courier New" pitchFamily="34" charset="0"/>
+                <a:ea typeface="Courier New" pitchFamily="34" charset="-122"/>
+                <a:cs typeface="Courier New" pitchFamily="34" charset="-120"/>
+              </a:rPr>
+              <a:t>£34,063</a:t>
+            </a:r>
+            <a:endParaRPr lang="en-US" sz="1250" dirty="0"/>
+          </a:p>
+        </p:txBody>
+      </p:sp>
+      <p:sp>
+        <p:nvSpPr>
+          <p:cNvPr id="42" name="Text 40"/>
+          <p:cNvSpPr txBox="1"/>
+          <p:nvPr/>
+        </p:nvSpPr>
+        <p:spPr>
+          <a:xfrm>
+            <a:off x="5779008" y="3639312"/>
+            <a:ext cx="5852160" cy="379476"/>
           </a:xfrm>
           <a:prstGeom prst="rect">
             <a:avLst/>
@@ -8180,30 +9465,96 @@
               <a:buNone/>
             </a:pPr>
             <a:r>
-              <a:rPr lang="en-US" sz="1500" dirty="0">
-                <a:solidFill>
-                  <a:srgbClr val="E7EEEC"/>
+              <a:rPr lang="en-US" sz="1150" dirty="0">
+                <a:solidFill>
+                  <a:srgbClr val="43524F"/>
                 </a:solidFill>
                 <a:latin typeface="Calibri" pitchFamily="34" charset="0"/>
                 <a:ea typeface="Calibri" pitchFamily="34" charset="-122"/>
                 <a:cs typeface="Calibri" pitchFamily="34" charset="-120"/>
               </a:rPr>
-              <a:t>Ten million means £25,000 each — £100,000 shared between the four of you, out of £1,000,000 of fee income above the goal.</a:t>
-            </a:r>
-            <a:endParaRPr lang="en-US" sz="1500" dirty="0"/>
-          </a:p>
-        </p:txBody>
-      </p:sp>
-      <p:sp>
-        <p:nvSpPr>
-          <p:cNvPr id="31" name="Text 29"/>
-          <p:cNvSpPr txBox="1"/>
-          <p:nvPr/>
-        </p:nvSpPr>
-        <p:spPr>
-          <a:xfrm>
-            <a:off x="548640" y="5897880"/>
-            <a:ext cx="11091672" cy="411480"/>
+              <a:t>Steady all year. Clear the August carry-over and lift the weekly rate</a:t>
+            </a:r>
+            <a:endParaRPr lang="en-US" sz="1150" dirty="0"/>
+          </a:p>
+        </p:txBody>
+      </p:sp>
+      <p:sp>
+        <p:nvSpPr>
+          <p:cNvPr id="43" name="Shape 41"/>
+          <p:cNvSpPr/>
+          <p:nvPr/>
+        </p:nvSpPr>
+        <p:spPr>
+          <a:xfrm>
+            <a:off x="640080" y="4073652"/>
+            <a:ext cx="475488" cy="274320"/>
+          </a:xfrm>
+          <a:prstGeom prst="roundRect">
+            <a:avLst>
+              <a:gd name="adj" fmla="val 13333"/>
+            </a:avLst>
+          </a:prstGeom>
+          <a:solidFill>
+            <a:srgbClr val="07717A"/>
+          </a:solidFill>
+          <a:ln w="12700">
+            <a:solidFill>
+              <a:srgbClr val="07717A"/>
+            </a:solidFill>
+            <a:prstDash val="solid"/>
+          </a:ln>
+        </p:spPr>
+      </p:sp>
+      <p:sp>
+        <p:nvSpPr>
+          <p:cNvPr id="44" name="Text 42"/>
+          <p:cNvSpPr txBox="1"/>
+          <p:nvPr/>
+        </p:nvSpPr>
+        <p:spPr>
+          <a:xfrm>
+            <a:off x="640080" y="4073652"/>
+            <a:ext cx="475488" cy="274320"/>
+          </a:xfrm>
+          <a:prstGeom prst="rect">
+            <a:avLst/>
+          </a:prstGeom>
+          <a:noFill/>
+          <a:ln/>
+        </p:spPr>
+        <p:txBody>
+          <a:bodyPr wrap="square" lIns="0" tIns="0" rIns="0" bIns="0" rtlCol="0" anchor="ctr"/>
+          <a:lstStyle/>
+          <a:p>
+            <a:pPr algn="ctr" indent="0" marL="0">
+              <a:buNone/>
+            </a:pPr>
+            <a:r>
+              <a:rPr lang="en-US" sz="1100" b="1" dirty="0">
+                <a:solidFill>
+                  <a:srgbClr val="FFFFFF"/>
+                </a:solidFill>
+                <a:latin typeface="Courier New" pitchFamily="34" charset="0"/>
+                <a:ea typeface="Courier New" pitchFamily="34" charset="-122"/>
+                <a:cs typeface="Courier New" pitchFamily="34" charset="-120"/>
+              </a:rPr>
+              <a:t>T8</a:t>
+            </a:r>
+            <a:endParaRPr lang="en-US" sz="1100" dirty="0"/>
+          </a:p>
+        </p:txBody>
+      </p:sp>
+      <p:sp>
+        <p:nvSpPr>
+          <p:cNvPr id="45" name="Text 43"/>
+          <p:cNvSpPr txBox="1"/>
+          <p:nvPr/>
+        </p:nvSpPr>
+        <p:spPr>
+          <a:xfrm>
+            <a:off x="1600200" y="4018788"/>
+            <a:ext cx="1371600" cy="379476"/>
           </a:xfrm>
           <a:prstGeom prst="rect">
             <a:avLst/>
@@ -8219,15 +9570,1109 @@
               <a:buNone/>
             </a:pPr>
             <a:r>
-              <a:rPr lang="en-US" sz="1100" i="1" dirty="0">
-                <a:solidFill>
-                  <a:srgbClr val="8FA3A0"/>
+              <a:rPr lang="en-US" sz="1200" dirty="0">
+                <a:solidFill>
+                  <a:srgbClr val="43524F"/>
                 </a:solidFill>
                 <a:latin typeface="Calibri" pitchFamily="34" charset="0"/>
                 <a:ea typeface="Calibri" pitchFamily="34" charset="-122"/>
                 <a:cs typeface="Calibri" pitchFamily="34" charset="-120"/>
               </a:rPr>
-              <a:t>Measured on fees invoiced, not cash collected. The scheme pays 10% of everything above £9m at every rung. Payment date to be confirmed.</a:t>
+              <a:t>KG</a:t>
+            </a:r>
+            <a:endParaRPr lang="en-US" sz="1200" dirty="0"/>
+          </a:p>
+        </p:txBody>
+      </p:sp>
+      <p:sp>
+        <p:nvSpPr>
+          <p:cNvPr id="46" name="Text 44"/>
+          <p:cNvSpPr txBox="1"/>
+          <p:nvPr/>
+        </p:nvSpPr>
+        <p:spPr>
+          <a:xfrm>
+            <a:off x="3035808" y="4018788"/>
+            <a:ext cx="731520" cy="379476"/>
+          </a:xfrm>
+          <a:prstGeom prst="rect">
+            <a:avLst/>
+          </a:prstGeom>
+          <a:noFill/>
+          <a:ln/>
+        </p:spPr>
+        <p:txBody>
+          <a:bodyPr wrap="square" lIns="0" tIns="0" rIns="0" bIns="0" rtlCol="0" anchor="ctr"/>
+          <a:lstStyle/>
+          <a:p>
+            <a:pPr algn="r" indent="0" marL="0">
+              <a:buNone/>
+            </a:pPr>
+            <a:r>
+              <a:rPr lang="en-US" sz="1200" b="1" dirty="0">
+                <a:solidFill>
+                  <a:srgbClr val="14201E"/>
+                </a:solidFill>
+                <a:latin typeface="Courier New" pitchFamily="34" charset="0"/>
+                <a:ea typeface="Courier New" pitchFamily="34" charset="-122"/>
+                <a:cs typeface="Courier New" pitchFamily="34" charset="-120"/>
+              </a:rPr>
+              <a:t>70%</a:t>
+            </a:r>
+            <a:endParaRPr lang="en-US" sz="1200" dirty="0"/>
+          </a:p>
+        </p:txBody>
+      </p:sp>
+      <p:sp>
+        <p:nvSpPr>
+          <p:cNvPr id="47" name="Text 45"/>
+          <p:cNvSpPr txBox="1"/>
+          <p:nvPr/>
+        </p:nvSpPr>
+        <p:spPr>
+          <a:xfrm>
+            <a:off x="3840480" y="4018788"/>
+            <a:ext cx="1691640" cy="379476"/>
+          </a:xfrm>
+          <a:prstGeom prst="rect">
+            <a:avLst/>
+          </a:prstGeom>
+          <a:noFill/>
+          <a:ln/>
+        </p:spPr>
+        <p:txBody>
+          <a:bodyPr wrap="square" lIns="0" tIns="0" rIns="0" bIns="0" rtlCol="0" anchor="ctr"/>
+          <a:lstStyle/>
+          <a:p>
+            <a:pPr algn="r" indent="0" marL="0">
+              <a:buNone/>
+            </a:pPr>
+            <a:r>
+              <a:rPr lang="en-US" sz="1250" b="1" dirty="0">
+                <a:solidFill>
+                  <a:srgbClr val="B58A00"/>
+                </a:solidFill>
+                <a:latin typeface="Courier New" pitchFamily="34" charset="0"/>
+                <a:ea typeface="Courier New" pitchFamily="34" charset="-122"/>
+                <a:cs typeface="Courier New" pitchFamily="34" charset="-120"/>
+              </a:rPr>
+              <a:t>£30,932</a:t>
+            </a:r>
+            <a:endParaRPr lang="en-US" sz="1250" dirty="0"/>
+          </a:p>
+        </p:txBody>
+      </p:sp>
+      <p:sp>
+        <p:nvSpPr>
+          <p:cNvPr id="48" name="Text 46"/>
+          <p:cNvSpPr txBox="1"/>
+          <p:nvPr/>
+        </p:nvSpPr>
+        <p:spPr>
+          <a:xfrm>
+            <a:off x="5779008" y="4018788"/>
+            <a:ext cx="5852160" cy="379476"/>
+          </a:xfrm>
+          <a:prstGeom prst="rect">
+            <a:avLst/>
+          </a:prstGeom>
+          <a:noFill/>
+          <a:ln/>
+        </p:spPr>
+        <p:txBody>
+          <a:bodyPr wrap="square" lIns="0" tIns="0" rIns="0" bIns="0" rtlCol="0" anchor="ctr"/>
+          <a:lstStyle/>
+          <a:p>
+            <a:pPr indent="0" marL="0">
+              <a:buNone/>
+            </a:pPr>
+            <a:r>
+              <a:rPr lang="en-US" sz="1150" dirty="0">
+                <a:solidFill>
+                  <a:srgbClr val="43524F"/>
+                </a:solidFill>
+                <a:latin typeface="Calibri" pitchFamily="34" charset="0"/>
+                <a:ea typeface="Calibri" pitchFamily="34" charset="-122"/>
+                <a:cs typeface="Calibri" pitchFamily="34" charset="-120"/>
+              </a:rPr>
+              <a:t>£92,546 behind. Review instruction volume against surveyor availability</a:t>
+            </a:r>
+            <a:endParaRPr lang="en-US" sz="1150" dirty="0"/>
+          </a:p>
+        </p:txBody>
+      </p:sp>
+      <p:sp>
+        <p:nvSpPr>
+          <p:cNvPr id="49" name="Shape 47"/>
+          <p:cNvSpPr/>
+          <p:nvPr/>
+        </p:nvSpPr>
+        <p:spPr>
+          <a:xfrm>
+            <a:off x="548640" y="4398264"/>
+            <a:ext cx="11091672" cy="379476"/>
+          </a:xfrm>
+          <a:prstGeom prst="rect">
+            <a:avLst/>
+          </a:prstGeom>
+          <a:solidFill>
+            <a:srgbClr val="EEF1F0"/>
+          </a:solidFill>
+          <a:ln w="12700">
+            <a:solidFill>
+              <a:srgbClr val="EEF1F0"/>
+            </a:solidFill>
+            <a:prstDash val="solid"/>
+          </a:ln>
+        </p:spPr>
+      </p:sp>
+      <p:sp>
+        <p:nvSpPr>
+          <p:cNvPr id="50" name="Shape 48"/>
+          <p:cNvSpPr/>
+          <p:nvPr/>
+        </p:nvSpPr>
+        <p:spPr>
+          <a:xfrm>
+            <a:off x="640080" y="4453128"/>
+            <a:ext cx="475488" cy="274320"/>
+          </a:xfrm>
+          <a:prstGeom prst="roundRect">
+            <a:avLst>
+              <a:gd name="adj" fmla="val 13333"/>
+            </a:avLst>
+          </a:prstGeom>
+          <a:solidFill>
+            <a:srgbClr val="07717A"/>
+          </a:solidFill>
+          <a:ln w="12700">
+            <a:solidFill>
+              <a:srgbClr val="07717A"/>
+            </a:solidFill>
+            <a:prstDash val="solid"/>
+          </a:ln>
+        </p:spPr>
+      </p:sp>
+      <p:sp>
+        <p:nvSpPr>
+          <p:cNvPr id="51" name="Text 49"/>
+          <p:cNvSpPr txBox="1"/>
+          <p:nvPr/>
+        </p:nvSpPr>
+        <p:spPr>
+          <a:xfrm>
+            <a:off x="640080" y="4453128"/>
+            <a:ext cx="475488" cy="274320"/>
+          </a:xfrm>
+          <a:prstGeom prst="rect">
+            <a:avLst/>
+          </a:prstGeom>
+          <a:noFill/>
+          <a:ln/>
+        </p:spPr>
+        <p:txBody>
+          <a:bodyPr wrap="square" lIns="0" tIns="0" rIns="0" bIns="0" rtlCol="0" anchor="ctr"/>
+          <a:lstStyle/>
+          <a:p>
+            <a:pPr algn="ctr" indent="0" marL="0">
+              <a:buNone/>
+            </a:pPr>
+            <a:r>
+              <a:rPr lang="en-US" sz="1100" b="1" dirty="0">
+                <a:solidFill>
+                  <a:srgbClr val="FFFFFF"/>
+                </a:solidFill>
+                <a:latin typeface="Courier New" pitchFamily="34" charset="0"/>
+                <a:ea typeface="Courier New" pitchFamily="34" charset="-122"/>
+                <a:cs typeface="Courier New" pitchFamily="34" charset="-120"/>
+              </a:rPr>
+              <a:t>T1</a:t>
+            </a:r>
+            <a:endParaRPr lang="en-US" sz="1100" dirty="0"/>
+          </a:p>
+        </p:txBody>
+      </p:sp>
+      <p:sp>
+        <p:nvSpPr>
+          <p:cNvPr id="52" name="Text 50"/>
+          <p:cNvSpPr txBox="1"/>
+          <p:nvPr/>
+        </p:nvSpPr>
+        <p:spPr>
+          <a:xfrm>
+            <a:off x="1600200" y="4398264"/>
+            <a:ext cx="1371600" cy="379476"/>
+          </a:xfrm>
+          <a:prstGeom prst="rect">
+            <a:avLst/>
+          </a:prstGeom>
+          <a:noFill/>
+          <a:ln/>
+        </p:spPr>
+        <p:txBody>
+          <a:bodyPr wrap="square" lIns="0" tIns="0" rIns="0" bIns="0" rtlCol="0" anchor="ctr"/>
+          <a:lstStyle/>
+          <a:p>
+            <a:pPr indent="0" marL="0">
+              <a:buNone/>
+            </a:pPr>
+            <a:r>
+              <a:rPr lang="en-US" sz="1200" dirty="0">
+                <a:solidFill>
+                  <a:srgbClr val="43524F"/>
+                </a:solidFill>
+                <a:latin typeface="Calibri" pitchFamily="34" charset="0"/>
+                <a:ea typeface="Calibri" pitchFamily="34" charset="-122"/>
+                <a:cs typeface="Calibri" pitchFamily="34" charset="-120"/>
+              </a:rPr>
+              <a:t>KP</a:t>
+            </a:r>
+            <a:endParaRPr lang="en-US" sz="1200" dirty="0"/>
+          </a:p>
+        </p:txBody>
+      </p:sp>
+      <p:sp>
+        <p:nvSpPr>
+          <p:cNvPr id="53" name="Text 51"/>
+          <p:cNvSpPr txBox="1"/>
+          <p:nvPr/>
+        </p:nvSpPr>
+        <p:spPr>
+          <a:xfrm>
+            <a:off x="3035808" y="4398264"/>
+            <a:ext cx="731520" cy="379476"/>
+          </a:xfrm>
+          <a:prstGeom prst="rect">
+            <a:avLst/>
+          </a:prstGeom>
+          <a:noFill/>
+          <a:ln/>
+        </p:spPr>
+        <p:txBody>
+          <a:bodyPr wrap="square" lIns="0" tIns="0" rIns="0" bIns="0" rtlCol="0" anchor="ctr"/>
+          <a:lstStyle/>
+          <a:p>
+            <a:pPr algn="r" indent="0" marL="0">
+              <a:buNone/>
+            </a:pPr>
+            <a:r>
+              <a:rPr lang="en-US" sz="1200" b="1" dirty="0">
+                <a:solidFill>
+                  <a:srgbClr val="14201E"/>
+                </a:solidFill>
+                <a:latin typeface="Courier New" pitchFamily="34" charset="0"/>
+                <a:ea typeface="Courier New" pitchFamily="34" charset="-122"/>
+                <a:cs typeface="Courier New" pitchFamily="34" charset="-120"/>
+              </a:rPr>
+              <a:t>83%</a:t>
+            </a:r>
+            <a:endParaRPr lang="en-US" sz="1200" dirty="0"/>
+          </a:p>
+        </p:txBody>
+      </p:sp>
+      <p:sp>
+        <p:nvSpPr>
+          <p:cNvPr id="54" name="Text 52"/>
+          <p:cNvSpPr txBox="1"/>
+          <p:nvPr/>
+        </p:nvSpPr>
+        <p:spPr>
+          <a:xfrm>
+            <a:off x="3840480" y="4398264"/>
+            <a:ext cx="1691640" cy="379476"/>
+          </a:xfrm>
+          <a:prstGeom prst="rect">
+            <a:avLst/>
+          </a:prstGeom>
+          <a:noFill/>
+          <a:ln/>
+        </p:spPr>
+        <p:txBody>
+          <a:bodyPr wrap="square" lIns="0" tIns="0" rIns="0" bIns="0" rtlCol="0" anchor="ctr"/>
+          <a:lstStyle/>
+          <a:p>
+            <a:pPr algn="r" indent="0" marL="0">
+              <a:buNone/>
+            </a:pPr>
+            <a:r>
+              <a:rPr lang="en-US" sz="1250" b="1" dirty="0">
+                <a:solidFill>
+                  <a:srgbClr val="B58A00"/>
+                </a:solidFill>
+                <a:latin typeface="Courier New" pitchFamily="34" charset="0"/>
+                <a:ea typeface="Courier New" pitchFamily="34" charset="-122"/>
+                <a:cs typeface="Courier New" pitchFamily="34" charset="-120"/>
+              </a:rPr>
+              <a:t>£27,043</a:t>
+            </a:r>
+            <a:endParaRPr lang="en-US" sz="1250" dirty="0"/>
+          </a:p>
+        </p:txBody>
+      </p:sp>
+      <p:sp>
+        <p:nvSpPr>
+          <p:cNvPr id="55" name="Text 53"/>
+          <p:cNvSpPr txBox="1"/>
+          <p:nvPr/>
+        </p:nvSpPr>
+        <p:spPr>
+          <a:xfrm>
+            <a:off x="5779008" y="4398264"/>
+            <a:ext cx="5852160" cy="379476"/>
+          </a:xfrm>
+          <a:prstGeom prst="rect">
+            <a:avLst/>
+          </a:prstGeom>
+          <a:noFill/>
+          <a:ln/>
+        </p:spPr>
+        <p:txBody>
+          <a:bodyPr wrap="square" lIns="0" tIns="0" rIns="0" bIns="0" rtlCol="0" anchor="ctr"/>
+          <a:lstStyle/>
+          <a:p>
+            <a:pPr indent="0" marL="0">
+              <a:buNone/>
+            </a:pPr>
+            <a:r>
+              <a:rPr lang="en-US" sz="1150" dirty="0">
+                <a:solidFill>
+                  <a:srgbClr val="43524F"/>
+                </a:solidFill>
+                <a:latin typeface="Calibri" pitchFamily="34" charset="0"/>
+                <a:ea typeface="Calibri" pitchFamily="34" charset="-122"/>
+                <a:cs typeface="Calibri" pitchFamily="34" charset="-120"/>
+              </a:rPr>
+              <a:t>Beat target in week one. Keep that weekly discipline through Q4</a:t>
+            </a:r>
+            <a:endParaRPr lang="en-US" sz="1150" dirty="0"/>
+          </a:p>
+        </p:txBody>
+      </p:sp>
+      <p:sp>
+        <p:nvSpPr>
+          <p:cNvPr id="56" name="Shape 54"/>
+          <p:cNvSpPr/>
+          <p:nvPr/>
+        </p:nvSpPr>
+        <p:spPr>
+          <a:xfrm>
+            <a:off x="640080" y="4832604"/>
+            <a:ext cx="475488" cy="274320"/>
+          </a:xfrm>
+          <a:prstGeom prst="roundRect">
+            <a:avLst>
+              <a:gd name="adj" fmla="val 13333"/>
+            </a:avLst>
+          </a:prstGeom>
+          <a:solidFill>
+            <a:srgbClr val="07717A"/>
+          </a:solidFill>
+          <a:ln w="12700">
+            <a:solidFill>
+              <a:srgbClr val="07717A"/>
+            </a:solidFill>
+            <a:prstDash val="solid"/>
+          </a:ln>
+        </p:spPr>
+      </p:sp>
+      <p:sp>
+        <p:nvSpPr>
+          <p:cNvPr id="57" name="Text 55"/>
+          <p:cNvSpPr txBox="1"/>
+          <p:nvPr/>
+        </p:nvSpPr>
+        <p:spPr>
+          <a:xfrm>
+            <a:off x="640080" y="4832604"/>
+            <a:ext cx="475488" cy="274320"/>
+          </a:xfrm>
+          <a:prstGeom prst="rect">
+            <a:avLst/>
+          </a:prstGeom>
+          <a:noFill/>
+          <a:ln/>
+        </p:spPr>
+        <p:txBody>
+          <a:bodyPr wrap="square" lIns="0" tIns="0" rIns="0" bIns="0" rtlCol="0" anchor="ctr"/>
+          <a:lstStyle/>
+          <a:p>
+            <a:pPr algn="ctr" indent="0" marL="0">
+              <a:buNone/>
+            </a:pPr>
+            <a:r>
+              <a:rPr lang="en-US" sz="1100" b="1" dirty="0">
+                <a:solidFill>
+                  <a:srgbClr val="FFFFFF"/>
+                </a:solidFill>
+                <a:latin typeface="Courier New" pitchFamily="34" charset="0"/>
+                <a:ea typeface="Courier New" pitchFamily="34" charset="-122"/>
+                <a:cs typeface="Courier New" pitchFamily="34" charset="-120"/>
+              </a:rPr>
+              <a:t>T2</a:t>
+            </a:r>
+            <a:endParaRPr lang="en-US" sz="1100" dirty="0"/>
+          </a:p>
+        </p:txBody>
+      </p:sp>
+      <p:sp>
+        <p:nvSpPr>
+          <p:cNvPr id="58" name="Text 56"/>
+          <p:cNvSpPr txBox="1"/>
+          <p:nvPr/>
+        </p:nvSpPr>
+        <p:spPr>
+          <a:xfrm>
+            <a:off x="1600200" y="4777740"/>
+            <a:ext cx="1371600" cy="379476"/>
+          </a:xfrm>
+          <a:prstGeom prst="rect">
+            <a:avLst/>
+          </a:prstGeom>
+          <a:noFill/>
+          <a:ln/>
+        </p:spPr>
+        <p:txBody>
+          <a:bodyPr wrap="square" lIns="0" tIns="0" rIns="0" bIns="0" rtlCol="0" anchor="ctr"/>
+          <a:lstStyle/>
+          <a:p>
+            <a:pPr indent="0" marL="0">
+              <a:buNone/>
+            </a:pPr>
+            <a:r>
+              <a:rPr lang="en-US" sz="1200" dirty="0">
+                <a:solidFill>
+                  <a:srgbClr val="43524F"/>
+                </a:solidFill>
+                <a:latin typeface="Calibri" pitchFamily="34" charset="0"/>
+                <a:ea typeface="Calibri" pitchFamily="34" charset="-122"/>
+                <a:cs typeface="Calibri" pitchFamily="34" charset="-120"/>
+              </a:rPr>
+              <a:t>JW</a:t>
+            </a:r>
+            <a:endParaRPr lang="en-US" sz="1200" dirty="0"/>
+          </a:p>
+        </p:txBody>
+      </p:sp>
+      <p:sp>
+        <p:nvSpPr>
+          <p:cNvPr id="59" name="Text 57"/>
+          <p:cNvSpPr txBox="1"/>
+          <p:nvPr/>
+        </p:nvSpPr>
+        <p:spPr>
+          <a:xfrm>
+            <a:off x="3035808" y="4777740"/>
+            <a:ext cx="731520" cy="379476"/>
+          </a:xfrm>
+          <a:prstGeom prst="rect">
+            <a:avLst/>
+          </a:prstGeom>
+          <a:noFill/>
+          <a:ln/>
+        </p:spPr>
+        <p:txBody>
+          <a:bodyPr wrap="square" lIns="0" tIns="0" rIns="0" bIns="0" rtlCol="0" anchor="ctr"/>
+          <a:lstStyle/>
+          <a:p>
+            <a:pPr algn="r" indent="0" marL="0">
+              <a:buNone/>
+            </a:pPr>
+            <a:r>
+              <a:rPr lang="en-US" sz="1200" b="1" dirty="0">
+                <a:solidFill>
+                  <a:srgbClr val="AD2340"/>
+                </a:solidFill>
+                <a:latin typeface="Courier New" pitchFamily="34" charset="0"/>
+                <a:ea typeface="Courier New" pitchFamily="34" charset="-122"/>
+                <a:cs typeface="Courier New" pitchFamily="34" charset="-120"/>
+              </a:rPr>
+              <a:t>25%</a:t>
+            </a:r>
+            <a:endParaRPr lang="en-US" sz="1200" dirty="0"/>
+          </a:p>
+        </p:txBody>
+      </p:sp>
+      <p:sp>
+        <p:nvSpPr>
+          <p:cNvPr id="60" name="Text 58"/>
+          <p:cNvSpPr txBox="1"/>
+          <p:nvPr/>
+        </p:nvSpPr>
+        <p:spPr>
+          <a:xfrm>
+            <a:off x="3840480" y="4777740"/>
+            <a:ext cx="1691640" cy="379476"/>
+          </a:xfrm>
+          <a:prstGeom prst="rect">
+            <a:avLst/>
+          </a:prstGeom>
+          <a:noFill/>
+          <a:ln/>
+        </p:spPr>
+        <p:txBody>
+          <a:bodyPr wrap="square" lIns="0" tIns="0" rIns="0" bIns="0" rtlCol="0" anchor="ctr"/>
+          <a:lstStyle/>
+          <a:p>
+            <a:pPr algn="r" indent="0" marL="0">
+              <a:buNone/>
+            </a:pPr>
+            <a:r>
+              <a:rPr lang="en-US" sz="1250" b="1" dirty="0">
+                <a:solidFill>
+                  <a:srgbClr val="B58A00"/>
+                </a:solidFill>
+                <a:latin typeface="Courier New" pitchFamily="34" charset="0"/>
+                <a:ea typeface="Courier New" pitchFamily="34" charset="-122"/>
+                <a:cs typeface="Courier New" pitchFamily="34" charset="-120"/>
+              </a:rPr>
+              <a:t>£21,408</a:t>
+            </a:r>
+            <a:endParaRPr lang="en-US" sz="1250" dirty="0"/>
+          </a:p>
+        </p:txBody>
+      </p:sp>
+      <p:sp>
+        <p:nvSpPr>
+          <p:cNvPr id="61" name="Text 59"/>
+          <p:cNvSpPr txBox="1"/>
+          <p:nvPr/>
+        </p:nvSpPr>
+        <p:spPr>
+          <a:xfrm>
+            <a:off x="5779008" y="4777740"/>
+            <a:ext cx="5852160" cy="379476"/>
+          </a:xfrm>
+          <a:prstGeom prst="rect">
+            <a:avLst/>
+          </a:prstGeom>
+          <a:noFill/>
+          <a:ln/>
+        </p:spPr>
+        <p:txBody>
+          <a:bodyPr wrap="square" lIns="0" tIns="0" rIns="0" bIns="0" rtlCol="0" anchor="ctr"/>
+          <a:lstStyle/>
+          <a:p>
+            <a:pPr indent="0" marL="0">
+              <a:buNone/>
+            </a:pPr>
+            <a:r>
+              <a:rPr lang="en-US" sz="1150" dirty="0">
+                <a:solidFill>
+                  <a:srgbClr val="43524F"/>
+                </a:solidFill>
+                <a:latin typeface="Calibri" pitchFamily="34" charset="0"/>
+                <a:ea typeface="Calibri" pitchFamily="34" charset="-122"/>
+                <a:cs typeface="Calibri" pitchFamily="34" charset="-120"/>
+              </a:rPr>
+              <a:t>25% for the year — our biggest concern. Full pipeline review this week</a:t>
+            </a:r>
+            <a:endParaRPr lang="en-US" sz="1150" dirty="0"/>
+          </a:p>
+        </p:txBody>
+      </p:sp>
+      <p:sp>
+        <p:nvSpPr>
+          <p:cNvPr id="62" name="Shape 60"/>
+          <p:cNvSpPr/>
+          <p:nvPr/>
+        </p:nvSpPr>
+        <p:spPr>
+          <a:xfrm>
+            <a:off x="548640" y="5157216"/>
+            <a:ext cx="11091672" cy="379476"/>
+          </a:xfrm>
+          <a:prstGeom prst="rect">
+            <a:avLst/>
+          </a:prstGeom>
+          <a:solidFill>
+            <a:srgbClr val="EEF1F0"/>
+          </a:solidFill>
+          <a:ln w="12700">
+            <a:solidFill>
+              <a:srgbClr val="EEF1F0"/>
+            </a:solidFill>
+            <a:prstDash val="solid"/>
+          </a:ln>
+        </p:spPr>
+      </p:sp>
+      <p:sp>
+        <p:nvSpPr>
+          <p:cNvPr id="63" name="Shape 61"/>
+          <p:cNvSpPr/>
+          <p:nvPr/>
+        </p:nvSpPr>
+        <p:spPr>
+          <a:xfrm>
+            <a:off x="640080" y="5212080"/>
+            <a:ext cx="475488" cy="274320"/>
+          </a:xfrm>
+          <a:prstGeom prst="roundRect">
+            <a:avLst>
+              <a:gd name="adj" fmla="val 13333"/>
+            </a:avLst>
+          </a:prstGeom>
+          <a:solidFill>
+            <a:srgbClr val="07717A"/>
+          </a:solidFill>
+          <a:ln w="12700">
+            <a:solidFill>
+              <a:srgbClr val="07717A"/>
+            </a:solidFill>
+            <a:prstDash val="solid"/>
+          </a:ln>
+        </p:spPr>
+      </p:sp>
+      <p:sp>
+        <p:nvSpPr>
+          <p:cNvPr id="64" name="Text 62"/>
+          <p:cNvSpPr txBox="1"/>
+          <p:nvPr/>
+        </p:nvSpPr>
+        <p:spPr>
+          <a:xfrm>
+            <a:off x="640080" y="5212080"/>
+            <a:ext cx="475488" cy="274320"/>
+          </a:xfrm>
+          <a:prstGeom prst="rect">
+            <a:avLst/>
+          </a:prstGeom>
+          <a:noFill/>
+          <a:ln/>
+        </p:spPr>
+        <p:txBody>
+          <a:bodyPr wrap="square" lIns="0" tIns="0" rIns="0" bIns="0" rtlCol="0" anchor="ctr"/>
+          <a:lstStyle/>
+          <a:p>
+            <a:pPr algn="ctr" indent="0" marL="0">
+              <a:buNone/>
+            </a:pPr>
+            <a:r>
+              <a:rPr lang="en-US" sz="1100" b="1" dirty="0">
+                <a:solidFill>
+                  <a:srgbClr val="FFFFFF"/>
+                </a:solidFill>
+                <a:latin typeface="Courier New" pitchFamily="34" charset="0"/>
+                <a:ea typeface="Courier New" pitchFamily="34" charset="-122"/>
+                <a:cs typeface="Courier New" pitchFamily="34" charset="-120"/>
+              </a:rPr>
+              <a:t>T4</a:t>
+            </a:r>
+            <a:endParaRPr lang="en-US" sz="1100" dirty="0"/>
+          </a:p>
+        </p:txBody>
+      </p:sp>
+      <p:sp>
+        <p:nvSpPr>
+          <p:cNvPr id="65" name="Text 63"/>
+          <p:cNvSpPr txBox="1"/>
+          <p:nvPr/>
+        </p:nvSpPr>
+        <p:spPr>
+          <a:xfrm>
+            <a:off x="1600200" y="5157216"/>
+            <a:ext cx="1371600" cy="379476"/>
+          </a:xfrm>
+          <a:prstGeom prst="rect">
+            <a:avLst/>
+          </a:prstGeom>
+          <a:noFill/>
+          <a:ln/>
+        </p:spPr>
+        <p:txBody>
+          <a:bodyPr wrap="square" lIns="0" tIns="0" rIns="0" bIns="0" rtlCol="0" anchor="ctr"/>
+          <a:lstStyle/>
+          <a:p>
+            <a:pPr indent="0" marL="0">
+              <a:buNone/>
+            </a:pPr>
+            <a:r>
+              <a:rPr lang="en-US" sz="1200" dirty="0">
+                <a:solidFill>
+                  <a:srgbClr val="43524F"/>
+                </a:solidFill>
+                <a:latin typeface="Calibri" pitchFamily="34" charset="0"/>
+                <a:ea typeface="Calibri" pitchFamily="34" charset="-122"/>
+                <a:cs typeface="Calibri" pitchFamily="34" charset="-120"/>
+              </a:rPr>
+              <a:t>unallocated</a:t>
+            </a:r>
+            <a:endParaRPr lang="en-US" sz="1200" dirty="0"/>
+          </a:p>
+        </p:txBody>
+      </p:sp>
+      <p:sp>
+        <p:nvSpPr>
+          <p:cNvPr id="66" name="Text 64"/>
+          <p:cNvSpPr txBox="1"/>
+          <p:nvPr/>
+        </p:nvSpPr>
+        <p:spPr>
+          <a:xfrm>
+            <a:off x="3035808" y="5157216"/>
+            <a:ext cx="731520" cy="379476"/>
+          </a:xfrm>
+          <a:prstGeom prst="rect">
+            <a:avLst/>
+          </a:prstGeom>
+          <a:noFill/>
+          <a:ln/>
+        </p:spPr>
+        <p:txBody>
+          <a:bodyPr wrap="square" lIns="0" tIns="0" rIns="0" bIns="0" rtlCol="0" anchor="ctr"/>
+          <a:lstStyle/>
+          <a:p>
+            <a:pPr algn="r" indent="0" marL="0">
+              <a:buNone/>
+            </a:pPr>
+            <a:r>
+              <a:rPr lang="en-US" sz="1200" b="1" dirty="0">
+                <a:solidFill>
+                  <a:srgbClr val="AD2340"/>
+                </a:solidFill>
+                <a:latin typeface="Courier New" pitchFamily="34" charset="0"/>
+                <a:ea typeface="Courier New" pitchFamily="34" charset="-122"/>
+                <a:cs typeface="Courier New" pitchFamily="34" charset="-120"/>
+              </a:rPr>
+              <a:t>39%</a:t>
+            </a:r>
+            <a:endParaRPr lang="en-US" sz="1200" dirty="0"/>
+          </a:p>
+        </p:txBody>
+      </p:sp>
+      <p:sp>
+        <p:nvSpPr>
+          <p:cNvPr id="67" name="Text 65"/>
+          <p:cNvSpPr txBox="1"/>
+          <p:nvPr/>
+        </p:nvSpPr>
+        <p:spPr>
+          <a:xfrm>
+            <a:off x="3840480" y="5157216"/>
+            <a:ext cx="1691640" cy="379476"/>
+          </a:xfrm>
+          <a:prstGeom prst="rect">
+            <a:avLst/>
+          </a:prstGeom>
+          <a:noFill/>
+          <a:ln/>
+        </p:spPr>
+        <p:txBody>
+          <a:bodyPr wrap="square" lIns="0" tIns="0" rIns="0" bIns="0" rtlCol="0" anchor="ctr"/>
+          <a:lstStyle/>
+          <a:p>
+            <a:pPr algn="r" indent="0" marL="0">
+              <a:buNone/>
+            </a:pPr>
+            <a:r>
+              <a:rPr lang="en-US" sz="1250" b="1" dirty="0">
+                <a:solidFill>
+                  <a:srgbClr val="B58A00"/>
+                </a:solidFill>
+                <a:latin typeface="Courier New" pitchFamily="34" charset="0"/>
+                <a:ea typeface="Courier New" pitchFamily="34" charset="-122"/>
+                <a:cs typeface="Courier New" pitchFamily="34" charset="-120"/>
+              </a:rPr>
+              <a:t>£18,529</a:t>
+            </a:r>
+            <a:endParaRPr lang="en-US" sz="1250" dirty="0"/>
+          </a:p>
+        </p:txBody>
+      </p:sp>
+      <p:sp>
+        <p:nvSpPr>
+          <p:cNvPr id="68" name="Text 66"/>
+          <p:cNvSpPr txBox="1"/>
+          <p:nvPr/>
+        </p:nvSpPr>
+        <p:spPr>
+          <a:xfrm>
+            <a:off x="5779008" y="5157216"/>
+            <a:ext cx="5852160" cy="379476"/>
+          </a:xfrm>
+          <a:prstGeom prst="rect">
+            <a:avLst/>
+          </a:prstGeom>
+          <a:noFill/>
+          <a:ln/>
+        </p:spPr>
+        <p:txBody>
+          <a:bodyPr wrap="square" lIns="0" tIns="0" rIns="0" bIns="0" rtlCol="0" anchor="ctr"/>
+          <a:lstStyle/>
+          <a:p>
+            <a:pPr indent="0" marL="0">
+              <a:buNone/>
+            </a:pPr>
+            <a:r>
+              <a:rPr lang="en-US" sz="1150" dirty="0">
+                <a:solidFill>
+                  <a:srgbClr val="43524F"/>
+                </a:solidFill>
+                <a:latin typeface="Calibri" pitchFamily="34" charset="0"/>
+                <a:ea typeface="Calibri" pitchFamily="34" charset="-122"/>
+                <a:cs typeface="Calibri" pitchFamily="34" charset="-120"/>
+              </a:rPr>
+              <a:t>No lead on the board. Ownership to be resolved before Q4 starts</a:t>
+            </a:r>
+            <a:endParaRPr lang="en-US" sz="1150" dirty="0"/>
+          </a:p>
+        </p:txBody>
+      </p:sp>
+      <p:sp>
+        <p:nvSpPr>
+          <p:cNvPr id="69" name="Shape 67"/>
+          <p:cNvSpPr/>
+          <p:nvPr/>
+        </p:nvSpPr>
+        <p:spPr>
+          <a:xfrm>
+            <a:off x="640080" y="5591556"/>
+            <a:ext cx="475488" cy="274320"/>
+          </a:xfrm>
+          <a:prstGeom prst="roundRect">
+            <a:avLst>
+              <a:gd name="adj" fmla="val 13333"/>
+            </a:avLst>
+          </a:prstGeom>
+          <a:solidFill>
+            <a:srgbClr val="07717A"/>
+          </a:solidFill>
+          <a:ln w="12700">
+            <a:solidFill>
+              <a:srgbClr val="07717A"/>
+            </a:solidFill>
+            <a:prstDash val="solid"/>
+          </a:ln>
+        </p:spPr>
+      </p:sp>
+      <p:sp>
+        <p:nvSpPr>
+          <p:cNvPr id="70" name="Text 68"/>
+          <p:cNvSpPr txBox="1"/>
+          <p:nvPr/>
+        </p:nvSpPr>
+        <p:spPr>
+          <a:xfrm>
+            <a:off x="640080" y="5591556"/>
+            <a:ext cx="475488" cy="274320"/>
+          </a:xfrm>
+          <a:prstGeom prst="rect">
+            <a:avLst/>
+          </a:prstGeom>
+          <a:noFill/>
+          <a:ln/>
+        </p:spPr>
+        <p:txBody>
+          <a:bodyPr wrap="square" lIns="0" tIns="0" rIns="0" bIns="0" rtlCol="0" anchor="ctr"/>
+          <a:lstStyle/>
+          <a:p>
+            <a:pPr algn="ctr" indent="0" marL="0">
+              <a:buNone/>
+            </a:pPr>
+            <a:r>
+              <a:rPr lang="en-US" sz="1100" b="1" dirty="0">
+                <a:solidFill>
+                  <a:srgbClr val="FFFFFF"/>
+                </a:solidFill>
+                <a:latin typeface="Courier New" pitchFamily="34" charset="0"/>
+                <a:ea typeface="Courier New" pitchFamily="34" charset="-122"/>
+                <a:cs typeface="Courier New" pitchFamily="34" charset="-120"/>
+              </a:rPr>
+              <a:t>T7</a:t>
+            </a:r>
+            <a:endParaRPr lang="en-US" sz="1100" dirty="0"/>
+          </a:p>
+        </p:txBody>
+      </p:sp>
+      <p:sp>
+        <p:nvSpPr>
+          <p:cNvPr id="71" name="Text 69"/>
+          <p:cNvSpPr txBox="1"/>
+          <p:nvPr/>
+        </p:nvSpPr>
+        <p:spPr>
+          <a:xfrm>
+            <a:off x="1600200" y="5536692"/>
+            <a:ext cx="1371600" cy="379476"/>
+          </a:xfrm>
+          <a:prstGeom prst="rect">
+            <a:avLst/>
+          </a:prstGeom>
+          <a:noFill/>
+          <a:ln/>
+        </p:spPr>
+        <p:txBody>
+          <a:bodyPr wrap="square" lIns="0" tIns="0" rIns="0" bIns="0" rtlCol="0" anchor="ctr"/>
+          <a:lstStyle/>
+          <a:p>
+            <a:pPr indent="0" marL="0">
+              <a:buNone/>
+            </a:pPr>
+            <a:r>
+              <a:rPr lang="en-US" sz="1200" dirty="0">
+                <a:solidFill>
+                  <a:srgbClr val="43524F"/>
+                </a:solidFill>
+                <a:latin typeface="Calibri" pitchFamily="34" charset="0"/>
+                <a:ea typeface="Calibri" pitchFamily="34" charset="-122"/>
+                <a:cs typeface="Calibri" pitchFamily="34" charset="-120"/>
+              </a:rPr>
+              <a:t>JM</a:t>
+            </a:r>
+            <a:endParaRPr lang="en-US" sz="1200" dirty="0"/>
+          </a:p>
+        </p:txBody>
+      </p:sp>
+      <p:sp>
+        <p:nvSpPr>
+          <p:cNvPr id="72" name="Text 70"/>
+          <p:cNvSpPr txBox="1"/>
+          <p:nvPr/>
+        </p:nvSpPr>
+        <p:spPr>
+          <a:xfrm>
+            <a:off x="3035808" y="5536692"/>
+            <a:ext cx="731520" cy="379476"/>
+          </a:xfrm>
+          <a:prstGeom prst="rect">
+            <a:avLst/>
+          </a:prstGeom>
+          <a:noFill/>
+          <a:ln/>
+        </p:spPr>
+        <p:txBody>
+          <a:bodyPr wrap="square" lIns="0" tIns="0" rIns="0" bIns="0" rtlCol="0" anchor="ctr"/>
+          <a:lstStyle/>
+          <a:p>
+            <a:pPr algn="r" indent="0" marL="0">
+              <a:buNone/>
+            </a:pPr>
+            <a:r>
+              <a:rPr lang="en-US" sz="1200" b="1" dirty="0">
+                <a:solidFill>
+                  <a:srgbClr val="AD2340"/>
+                </a:solidFill>
+                <a:latin typeface="Courier New" pitchFamily="34" charset="0"/>
+                <a:ea typeface="Courier New" pitchFamily="34" charset="-122"/>
+                <a:cs typeface="Courier New" pitchFamily="34" charset="-120"/>
+              </a:rPr>
+              <a:t>58%</a:t>
+            </a:r>
+            <a:endParaRPr lang="en-US" sz="1200" dirty="0"/>
+          </a:p>
+        </p:txBody>
+      </p:sp>
+      <p:sp>
+        <p:nvSpPr>
+          <p:cNvPr id="73" name="Text 71"/>
+          <p:cNvSpPr txBox="1"/>
+          <p:nvPr/>
+        </p:nvSpPr>
+        <p:spPr>
+          <a:xfrm>
+            <a:off x="3840480" y="5536692"/>
+            <a:ext cx="1691640" cy="379476"/>
+          </a:xfrm>
+          <a:prstGeom prst="rect">
+            <a:avLst/>
+          </a:prstGeom>
+          <a:noFill/>
+          <a:ln/>
+        </p:spPr>
+        <p:txBody>
+          <a:bodyPr wrap="square" lIns="0" tIns="0" rIns="0" bIns="0" rtlCol="0" anchor="ctr"/>
+          <a:lstStyle/>
+          <a:p>
+            <a:pPr algn="r" indent="0" marL="0">
+              <a:buNone/>
+            </a:pPr>
+            <a:r>
+              <a:rPr lang="en-US" sz="1250" b="1" dirty="0">
+                <a:solidFill>
+                  <a:srgbClr val="B58A00"/>
+                </a:solidFill>
+                <a:latin typeface="Courier New" pitchFamily="34" charset="0"/>
+                <a:ea typeface="Courier New" pitchFamily="34" charset="-122"/>
+                <a:cs typeface="Courier New" pitchFamily="34" charset="-120"/>
+              </a:rPr>
+              <a:t>£6,463</a:t>
+            </a:r>
+            <a:endParaRPr lang="en-US" sz="1250" dirty="0"/>
+          </a:p>
+        </p:txBody>
+      </p:sp>
+      <p:sp>
+        <p:nvSpPr>
+          <p:cNvPr id="74" name="Text 72"/>
+          <p:cNvSpPr txBox="1"/>
+          <p:nvPr/>
+        </p:nvSpPr>
+        <p:spPr>
+          <a:xfrm>
+            <a:off x="5779008" y="5536692"/>
+            <a:ext cx="5852160" cy="379476"/>
+          </a:xfrm>
+          <a:prstGeom prst="rect">
+            <a:avLst/>
+          </a:prstGeom>
+          <a:noFill/>
+          <a:ln/>
+        </p:spPr>
+        <p:txBody>
+          <a:bodyPr wrap="square" lIns="0" tIns="0" rIns="0" bIns="0" rtlCol="0" anchor="ctr"/>
+          <a:lstStyle/>
+          <a:p>
+            <a:pPr indent="0" marL="0">
+              <a:buNone/>
+            </a:pPr>
+            <a:r>
+              <a:rPr lang="en-US" sz="1150" dirty="0">
+                <a:solidFill>
+                  <a:srgbClr val="43524F"/>
+                </a:solidFill>
+                <a:latin typeface="Calibri" pitchFamily="34" charset="0"/>
+                <a:ea typeface="Calibri" pitchFamily="34" charset="-122"/>
+                <a:cs typeface="Calibri" pitchFamily="34" charset="-120"/>
+              </a:rPr>
+              <a:t>Smallest line. Confirm what is booked for the rest of the year</a:t>
+            </a:r>
+            <a:endParaRPr lang="en-US" sz="1150" dirty="0"/>
+          </a:p>
+        </p:txBody>
+      </p:sp>
+      <p:sp>
+        <p:nvSpPr>
+          <p:cNvPr id="75" name="Text 73"/>
+          <p:cNvSpPr txBox="1"/>
+          <p:nvPr/>
+        </p:nvSpPr>
+        <p:spPr>
+          <a:xfrm>
+            <a:off x="548640" y="6053328"/>
+            <a:ext cx="11091672" cy="320040"/>
+          </a:xfrm>
+          <a:prstGeom prst="rect">
+            <a:avLst/>
+          </a:prstGeom>
+          <a:noFill/>
+          <a:ln/>
+        </p:spPr>
+        <p:txBody>
+          <a:bodyPr wrap="square" lIns="0" tIns="0" rIns="0" bIns="0" rtlCol="0" anchor="ctr"/>
+          <a:lstStyle/>
+          <a:p>
+            <a:pPr indent="0" marL="0">
+              <a:buNone/>
+            </a:pPr>
+            <a:r>
+              <a:rPr lang="en-US" sz="1100" i="1" dirty="0">
+                <a:solidFill>
+                  <a:srgbClr val="6B7A77"/>
+                </a:solidFill>
+                <a:latin typeface="Calibri" pitchFamily="34" charset="0"/>
+                <a:ea typeface="Calibri" pitchFamily="34" charset="-122"/>
+                <a:cs typeface="Calibri" pitchFamily="34" charset="-120"/>
+              </a:rPr>
+              <a:t>The ten monthly figures add to £820,902 — the practice number. YTD % is invoiced fees against each team’s own year-to-date target.</a:t>
             </a:r>
             <a:endParaRPr lang="en-US" sz="1100" dirty="0"/>
           </a:p>
@@ -8298,7 +10743,7 @@
                 <a:ea typeface="Courier New" pitchFamily="34" charset="-122"/>
                 <a:cs typeface="Courier New" pitchFamily="34" charset="-120"/>
               </a:rPr>
-              <a:t>THE STRETCH</a:t>
+              <a:t>IF WE BEAT IT</a:t>
             </a:r>
             <a:endParaRPr lang="en-US" sz="1100" dirty="0"/>
           </a:p>
@@ -8337,7 +10782,7 @@
                 <a:ea typeface="Cambria" pitchFamily="34" charset="-122"/>
                 <a:cs typeface="Cambria" pitchFamily="34" charset="-120"/>
               </a:rPr>
-              <a:t>What ten million actually takes</a:t>
+              <a:t>£5,000 each for every £200,000 over £9m</a:t>
             </a:r>
             <a:endParaRPr lang="en-US" sz="3200" dirty="0"/>
           </a:p>
@@ -8376,7 +10821,7 @@
                 <a:ea typeface="Calibri" pitchFamily="34" charset="-122"/>
                 <a:cs typeface="Calibri" pitchFamily="34" charset="-120"/>
               </a:rPr>
-              <a:t>It is one million pounds above the goal. Here is the size of it, honestly, so we go after it with our eyes open.</a:t>
+              <a:t>For Emily, Stuart, Cassie and Megan. Nine million is the goal — everything above it is shared, and it steps up every two hundred thousand.</a:t>
             </a:r>
             <a:endParaRPr lang="en-US" sz="1500" dirty="0"/>
           </a:p>
@@ -8391,7 +10836,7 @@
         <p:spPr>
           <a:xfrm>
             <a:off x="548640" y="2331720"/>
-            <a:ext cx="3566160" cy="1920240"/>
+            <a:ext cx="2103120" cy="2240280"/>
           </a:xfrm>
           <a:prstGeom prst="rect">
             <a:avLst/>
@@ -8415,24 +10860,24 @@
         </p:nvSpPr>
         <p:spPr>
           <a:xfrm>
-            <a:off x="804672" y="2532888"/>
-            <a:ext cx="3108960" cy="228600"/>
-          </a:xfrm>
-          <a:prstGeom prst="rect">
-            <a:avLst/>
-          </a:prstGeom>
-          <a:noFill/>
-          <a:ln/>
-        </p:spPr>
-        <p:txBody>
-          <a:bodyPr wrap="square" lIns="0" tIns="0" rIns="0" bIns="0" rtlCol="0" anchor="ctr"/>
-          <a:lstStyle/>
-          <a:p>
-            <a:pPr indent="0" marL="0">
-              <a:buNone/>
-            </a:pPr>
-            <a:r>
-              <a:rPr lang="en-US" sz="1050" b="1" spc="150" kern="0" dirty="0">
+            <a:off x="685800" y="2505456"/>
+            <a:ext cx="1828800" cy="310896"/>
+          </a:xfrm>
+          <a:prstGeom prst="rect">
+            <a:avLst/>
+          </a:prstGeom>
+          <a:noFill/>
+          <a:ln/>
+        </p:spPr>
+        <p:txBody>
+          <a:bodyPr wrap="square" lIns="0" tIns="0" rIns="0" bIns="0" rtlCol="0" anchor="ctr"/>
+          <a:lstStyle/>
+          <a:p>
+            <a:pPr algn="ctr" indent="0" marL="0">
+              <a:buNone/>
+            </a:pPr>
+            <a:r>
+              <a:rPr lang="en-US" sz="1400" b="1" dirty="0">
                 <a:solidFill>
                   <a:srgbClr val="8FA3A0"/>
                 </a:solidFill>
@@ -8440,9 +10885,9 @@
                 <a:ea typeface="Courier New" pitchFamily="34" charset="-122"/>
                 <a:cs typeface="Courier New" pitchFamily="34" charset="-120"/>
               </a:rPr>
-              <a:t>PER MONTH FOR £9M</a:t>
-            </a:r>
-            <a:endParaRPr lang="en-US" sz="1050" dirty="0"/>
+              <a:t>£9.2m</a:t>
+            </a:r>
+            <a:endParaRPr lang="en-US" sz="1400" dirty="0"/>
           </a:p>
         </p:txBody>
       </p:sp>
@@ -8454,24 +10899,24 @@
         </p:nvSpPr>
         <p:spPr>
           <a:xfrm>
-            <a:off x="804672" y="2807208"/>
-            <a:ext cx="3154680" cy="603504"/>
-          </a:xfrm>
-          <a:prstGeom prst="rect">
-            <a:avLst/>
-          </a:prstGeom>
-          <a:noFill/>
-          <a:ln/>
-        </p:spPr>
-        <p:txBody>
-          <a:bodyPr wrap="square" lIns="0" tIns="0" rIns="0" bIns="0" rtlCol="0" anchor="ctr"/>
-          <a:lstStyle/>
-          <a:p>
-            <a:pPr indent="0" marL="0">
-              <a:buNone/>
-            </a:pPr>
-            <a:r>
-              <a:rPr lang="en-US" sz="3000" b="1" dirty="0">
+            <a:off x="658368" y="2907792"/>
+            <a:ext cx="1883664" cy="658368"/>
+          </a:xfrm>
+          <a:prstGeom prst="rect">
+            <a:avLst/>
+          </a:prstGeom>
+          <a:noFill/>
+          <a:ln/>
+        </p:spPr>
+        <p:txBody>
+          <a:bodyPr wrap="square" lIns="0" tIns="0" rIns="0" bIns="0" rtlCol="0" anchor="ctr"/>
+          <a:lstStyle/>
+          <a:p>
+            <a:pPr algn="ctr" indent="0" marL="0">
+              <a:buNone/>
+            </a:pPr>
+            <a:r>
+              <a:rPr lang="en-US" sz="2700" b="1" dirty="0">
                 <a:solidFill>
                   <a:srgbClr val="E7EEEC"/>
                 </a:solidFill>
@@ -8479,9 +10924,9 @@
                 <a:ea typeface="Cambria" pitchFamily="34" charset="-122"/>
                 <a:cs typeface="Cambria" pitchFamily="34" charset="-120"/>
               </a:rPr>
-              <a:t>£820,902</a:t>
-            </a:r>
-            <a:endParaRPr lang="en-US" sz="3000" dirty="0"/>
+              <a:t>£5,000</a:t>
+            </a:r>
+            <a:endParaRPr lang="en-US" sz="2700" dirty="0"/>
           </a:p>
         </p:txBody>
       </p:sp>
@@ -8493,20 +10938,20 @@
         </p:nvSpPr>
         <p:spPr>
           <a:xfrm>
-            <a:off x="804672" y="3429000"/>
-            <a:ext cx="3108960" cy="658368"/>
-          </a:xfrm>
-          <a:prstGeom prst="rect">
-            <a:avLst/>
-          </a:prstGeom>
-          <a:noFill/>
-          <a:ln/>
-        </p:spPr>
-        <p:txBody>
-          <a:bodyPr wrap="square" lIns="0" tIns="0" rIns="0" bIns="0" rtlCol="0" anchor="ctr"/>
-          <a:lstStyle/>
-          <a:p>
-            <a:pPr indent="0" marL="0">
+            <a:off x="685800" y="3584448"/>
+            <a:ext cx="1828800" cy="256032"/>
+          </a:xfrm>
+          <a:prstGeom prst="rect">
+            <a:avLst/>
+          </a:prstGeom>
+          <a:noFill/>
+          <a:ln/>
+        </p:spPr>
+        <p:txBody>
+          <a:bodyPr wrap="square" lIns="0" tIns="0" rIns="0" bIns="0" rtlCol="0" anchor="ctr"/>
+          <a:lstStyle/>
+          <a:p>
+            <a:pPr algn="ctr" indent="0" marL="0">
               <a:buNone/>
             </a:pPr>
             <a:r>
@@ -8518,7 +10963,7 @@
                 <a:ea typeface="Calibri" pitchFamily="34" charset="-122"/>
                 <a:cs typeface="Calibri" pitchFamily="34" charset="-120"/>
               </a:rPr>
-              <a:t>a 16% uplift on our year average</a:t>
+              <a:t>each</a:t>
             </a:r>
             <a:endParaRPr lang="en-US" sz="1200" dirty="0"/>
           </a:p>
@@ -8526,14 +10971,53 @@
       </p:sp>
       <p:sp>
         <p:nvSpPr>
-          <p:cNvPr id="9" name="Shape 7"/>
+          <p:cNvPr id="9" name="Text 7"/>
+          <p:cNvSpPr txBox="1"/>
+          <p:nvPr/>
+        </p:nvSpPr>
+        <p:spPr>
+          <a:xfrm>
+            <a:off x="658368" y="3968496"/>
+            <a:ext cx="1883664" cy="274320"/>
+          </a:xfrm>
+          <a:prstGeom prst="rect">
+            <a:avLst/>
+          </a:prstGeom>
+          <a:noFill/>
+          <a:ln/>
+        </p:spPr>
+        <p:txBody>
+          <a:bodyPr wrap="square" lIns="0" tIns="0" rIns="0" bIns="0" rtlCol="0" anchor="ctr"/>
+          <a:lstStyle/>
+          <a:p>
+            <a:pPr algn="ctr" indent="0" marL="0">
+              <a:buNone/>
+            </a:pPr>
+            <a:r>
+              <a:rPr lang="en-US" sz="1100" b="1" dirty="0">
+                <a:solidFill>
+                  <a:srgbClr val="0E8A94"/>
+                </a:solidFill>
+                <a:latin typeface="Courier New" pitchFamily="34" charset="0"/>
+                <a:ea typeface="Courier New" pitchFamily="34" charset="-122"/>
+                <a:cs typeface="Courier New" pitchFamily="34" charset="-120"/>
+              </a:rPr>
+              <a:t>£20,000 in total</a:t>
+            </a:r>
+            <a:endParaRPr lang="en-US" sz="1100" dirty="0"/>
+          </a:p>
+        </p:txBody>
+      </p:sp>
+      <p:sp>
+        <p:nvSpPr>
+          <p:cNvPr id="10" name="Shape 8"/>
           <p:cNvSpPr/>
           <p:nvPr/>
         </p:nvSpPr>
         <p:spPr>
           <a:xfrm>
-            <a:off x="4315968" y="2331720"/>
-            <a:ext cx="3566160" cy="1920240"/>
+            <a:off x="2807208" y="2331720"/>
+            <a:ext cx="2103120" cy="2240280"/>
           </a:xfrm>
           <a:prstGeom prst="rect">
             <a:avLst/>
@@ -8551,30 +11035,30 @@
       </p:sp>
       <p:sp>
         <p:nvSpPr>
-          <p:cNvPr id="10" name="Text 8"/>
-          <p:cNvSpPr txBox="1"/>
-          <p:nvPr/>
-        </p:nvSpPr>
-        <p:spPr>
-          <a:xfrm>
-            <a:off x="4572000" y="2532888"/>
-            <a:ext cx="3108960" cy="228600"/>
-          </a:xfrm>
-          <a:prstGeom prst="rect">
-            <a:avLst/>
-          </a:prstGeom>
-          <a:noFill/>
-          <a:ln/>
-        </p:spPr>
-        <p:txBody>
-          <a:bodyPr wrap="square" lIns="0" tIns="0" rIns="0" bIns="0" rtlCol="0" anchor="ctr"/>
-          <a:lstStyle/>
-          <a:p>
-            <a:pPr indent="0" marL="0">
-              <a:buNone/>
-            </a:pPr>
-            <a:r>
-              <a:rPr lang="en-US" sz="1050" b="1" spc="150" kern="0" dirty="0">
+          <p:cNvPr id="11" name="Text 9"/>
+          <p:cNvSpPr txBox="1"/>
+          <p:nvPr/>
+        </p:nvSpPr>
+        <p:spPr>
+          <a:xfrm>
+            <a:off x="2944368" y="2505456"/>
+            <a:ext cx="1828800" cy="310896"/>
+          </a:xfrm>
+          <a:prstGeom prst="rect">
+            <a:avLst/>
+          </a:prstGeom>
+          <a:noFill/>
+          <a:ln/>
+        </p:spPr>
+        <p:txBody>
+          <a:bodyPr wrap="square" lIns="0" tIns="0" rIns="0" bIns="0" rtlCol="0" anchor="ctr"/>
+          <a:lstStyle/>
+          <a:p>
+            <a:pPr algn="ctr" indent="0" marL="0">
+              <a:buNone/>
+            </a:pPr>
+            <a:r>
+              <a:rPr lang="en-US" sz="1400" b="1" dirty="0">
                 <a:solidFill>
                   <a:srgbClr val="8FA3A0"/>
                 </a:solidFill>
@@ -8582,73 +11066,73 @@
                 <a:ea typeface="Courier New" pitchFamily="34" charset="-122"/>
                 <a:cs typeface="Courier New" pitchFamily="34" charset="-120"/>
               </a:rPr>
-              <a:t>PER MONTH FOR £10M</a:t>
-            </a:r>
-            <a:endParaRPr lang="en-US" sz="1050" dirty="0"/>
-          </a:p>
-        </p:txBody>
-      </p:sp>
-      <p:sp>
-        <p:nvSpPr>
-          <p:cNvPr id="11" name="Text 9"/>
-          <p:cNvSpPr txBox="1"/>
-          <p:nvPr/>
-        </p:nvSpPr>
-        <p:spPr>
-          <a:xfrm>
-            <a:off x="4572000" y="2807208"/>
-            <a:ext cx="3154680" cy="603504"/>
-          </a:xfrm>
-          <a:prstGeom prst="rect">
-            <a:avLst/>
-          </a:prstGeom>
-          <a:noFill/>
-          <a:ln/>
-        </p:spPr>
-        <p:txBody>
-          <a:bodyPr wrap="square" lIns="0" tIns="0" rIns="0" bIns="0" rtlCol="0" anchor="ctr"/>
-          <a:lstStyle/>
-          <a:p>
-            <a:pPr indent="0" marL="0">
-              <a:buNone/>
-            </a:pPr>
-            <a:r>
-              <a:rPr lang="en-US" sz="3000" b="1" dirty="0">
-                <a:solidFill>
-                  <a:srgbClr val="D2A017"/>
+              <a:t>£9.4m</a:t>
+            </a:r>
+            <a:endParaRPr lang="en-US" sz="1400" dirty="0"/>
+          </a:p>
+        </p:txBody>
+      </p:sp>
+      <p:sp>
+        <p:nvSpPr>
+          <p:cNvPr id="12" name="Text 10"/>
+          <p:cNvSpPr txBox="1"/>
+          <p:nvPr/>
+        </p:nvSpPr>
+        <p:spPr>
+          <a:xfrm>
+            <a:off x="2916936" y="2907792"/>
+            <a:ext cx="1883664" cy="658368"/>
+          </a:xfrm>
+          <a:prstGeom prst="rect">
+            <a:avLst/>
+          </a:prstGeom>
+          <a:noFill/>
+          <a:ln/>
+        </p:spPr>
+        <p:txBody>
+          <a:bodyPr wrap="square" lIns="0" tIns="0" rIns="0" bIns="0" rtlCol="0" anchor="ctr"/>
+          <a:lstStyle/>
+          <a:p>
+            <a:pPr algn="ctr" indent="0" marL="0">
+              <a:buNone/>
+            </a:pPr>
+            <a:r>
+              <a:rPr lang="en-US" sz="2700" b="1" dirty="0">
+                <a:solidFill>
+                  <a:srgbClr val="E7EEEC"/>
                 </a:solidFill>
                 <a:latin typeface="Cambria" pitchFamily="34" charset="0"/>
                 <a:ea typeface="Cambria" pitchFamily="34" charset="-122"/>
                 <a:cs typeface="Cambria" pitchFamily="34" charset="-120"/>
               </a:rPr>
-              <a:t>£1,084,060</a:t>
-            </a:r>
-            <a:endParaRPr lang="en-US" sz="3000" dirty="0"/>
-          </a:p>
-        </p:txBody>
-      </p:sp>
-      <p:sp>
-        <p:nvSpPr>
-          <p:cNvPr id="12" name="Text 10"/>
-          <p:cNvSpPr txBox="1"/>
-          <p:nvPr/>
-        </p:nvSpPr>
-        <p:spPr>
-          <a:xfrm>
-            <a:off x="4572000" y="3429000"/>
-            <a:ext cx="3108960" cy="658368"/>
-          </a:xfrm>
-          <a:prstGeom prst="rect">
-            <a:avLst/>
-          </a:prstGeom>
-          <a:noFill/>
-          <a:ln/>
-        </p:spPr>
-        <p:txBody>
-          <a:bodyPr wrap="square" lIns="0" tIns="0" rIns="0" bIns="0" rtlCol="0" anchor="ctr"/>
-          <a:lstStyle/>
-          <a:p>
-            <a:pPr indent="0" marL="0">
+              <a:t>£10,000</a:t>
+            </a:r>
+            <a:endParaRPr lang="en-US" sz="2700" dirty="0"/>
+          </a:p>
+        </p:txBody>
+      </p:sp>
+      <p:sp>
+        <p:nvSpPr>
+          <p:cNvPr id="13" name="Text 11"/>
+          <p:cNvSpPr txBox="1"/>
+          <p:nvPr/>
+        </p:nvSpPr>
+        <p:spPr>
+          <a:xfrm>
+            <a:off x="2944368" y="3584448"/>
+            <a:ext cx="1828800" cy="256032"/>
+          </a:xfrm>
+          <a:prstGeom prst="rect">
+            <a:avLst/>
+          </a:prstGeom>
+          <a:noFill/>
+          <a:ln/>
+        </p:spPr>
+        <p:txBody>
+          <a:bodyPr wrap="square" lIns="0" tIns="0" rIns="0" bIns="0" rtlCol="0" anchor="ctr"/>
+          <a:lstStyle/>
+          <a:p>
+            <a:pPr algn="ctr" indent="0" marL="0">
               <a:buNone/>
             </a:pPr>
             <a:r>
@@ -8660,7 +11144,7 @@
                 <a:ea typeface="Calibri" pitchFamily="34" charset="-122"/>
                 <a:cs typeface="Calibri" pitchFamily="34" charset="-120"/>
               </a:rPr>
-              <a:t>a 54% uplift — and 28% above our best month</a:t>
+              <a:t>each</a:t>
             </a:r>
             <a:endParaRPr lang="en-US" sz="1200" dirty="0"/>
           </a:p>
@@ -8668,14 +11152,53 @@
       </p:sp>
       <p:sp>
         <p:nvSpPr>
-          <p:cNvPr id="13" name="Shape 11"/>
+          <p:cNvPr id="14" name="Text 12"/>
+          <p:cNvSpPr txBox="1"/>
+          <p:nvPr/>
+        </p:nvSpPr>
+        <p:spPr>
+          <a:xfrm>
+            <a:off x="2916936" y="3968496"/>
+            <a:ext cx="1883664" cy="274320"/>
+          </a:xfrm>
+          <a:prstGeom prst="rect">
+            <a:avLst/>
+          </a:prstGeom>
+          <a:noFill/>
+          <a:ln/>
+        </p:spPr>
+        <p:txBody>
+          <a:bodyPr wrap="square" lIns="0" tIns="0" rIns="0" bIns="0" rtlCol="0" anchor="ctr"/>
+          <a:lstStyle/>
+          <a:p>
+            <a:pPr algn="ctr" indent="0" marL="0">
+              <a:buNone/>
+            </a:pPr>
+            <a:r>
+              <a:rPr lang="en-US" sz="1100" b="1" dirty="0">
+                <a:solidFill>
+                  <a:srgbClr val="0E8A94"/>
+                </a:solidFill>
+                <a:latin typeface="Courier New" pitchFamily="34" charset="0"/>
+                <a:ea typeface="Courier New" pitchFamily="34" charset="-122"/>
+                <a:cs typeface="Courier New" pitchFamily="34" charset="-120"/>
+              </a:rPr>
+              <a:t>£40,000 in total</a:t>
+            </a:r>
+            <a:endParaRPr lang="en-US" sz="1100" dirty="0"/>
+          </a:p>
+        </p:txBody>
+      </p:sp>
+      <p:sp>
+        <p:nvSpPr>
+          <p:cNvPr id="15" name="Shape 13"/>
           <p:cNvSpPr/>
           <p:nvPr/>
         </p:nvSpPr>
         <p:spPr>
           <a:xfrm>
-            <a:off x="8083296" y="2331720"/>
-            <a:ext cx="3566160" cy="1920240"/>
+            <a:off x="5065776" y="2331720"/>
+            <a:ext cx="2103120" cy="2240280"/>
           </a:xfrm>
           <a:prstGeom prst="rect">
             <a:avLst/>
@@ -8693,30 +11216,30 @@
       </p:sp>
       <p:sp>
         <p:nvSpPr>
-          <p:cNvPr id="14" name="Text 12"/>
-          <p:cNvSpPr txBox="1"/>
-          <p:nvPr/>
-        </p:nvSpPr>
-        <p:spPr>
-          <a:xfrm>
-            <a:off x="8339328" y="2532888"/>
-            <a:ext cx="3108960" cy="228600"/>
-          </a:xfrm>
-          <a:prstGeom prst="rect">
-            <a:avLst/>
-          </a:prstGeom>
-          <a:noFill/>
-          <a:ln/>
-        </p:spPr>
-        <p:txBody>
-          <a:bodyPr wrap="square" lIns="0" tIns="0" rIns="0" bIns="0" rtlCol="0" anchor="ctr"/>
-          <a:lstStyle/>
-          <a:p>
-            <a:pPr indent="0" marL="0">
-              <a:buNone/>
-            </a:pPr>
-            <a:r>
-              <a:rPr lang="en-US" sz="1050" b="1" spc="150" kern="0" dirty="0">
+          <p:cNvPr id="16" name="Text 14"/>
+          <p:cNvSpPr txBox="1"/>
+          <p:nvPr/>
+        </p:nvSpPr>
+        <p:spPr>
+          <a:xfrm>
+            <a:off x="5202936" y="2505456"/>
+            <a:ext cx="1828800" cy="310896"/>
+          </a:xfrm>
+          <a:prstGeom prst="rect">
+            <a:avLst/>
+          </a:prstGeom>
+          <a:noFill/>
+          <a:ln/>
+        </p:spPr>
+        <p:txBody>
+          <a:bodyPr wrap="square" lIns="0" tIns="0" rIns="0" bIns="0" rtlCol="0" anchor="ctr"/>
+          <a:lstStyle/>
+          <a:p>
+            <a:pPr algn="ctr" indent="0" marL="0">
+              <a:buNone/>
+            </a:pPr>
+            <a:r>
+              <a:rPr lang="en-US" sz="1400" b="1" dirty="0">
                 <a:solidFill>
                   <a:srgbClr val="8FA3A0"/>
                 </a:solidFill>
@@ -8724,73 +11247,73 @@
                 <a:ea typeface="Courier New" pitchFamily="34" charset="-122"/>
                 <a:cs typeface="Courier New" pitchFamily="34" charset="-120"/>
               </a:rPr>
-              <a:t>THE PRIZE</a:t>
-            </a:r>
-            <a:endParaRPr lang="en-US" sz="1050" dirty="0"/>
-          </a:p>
-        </p:txBody>
-      </p:sp>
-      <p:sp>
-        <p:nvSpPr>
-          <p:cNvPr id="15" name="Text 13"/>
-          <p:cNvSpPr txBox="1"/>
-          <p:nvPr/>
-        </p:nvSpPr>
-        <p:spPr>
-          <a:xfrm>
-            <a:off x="8339328" y="2807208"/>
-            <a:ext cx="3154680" cy="603504"/>
-          </a:xfrm>
-          <a:prstGeom prst="rect">
-            <a:avLst/>
-          </a:prstGeom>
-          <a:noFill/>
-          <a:ln/>
-        </p:spPr>
-        <p:txBody>
-          <a:bodyPr wrap="square" lIns="0" tIns="0" rIns="0" bIns="0" rtlCol="0" anchor="ctr"/>
-          <a:lstStyle/>
-          <a:p>
-            <a:pPr indent="0" marL="0">
-              <a:buNone/>
-            </a:pPr>
-            <a:r>
-              <a:rPr lang="en-US" sz="3000" b="1" dirty="0">
-                <a:solidFill>
-                  <a:srgbClr val="D2A017"/>
+              <a:t>£9.6m</a:t>
+            </a:r>
+            <a:endParaRPr lang="en-US" sz="1400" dirty="0"/>
+          </a:p>
+        </p:txBody>
+      </p:sp>
+      <p:sp>
+        <p:nvSpPr>
+          <p:cNvPr id="17" name="Text 15"/>
+          <p:cNvSpPr txBox="1"/>
+          <p:nvPr/>
+        </p:nvSpPr>
+        <p:spPr>
+          <a:xfrm>
+            <a:off x="5175504" y="2907792"/>
+            <a:ext cx="1883664" cy="658368"/>
+          </a:xfrm>
+          <a:prstGeom prst="rect">
+            <a:avLst/>
+          </a:prstGeom>
+          <a:noFill/>
+          <a:ln/>
+        </p:spPr>
+        <p:txBody>
+          <a:bodyPr wrap="square" lIns="0" tIns="0" rIns="0" bIns="0" rtlCol="0" anchor="ctr"/>
+          <a:lstStyle/>
+          <a:p>
+            <a:pPr algn="ctr" indent="0" marL="0">
+              <a:buNone/>
+            </a:pPr>
+            <a:r>
+              <a:rPr lang="en-US" sz="2700" b="1" dirty="0">
+                <a:solidFill>
+                  <a:srgbClr val="E7EEEC"/>
                 </a:solidFill>
                 <a:latin typeface="Cambria" pitchFamily="34" charset="0"/>
                 <a:ea typeface="Cambria" pitchFamily="34" charset="-122"/>
                 <a:cs typeface="Cambria" pitchFamily="34" charset="-120"/>
               </a:rPr>
-              <a:t>£25,000</a:t>
-            </a:r>
-            <a:endParaRPr lang="en-US" sz="3000" dirty="0"/>
-          </a:p>
-        </p:txBody>
-      </p:sp>
-      <p:sp>
-        <p:nvSpPr>
-          <p:cNvPr id="16" name="Text 14"/>
-          <p:cNvSpPr txBox="1"/>
-          <p:nvPr/>
-        </p:nvSpPr>
-        <p:spPr>
-          <a:xfrm>
-            <a:off x="8339328" y="3429000"/>
-            <a:ext cx="3108960" cy="658368"/>
-          </a:xfrm>
-          <a:prstGeom prst="rect">
-            <a:avLst/>
-          </a:prstGeom>
-          <a:noFill/>
-          <a:ln/>
-        </p:spPr>
-        <p:txBody>
-          <a:bodyPr wrap="square" lIns="0" tIns="0" rIns="0" bIns="0" rtlCol="0" anchor="ctr"/>
-          <a:lstStyle/>
-          <a:p>
-            <a:pPr indent="0" marL="0">
+              <a:t>£15,000</a:t>
+            </a:r>
+            <a:endParaRPr lang="en-US" sz="2700" dirty="0"/>
+          </a:p>
+        </p:txBody>
+      </p:sp>
+      <p:sp>
+        <p:nvSpPr>
+          <p:cNvPr id="18" name="Text 16"/>
+          <p:cNvSpPr txBox="1"/>
+          <p:nvPr/>
+        </p:nvSpPr>
+        <p:spPr>
+          <a:xfrm>
+            <a:off x="5202936" y="3584448"/>
+            <a:ext cx="1828800" cy="256032"/>
+          </a:xfrm>
+          <a:prstGeom prst="rect">
+            <a:avLst/>
+          </a:prstGeom>
+          <a:noFill/>
+          <a:ln/>
+        </p:spPr>
+        <p:txBody>
+          <a:bodyPr wrap="square" lIns="0" tIns="0" rIns="0" bIns="0" rtlCol="0" anchor="ctr"/>
+          <a:lstStyle/>
+          <a:p>
+            <a:pPr algn="ctr" indent="0" marL="0">
               <a:buNone/>
             </a:pPr>
             <a:r>
@@ -8802,7 +11325,7 @@
                 <a:ea typeface="Calibri" pitchFamily="34" charset="-122"/>
                 <a:cs typeface="Calibri" pitchFamily="34" charset="-120"/>
               </a:rPr>
-              <a:t>each for Emily, Stuart, Cassie and Megan</a:t>
+              <a:t>each</a:t>
             </a:r>
             <a:endParaRPr lang="en-US" sz="1200" dirty="0"/>
           </a:p>
@@ -8810,14 +11333,53 @@
       </p:sp>
       <p:sp>
         <p:nvSpPr>
-          <p:cNvPr id="17" name="Shape 15"/>
+          <p:cNvPr id="19" name="Text 17"/>
+          <p:cNvSpPr txBox="1"/>
+          <p:nvPr/>
+        </p:nvSpPr>
+        <p:spPr>
+          <a:xfrm>
+            <a:off x="5175504" y="3968496"/>
+            <a:ext cx="1883664" cy="274320"/>
+          </a:xfrm>
+          <a:prstGeom prst="rect">
+            <a:avLst/>
+          </a:prstGeom>
+          <a:noFill/>
+          <a:ln/>
+        </p:spPr>
+        <p:txBody>
+          <a:bodyPr wrap="square" lIns="0" tIns="0" rIns="0" bIns="0" rtlCol="0" anchor="ctr"/>
+          <a:lstStyle/>
+          <a:p>
+            <a:pPr algn="ctr" indent="0" marL="0">
+              <a:buNone/>
+            </a:pPr>
+            <a:r>
+              <a:rPr lang="en-US" sz="1100" b="1" dirty="0">
+                <a:solidFill>
+                  <a:srgbClr val="0E8A94"/>
+                </a:solidFill>
+                <a:latin typeface="Courier New" pitchFamily="34" charset="0"/>
+                <a:ea typeface="Courier New" pitchFamily="34" charset="-122"/>
+                <a:cs typeface="Courier New" pitchFamily="34" charset="-120"/>
+              </a:rPr>
+              <a:t>£60,000 in total</a:t>
+            </a:r>
+            <a:endParaRPr lang="en-US" sz="1100" dirty="0"/>
+          </a:p>
+        </p:txBody>
+      </p:sp>
+      <p:sp>
+        <p:nvSpPr>
+          <p:cNvPr id="20" name="Shape 18"/>
           <p:cNvSpPr/>
           <p:nvPr/>
         </p:nvSpPr>
         <p:spPr>
           <a:xfrm>
-            <a:off x="548640" y="4617720"/>
-            <a:ext cx="11091672" cy="493776"/>
+            <a:off x="7324344" y="2331720"/>
+            <a:ext cx="2103120" cy="2240280"/>
           </a:xfrm>
           <a:prstGeom prst="rect">
             <a:avLst/>
@@ -8835,63 +11397,180 @@
       </p:sp>
       <p:sp>
         <p:nvSpPr>
-          <p:cNvPr id="18" name="Text 16"/>
-          <p:cNvSpPr txBox="1"/>
-          <p:nvPr/>
-        </p:nvSpPr>
-        <p:spPr>
-          <a:xfrm>
-            <a:off x="822960" y="4617720"/>
-            <a:ext cx="10515600" cy="493776"/>
-          </a:xfrm>
-          <a:prstGeom prst="rect">
-            <a:avLst/>
-          </a:prstGeom>
-          <a:noFill/>
-          <a:ln/>
-        </p:spPr>
-        <p:txBody>
-          <a:bodyPr wrap="square" lIns="0" tIns="0" rIns="0" bIns="0" rtlCol="0" anchor="ctr"/>
-          <a:lstStyle/>
-          <a:p>
-            <a:pPr indent="0" marL="0">
-              <a:buNone/>
-            </a:pPr>
-            <a:r>
-              <a:rPr lang="en-US" sz="1350" dirty="0">
+          <p:cNvPr id="21" name="Text 19"/>
+          <p:cNvSpPr txBox="1"/>
+          <p:nvPr/>
+        </p:nvSpPr>
+        <p:spPr>
+          <a:xfrm>
+            <a:off x="7461504" y="2505456"/>
+            <a:ext cx="1828800" cy="310896"/>
+          </a:xfrm>
+          <a:prstGeom prst="rect">
+            <a:avLst/>
+          </a:prstGeom>
+          <a:noFill/>
+          <a:ln/>
+        </p:spPr>
+        <p:txBody>
+          <a:bodyPr wrap="square" lIns="0" tIns="0" rIns="0" bIns="0" rtlCol="0" anchor="ctr"/>
+          <a:lstStyle/>
+          <a:p>
+            <a:pPr algn="ctr" indent="0" marL="0">
+              <a:buNone/>
+            </a:pPr>
+            <a:r>
+              <a:rPr lang="en-US" sz="1400" b="1" dirty="0">
+                <a:solidFill>
+                  <a:srgbClr val="8FA3A0"/>
+                </a:solidFill>
+                <a:latin typeface="Courier New" pitchFamily="34" charset="0"/>
+                <a:ea typeface="Courier New" pitchFamily="34" charset="-122"/>
+                <a:cs typeface="Courier New" pitchFamily="34" charset="-120"/>
+              </a:rPr>
+              <a:t>£9.8m</a:t>
+            </a:r>
+            <a:endParaRPr lang="en-US" sz="1400" dirty="0"/>
+          </a:p>
+        </p:txBody>
+      </p:sp>
+      <p:sp>
+        <p:nvSpPr>
+          <p:cNvPr id="22" name="Text 20"/>
+          <p:cNvSpPr txBox="1"/>
+          <p:nvPr/>
+        </p:nvSpPr>
+        <p:spPr>
+          <a:xfrm>
+            <a:off x="7434072" y="2907792"/>
+            <a:ext cx="1883664" cy="658368"/>
+          </a:xfrm>
+          <a:prstGeom prst="rect">
+            <a:avLst/>
+          </a:prstGeom>
+          <a:noFill/>
+          <a:ln/>
+        </p:spPr>
+        <p:txBody>
+          <a:bodyPr wrap="square" lIns="0" tIns="0" rIns="0" bIns="0" rtlCol="0" anchor="ctr"/>
+          <a:lstStyle/>
+          <a:p>
+            <a:pPr algn="ctr" indent="0" marL="0">
+              <a:buNone/>
+            </a:pPr>
+            <a:r>
+              <a:rPr lang="en-US" sz="2700" b="1" dirty="0">
                 <a:solidFill>
                   <a:srgbClr val="E7EEEC"/>
+                </a:solidFill>
+                <a:latin typeface="Cambria" pitchFamily="34" charset="0"/>
+                <a:ea typeface="Cambria" pitchFamily="34" charset="-122"/>
+                <a:cs typeface="Cambria" pitchFamily="34" charset="-120"/>
+              </a:rPr>
+              <a:t>£20,000</a:t>
+            </a:r>
+            <a:endParaRPr lang="en-US" sz="2700" dirty="0"/>
+          </a:p>
+        </p:txBody>
+      </p:sp>
+      <p:sp>
+        <p:nvSpPr>
+          <p:cNvPr id="23" name="Text 21"/>
+          <p:cNvSpPr txBox="1"/>
+          <p:nvPr/>
+        </p:nvSpPr>
+        <p:spPr>
+          <a:xfrm>
+            <a:off x="7461504" y="3584448"/>
+            <a:ext cx="1828800" cy="256032"/>
+          </a:xfrm>
+          <a:prstGeom prst="rect">
+            <a:avLst/>
+          </a:prstGeom>
+          <a:noFill/>
+          <a:ln/>
+        </p:spPr>
+        <p:txBody>
+          <a:bodyPr wrap="square" lIns="0" tIns="0" rIns="0" bIns="0" rtlCol="0" anchor="ctr"/>
+          <a:lstStyle/>
+          <a:p>
+            <a:pPr algn="ctr" indent="0" marL="0">
+              <a:buNone/>
+            </a:pPr>
+            <a:r>
+              <a:rPr lang="en-US" sz="1200" dirty="0">
+                <a:solidFill>
+                  <a:srgbClr val="8FA3A0"/>
                 </a:solidFill>
                 <a:latin typeface="Calibri" pitchFamily="34" charset="0"/>
                 <a:ea typeface="Calibri" pitchFamily="34" charset="-122"/>
                 <a:cs typeface="Calibri" pitchFamily="34" charset="-120"/>
               </a:rPr>
-              <a:t>Close the Q1 habits — that quarter cost us £738,273 and we never got it back</a:t>
-            </a:r>
-            <a:endParaRPr lang="en-US" sz="1350" dirty="0"/>
-          </a:p>
-        </p:txBody>
-      </p:sp>
-      <p:sp>
-        <p:nvSpPr>
-          <p:cNvPr id="19" name="Shape 17"/>
+              <a:t>each</a:t>
+            </a:r>
+            <a:endParaRPr lang="en-US" sz="1200" dirty="0"/>
+          </a:p>
+        </p:txBody>
+      </p:sp>
+      <p:sp>
+        <p:nvSpPr>
+          <p:cNvPr id="24" name="Text 22"/>
+          <p:cNvSpPr txBox="1"/>
+          <p:nvPr/>
+        </p:nvSpPr>
+        <p:spPr>
+          <a:xfrm>
+            <a:off x="7434072" y="3968496"/>
+            <a:ext cx="1883664" cy="274320"/>
+          </a:xfrm>
+          <a:prstGeom prst="rect">
+            <a:avLst/>
+          </a:prstGeom>
+          <a:noFill/>
+          <a:ln/>
+        </p:spPr>
+        <p:txBody>
+          <a:bodyPr wrap="square" lIns="0" tIns="0" rIns="0" bIns="0" rtlCol="0" anchor="ctr"/>
+          <a:lstStyle/>
+          <a:p>
+            <a:pPr algn="ctr" indent="0" marL="0">
+              <a:buNone/>
+            </a:pPr>
+            <a:r>
+              <a:rPr lang="en-US" sz="1100" b="1" dirty="0">
+                <a:solidFill>
+                  <a:srgbClr val="0E8A94"/>
+                </a:solidFill>
+                <a:latin typeface="Courier New" pitchFamily="34" charset="0"/>
+                <a:ea typeface="Courier New" pitchFamily="34" charset="-122"/>
+                <a:cs typeface="Courier New" pitchFamily="34" charset="-120"/>
+              </a:rPr>
+              <a:t>£80,000 in total</a:t>
+            </a:r>
+            <a:endParaRPr lang="en-US" sz="1100" dirty="0"/>
+          </a:p>
+        </p:txBody>
+      </p:sp>
+      <p:sp>
+        <p:nvSpPr>
+          <p:cNvPr id="25" name="Shape 23"/>
           <p:cNvSpPr/>
           <p:nvPr/>
         </p:nvSpPr>
         <p:spPr>
           <a:xfrm>
-            <a:off x="548640" y="5184648"/>
-            <a:ext cx="11091672" cy="493776"/>
+            <a:off x="9582912" y="2331720"/>
+            <a:ext cx="2103120" cy="2240280"/>
           </a:xfrm>
           <a:prstGeom prst="rect">
             <a:avLst/>
           </a:prstGeom>
           <a:solidFill>
-            <a:srgbClr val="1B2E2C"/>
+            <a:srgbClr val="B58A00"/>
           </a:solidFill>
           <a:ln w="12700">
             <a:solidFill>
-              <a:srgbClr val="24403D"/>
+              <a:srgbClr val="B58A00"/>
             </a:solidFill>
             <a:prstDash val="solid"/>
           </a:ln>
@@ -8899,78 +11578,170 @@
       </p:sp>
       <p:sp>
         <p:nvSpPr>
-          <p:cNvPr id="20" name="Text 18"/>
-          <p:cNvSpPr txBox="1"/>
-          <p:nvPr/>
-        </p:nvSpPr>
-        <p:spPr>
-          <a:xfrm>
-            <a:off x="822960" y="5184648"/>
-            <a:ext cx="10515600" cy="493776"/>
-          </a:xfrm>
-          <a:prstGeom prst="rect">
-            <a:avLst/>
-          </a:prstGeom>
-          <a:noFill/>
-          <a:ln/>
-        </p:spPr>
-        <p:txBody>
-          <a:bodyPr wrap="square" lIns="0" tIns="0" rIns="0" bIns="0" rtlCol="0" anchor="ctr"/>
-          <a:lstStyle/>
-          <a:p>
-            <a:pPr indent="0" marL="0">
-              <a:buNone/>
-            </a:pPr>
-            <a:r>
-              <a:rPr lang="en-US" sz="1350" dirty="0">
-                <a:solidFill>
-                  <a:srgbClr val="E7EEEC"/>
+          <p:cNvPr id="26" name="Text 24"/>
+          <p:cNvSpPr txBox="1"/>
+          <p:nvPr/>
+        </p:nvSpPr>
+        <p:spPr>
+          <a:xfrm>
+            <a:off x="9720072" y="2505456"/>
+            <a:ext cx="1828800" cy="310896"/>
+          </a:xfrm>
+          <a:prstGeom prst="rect">
+            <a:avLst/>
+          </a:prstGeom>
+          <a:noFill/>
+          <a:ln/>
+        </p:spPr>
+        <p:txBody>
+          <a:bodyPr wrap="square" lIns="0" tIns="0" rIns="0" bIns="0" rtlCol="0" anchor="ctr"/>
+          <a:lstStyle/>
+          <a:p>
+            <a:pPr algn="ctr" indent="0" marL="0">
+              <a:buNone/>
+            </a:pPr>
+            <a:r>
+              <a:rPr lang="en-US" sz="1400" b="1" dirty="0">
+                <a:solidFill>
+                  <a:srgbClr val="14201E"/>
+                </a:solidFill>
+                <a:latin typeface="Courier New" pitchFamily="34" charset="0"/>
+                <a:ea typeface="Courier New" pitchFamily="34" charset="-122"/>
+                <a:cs typeface="Courier New" pitchFamily="34" charset="-120"/>
+              </a:rPr>
+              <a:t>£10.0m</a:t>
+            </a:r>
+            <a:endParaRPr lang="en-US" sz="1400" dirty="0"/>
+          </a:p>
+        </p:txBody>
+      </p:sp>
+      <p:sp>
+        <p:nvSpPr>
+          <p:cNvPr id="27" name="Text 25"/>
+          <p:cNvSpPr txBox="1"/>
+          <p:nvPr/>
+        </p:nvSpPr>
+        <p:spPr>
+          <a:xfrm>
+            <a:off x="9692640" y="2907792"/>
+            <a:ext cx="1883664" cy="658368"/>
+          </a:xfrm>
+          <a:prstGeom prst="rect">
+            <a:avLst/>
+          </a:prstGeom>
+          <a:noFill/>
+          <a:ln/>
+        </p:spPr>
+        <p:txBody>
+          <a:bodyPr wrap="square" lIns="0" tIns="0" rIns="0" bIns="0" rtlCol="0" anchor="ctr"/>
+          <a:lstStyle/>
+          <a:p>
+            <a:pPr algn="ctr" indent="0" marL="0">
+              <a:buNone/>
+            </a:pPr>
+            <a:r>
+              <a:rPr lang="en-US" sz="3100" b="1" dirty="0">
+                <a:solidFill>
+                  <a:srgbClr val="14201E"/>
+                </a:solidFill>
+                <a:latin typeface="Cambria" pitchFamily="34" charset="0"/>
+                <a:ea typeface="Cambria" pitchFamily="34" charset="-122"/>
+                <a:cs typeface="Cambria" pitchFamily="34" charset="-120"/>
+              </a:rPr>
+              <a:t>£25,000</a:t>
+            </a:r>
+            <a:endParaRPr lang="en-US" sz="3100" dirty="0"/>
+          </a:p>
+        </p:txBody>
+      </p:sp>
+      <p:sp>
+        <p:nvSpPr>
+          <p:cNvPr id="28" name="Text 26"/>
+          <p:cNvSpPr txBox="1"/>
+          <p:nvPr/>
+        </p:nvSpPr>
+        <p:spPr>
+          <a:xfrm>
+            <a:off x="9720072" y="3584448"/>
+            <a:ext cx="1828800" cy="256032"/>
+          </a:xfrm>
+          <a:prstGeom prst="rect">
+            <a:avLst/>
+          </a:prstGeom>
+          <a:noFill/>
+          <a:ln/>
+        </p:spPr>
+        <p:txBody>
+          <a:bodyPr wrap="square" lIns="0" tIns="0" rIns="0" bIns="0" rtlCol="0" anchor="ctr"/>
+          <a:lstStyle/>
+          <a:p>
+            <a:pPr algn="ctr" indent="0" marL="0">
+              <a:buNone/>
+            </a:pPr>
+            <a:r>
+              <a:rPr lang="en-US" sz="1200" dirty="0">
+                <a:solidFill>
+                  <a:srgbClr val="14201E"/>
                 </a:solidFill>
                 <a:latin typeface="Calibri" pitchFamily="34" charset="0"/>
                 <a:ea typeface="Calibri" pitchFamily="34" charset="-122"/>
                 <a:cs typeface="Calibri" pitchFamily="34" charset="-120"/>
               </a:rPr>
-              <a:t>July and August ran at 53% of target. Q4 cannot look like that</a:t>
-            </a:r>
-            <a:endParaRPr lang="en-US" sz="1350" dirty="0"/>
-          </a:p>
-        </p:txBody>
-      </p:sp>
-      <p:sp>
-        <p:nvSpPr>
-          <p:cNvPr id="21" name="Shape 19"/>
-          <p:cNvSpPr/>
-          <p:nvPr/>
-        </p:nvSpPr>
-        <p:spPr>
-          <a:xfrm>
-            <a:off x="548640" y="5751576"/>
-            <a:ext cx="11091672" cy="493776"/>
-          </a:xfrm>
-          <a:prstGeom prst="rect">
-            <a:avLst/>
-          </a:prstGeom>
-          <a:solidFill>
-            <a:srgbClr val="1B2E2C"/>
-          </a:solidFill>
-          <a:ln w="12700">
-            <a:solidFill>
-              <a:srgbClr val="24403D"/>
-            </a:solidFill>
-            <a:prstDash val="solid"/>
-          </a:ln>
-        </p:spPr>
-      </p:sp>
-      <p:sp>
-        <p:nvSpPr>
-          <p:cNvPr id="22" name="Text 20"/>
-          <p:cNvSpPr txBox="1"/>
-          <p:nvPr/>
-        </p:nvSpPr>
-        <p:spPr>
-          <a:xfrm>
-            <a:off x="822960" y="5751576"/>
-            <a:ext cx="10515600" cy="493776"/>
+              <a:t>each</a:t>
+            </a:r>
+            <a:endParaRPr lang="en-US" sz="1200" dirty="0"/>
+          </a:p>
+        </p:txBody>
+      </p:sp>
+      <p:sp>
+        <p:nvSpPr>
+          <p:cNvPr id="29" name="Text 27"/>
+          <p:cNvSpPr txBox="1"/>
+          <p:nvPr/>
+        </p:nvSpPr>
+        <p:spPr>
+          <a:xfrm>
+            <a:off x="9692640" y="3968496"/>
+            <a:ext cx="1883664" cy="274320"/>
+          </a:xfrm>
+          <a:prstGeom prst="rect">
+            <a:avLst/>
+          </a:prstGeom>
+          <a:noFill/>
+          <a:ln/>
+        </p:spPr>
+        <p:txBody>
+          <a:bodyPr wrap="square" lIns="0" tIns="0" rIns="0" bIns="0" rtlCol="0" anchor="ctr"/>
+          <a:lstStyle/>
+          <a:p>
+            <a:pPr algn="ctr" indent="0" marL="0">
+              <a:buNone/>
+            </a:pPr>
+            <a:r>
+              <a:rPr lang="en-US" sz="1100" b="1" dirty="0">
+                <a:solidFill>
+                  <a:srgbClr val="14201E"/>
+                </a:solidFill>
+                <a:latin typeface="Courier New" pitchFamily="34" charset="0"/>
+                <a:ea typeface="Courier New" pitchFamily="34" charset="-122"/>
+                <a:cs typeface="Courier New" pitchFamily="34" charset="-120"/>
+              </a:rPr>
+              <a:t>£100,000 in total</a:t>
+            </a:r>
+            <a:endParaRPr lang="en-US" sz="1100" dirty="0"/>
+          </a:p>
+        </p:txBody>
+      </p:sp>
+      <p:sp>
+        <p:nvSpPr>
+          <p:cNvPr id="30" name="Text 28"/>
+          <p:cNvSpPr txBox="1"/>
+          <p:nvPr/>
+        </p:nvSpPr>
+        <p:spPr>
+          <a:xfrm>
+            <a:off x="548640" y="4846320"/>
+            <a:ext cx="11091672" cy="457200"/>
           </a:xfrm>
           <a:prstGeom prst="rect">
             <a:avLst/>
@@ -8986,7 +11757,7 @@
               <a:buNone/>
             </a:pPr>
             <a:r>
-              <a:rPr lang="en-US" sz="1350" dirty="0">
+              <a:rPr lang="en-US" sz="1500" dirty="0">
                 <a:solidFill>
                   <a:srgbClr val="E7EEEC"/>
                 </a:solidFill>
@@ -8994,9 +11765,48 @@
                 <a:ea typeface="Calibri" pitchFamily="34" charset="-122"/>
                 <a:cs typeface="Calibri" pitchFamily="34" charset="-120"/>
               </a:rPr>
-              <a:t>T6 and T3 carry the practice. Their capacity is the ceiling on all of this</a:t>
-            </a:r>
-            <a:endParaRPr lang="en-US" sz="1350" dirty="0"/>
+              <a:t>Ten million means £25,000 each — £100,000 shared between the four of you, out of £1,000,000 of fee income above the goal.</a:t>
+            </a:r>
+            <a:endParaRPr lang="en-US" sz="1500" dirty="0"/>
+          </a:p>
+        </p:txBody>
+      </p:sp>
+      <p:sp>
+        <p:nvSpPr>
+          <p:cNvPr id="31" name="Text 29"/>
+          <p:cNvSpPr txBox="1"/>
+          <p:nvPr/>
+        </p:nvSpPr>
+        <p:spPr>
+          <a:xfrm>
+            <a:off x="548640" y="5897880"/>
+            <a:ext cx="11091672" cy="411480"/>
+          </a:xfrm>
+          <a:prstGeom prst="rect">
+            <a:avLst/>
+          </a:prstGeom>
+          <a:noFill/>
+          <a:ln/>
+        </p:spPr>
+        <p:txBody>
+          <a:bodyPr wrap="square" lIns="0" tIns="0" rIns="0" bIns="0" rtlCol="0" anchor="ctr"/>
+          <a:lstStyle/>
+          <a:p>
+            <a:pPr indent="0" marL="0">
+              <a:buNone/>
+            </a:pPr>
+            <a:r>
+              <a:rPr lang="en-US" sz="1100" i="1" dirty="0">
+                <a:solidFill>
+                  <a:srgbClr val="8FA3A0"/>
+                </a:solidFill>
+                <a:latin typeface="Calibri" pitchFamily="34" charset="0"/>
+                <a:ea typeface="Calibri" pitchFamily="34" charset="-122"/>
+                <a:cs typeface="Calibri" pitchFamily="34" charset="-120"/>
+              </a:rPr>
+              <a:t>Measured on fees invoiced, not cash collected. The scheme pays 10% of everything above £9m at every rung. Payment date to be confirmed.</a:t>
+            </a:r>
+            <a:endParaRPr lang="en-US" sz="1100" dirty="0"/>
           </a:p>
         </p:txBody>
       </p:sp>

--- a/reports/ytd-road-to-9m.pptx
+++ b/reports/ytd-road-to-9m.pptx
@@ -1201,16 +1201,16 @@
                 <c:ptCount val="4"/>
                 <c:lvl>
                   <c:pt idx="0">
-                    <c:v>Week 1</c:v>
+                    <c:v>1–4 Sep</c:v>
                   </c:pt>
                   <c:pt idx="1">
-                    <c:v>Week 2</c:v>
+                    <c:v>7–11 Sep</c:v>
                   </c:pt>
                   <c:pt idx="2">
-                    <c:v>Week 3</c:v>
+                    <c:v>14–18 Sep</c:v>
                   </c:pt>
                   <c:pt idx="3">
-                    <c:v>Week 4</c:v>
+                    <c:v>21–25 Sep</c:v>
                   </c:pt>
                 </c:lvl>
               </c:multiLvlStrCache>
@@ -1291,16 +1291,16 @@
                 <c:ptCount val="4"/>
                 <c:lvl>
                   <c:pt idx="0">
-                    <c:v>Week 1</c:v>
+                    <c:v>1–4 Sep</c:v>
                   </c:pt>
                   <c:pt idx="1">
-                    <c:v>Week 2</c:v>
+                    <c:v>7–11 Sep</c:v>
                   </c:pt>
                   <c:pt idx="2">
-                    <c:v>Week 3</c:v>
+                    <c:v>14–18 Sep</c:v>
                   </c:pt>
                   <c:pt idx="3">
-                    <c:v>Week 4</c:v>
+                    <c:v>21–25 Sep</c:v>
                   </c:pt>
                 </c:lvl>
               </c:multiLvlStrCache>
@@ -2862,7 +2862,7 @@
           <a:p>
             <a:r>
               <a:rPr lang="en-US" dirty="0"/>
-              <a:t>September is the last month of quarter three. &lt;break time="0.7s"/&gt; It needs eight hundred and twenty one thousand. &lt;break time="0.6s"/&gt; Two hundred and forty six thousand is already banked from week one. &lt;break time="0.7s"/&gt; That leaves five hundred and seventy five thousand across the three weeks left. &lt;break time="0.7s"/&gt; One hundred and ninety two thousand a week. &lt;break time="0.6s"/&gt; We beat that pace last week. &lt;break time="0.9s"/&gt;</a:t>
+              <a:t>September is the last month of quarter three. &lt;break time="0.7s"/&gt; It needs eight hundred and twenty one thousand. &lt;break time="0.6s"/&gt; Two hundred and forty six thousand is already banked from the first four days. &lt;break time="0.7s"/&gt; That leaves five hundred and seventy five thousand across the three weeks left. &lt;break time="0.7s"/&gt; One hundred and ninety two thousand a week. &lt;break time="0.6s"/&gt; We beat that pace last week. &lt;break time="0.9s"/&gt;</a:t>
             </a:r>
             <a:endParaRPr lang="en-US" dirty="0"/>
           </a:p>
@@ -7159,7 +7159,7 @@
                 <a:ea typeface="Calibri" pitchFamily="34" charset="-122"/>
                 <a:cs typeface="Calibri" pitchFamily="34" charset="-120"/>
               </a:rPr>
-              <a:t>September needs £820,902. £246,274 is already banked from week one, which leaves £574,628 across the three weeks that remain.</a:t>
+              <a:t>September needs £820,902. £246,274 is already banked from 1–4 September, leaving £574,628 across the three full weeks that remain — with 28–30 September as headroom.</a:t>
             </a:r>
             <a:endParaRPr lang="en-US" sz="1500" dirty="0"/>
           </a:p>
@@ -7342,7 +7342,7 @@
                 <a:ea typeface="Courier New" pitchFamily="34" charset="-122"/>
                 <a:cs typeface="Courier New" pitchFamily="34" charset="-120"/>
               </a:rPr>
-              <a:t>BANKED, WEEK 1</a:t>
+              <a:t>BANKED, 1–4 SEP</a:t>
             </a:r>
             <a:endParaRPr lang="en-US" sz="1050" dirty="0"/>
           </a:p>
@@ -7445,7 +7445,7 @@
                 <a:ea typeface="Courier New" pitchFamily="34" charset="-122"/>
                 <a:cs typeface="Courier New" pitchFamily="34" charset="-120"/>
               </a:rPr>
-              <a:t>PER WEEK, W2–W4</a:t>
+              <a:t>PER WEEK, REMAINING</a:t>
             </a:r>
             <a:endParaRPr lang="en-US" sz="1050" dirty="0"/>
           </a:p>
@@ -9942,7 +9942,7 @@
                 <a:ea typeface="Calibri" pitchFamily="34" charset="-122"/>
                 <a:cs typeface="Calibri" pitchFamily="34" charset="-120"/>
               </a:rPr>
-              <a:t>Beat target in week one. Keep that weekly discipline through Q4</a:t>
+              <a:t>Beat target in the opening week of September. Keep that discipline through Q4</a:t>
             </a:r>
             <a:endParaRPr lang="en-US" sz="1150" dirty="0"/>
           </a:p>
